--- a/day2-deck/decks/Voice AI - Flai.pptx
+++ b/day2-deck/decks/Voice AI - Flai.pptx
@@ -503,7 +503,7 @@
           <a:p>
             <a:r>
               <a:rPr lang="en-US" dirty="0"/>
-              <a:t>Source: Flai voice AI dashboard, Service view, standings export, Jul 26 - Oct 26, 2026 (93 days). Flai's location names (26 with calls). Pickup rate and resolution as Flai reports them. Flai's estimated savings, revenue and profit are not used. Handled by the AI alone = calls - transfers (the export has no separate column for it). Not picked up = transfers x (1 - pickup rate), from Flai's group figures.</a:t>
+              <a:t>Source: Flai voice AI dashboard, Service view, standings export, Jul 26 - Oct 26, 2026 (93 days). Flai's location names (26 with calls). Pickup rate and resolution as Flai reports them. Flai's estimated savings, revenue and profit are not used. Handled by the AI alone = calls - transfers (the export has no separate column for it). Not picked up = transfers x (1 - pickup rate), from Flai's group figures. Value: half of the missed transfers x $${gpr.toFixed(2)} average customer-pay gross per RO (Qlik - Closed Repair Orders, labor + parts gross, Jan-Sep 2026, same-store) = $${fmt(missedVal)}.</a:t>
             </a:r>
             <a:endParaRPr lang="en-US" dirty="0"/>
           </a:p>
@@ -1713,7 +1713,7 @@
                 <a:ea typeface="Inter" pitchFamily="34" charset="-122"/>
                 <a:cs typeface="Inter" pitchFamily="34" charset="-120"/>
               </a:rPr>
-              <a:t>About 13,710 transferred calls were not picked up by a person.</a:t>
+              <a:t>About 13,710 transfers missed. If half wanted an appointment, that is $2.3M of gross profit.</a:t>
             </a:r>
             <a:endParaRPr lang="en-US" sz="1400" dirty="0"/>
           </a:p>

--- a/day2-deck/decks/Voice AI - Flai.pptx
+++ b/day2-deck/decks/Voice AI - Flai.pptx
@@ -503,7 +503,7 @@
           <a:p>
             <a:r>
               <a:rPr lang="en-US" dirty="0"/>
-              <a:t>Source: Flai voice AI dashboard, Service view, standings export, Jul 26 - Oct 26, 2026 (93 days). Flai's location names (26 with calls). Pickup rate and resolution as Flai reports them. Flai's estimated savings, revenue and profit are not used. Handled by the AI alone = calls - transfers (the export has no separate column for it). Not picked up = transfers x (1 - pickup rate), from Flai's group figures. Value: half of the missed transfers x $${gpr.toFixed(2)} average customer-pay gross per RO (Qlik - Closed Repair Orders, labor + parts gross, Jan-Sep 2026, same-store) = $${fmt(missedVal)}.</a:t>
+              <a:t>Source: Flai voice AI dashboard, Service view, standings export, Jul 26 - Oct 26, 2026 (93 days). Flai's location names (26 with calls). Pickup rate and resolution as Flai reports them. Flai's estimated savings, revenue and profit are not used. Handled by the AI alone = calls - transfers (the export has no separate column for it). Not picked up = transfers x (1 - pickup rate), from Flai's group figures. Value: half of the missed transfers x $384.67 average gross per customer-pay or warranty RO (CP labor + parts gross $95.7M, Qlik Closed ROs, plus warranty gross $47.1M, P&amp;L, over 371,180 CP &amp; W ROs, Jan-Sep 2026, same-store) = $2,636,879.</a:t>
             </a:r>
             <a:endParaRPr lang="en-US" dirty="0"/>
           </a:p>
@@ -1236,7 +1236,7 @@
                 <a:ea typeface="Inter" pitchFamily="34" charset="-122"/>
                 <a:cs typeface="Inter" pitchFamily="34" charset="-120"/>
               </a:rPr>
-              <a:t>About 526 a day across 26 locations, average call 1:49.</a:t>
+              <a:t>About 526 a day across 26 locations.</a:t>
             </a:r>
             <a:endParaRPr lang="en-US" sz="1400" dirty="0"/>
           </a:p>
@@ -1713,7 +1713,7 @@
                 <a:ea typeface="Inter" pitchFamily="34" charset="-122"/>
                 <a:cs typeface="Inter" pitchFamily="34" charset="-120"/>
               </a:rPr>
-              <a:t>About 13,710 transfers missed. If half wanted an appointment, that is $2.3M of gross profit.</a:t>
+              <a:t>About 13,710 transfers missed. If half wanted an appointment, that is $2.6M of gross profit.</a:t>
             </a:r>
             <a:endParaRPr lang="en-US" sz="1400" dirty="0"/>
           </a:p>

--- a/day2-deck/decks/Voice AI - Flai.pptx
+++ b/day2-deck/decks/Voice AI - Flai.pptx
@@ -1752,7 +1752,7 @@
                 <a:ea typeface="Inter" pitchFamily="34" charset="-122"/>
                 <a:cs typeface="Inter" pitchFamily="34" charset="-120"/>
               </a:rPr>
-              <a:t>Service calls answered by Flai, our voice AI, over the last 90 days (Jul 26 – Oct 26, 2026). The AI books and routes the call; the store still has to answer the transfer and close every callback in the Flai dashboard.</a:t>
+              <a:t>The AI books and routes the call; the store still has to answer the transfer and close every callback in the Flai dashboard. Source: Flai service calls, last 90 days.</a:t>
             </a:r>
             <a:endParaRPr lang="en-US" sz="1700" dirty="0"/>
           </a:p>

--- a/day2-deck/decks/Voice AI - Flai.pptx
+++ b/day2-deck/decks/Voice AI - Flai.pptx
@@ -2191,7 +2191,7 @@
         <p:spPr>
           <a:xfrm>
             <a:off x="621792" y="2167128"/>
-            <a:ext cx="1673352" cy="314221"/>
+            <a:ext cx="1673352" cy="345643"/>
           </a:xfrm>
           <a:prstGeom prst="rect">
             <a:avLst/>
@@ -2230,7 +2230,7 @@
         <p:spPr>
           <a:xfrm>
             <a:off x="2313432" y="2167128"/>
-            <a:ext cx="731520" cy="314221"/>
+            <a:ext cx="731520" cy="345643"/>
           </a:xfrm>
           <a:prstGeom prst="rect">
             <a:avLst/>
@@ -2269,7 +2269,7 @@
         <p:spPr>
           <a:xfrm>
             <a:off x="3063240" y="2167128"/>
-            <a:ext cx="914400" cy="314221"/>
+            <a:ext cx="914400" cy="345643"/>
           </a:xfrm>
           <a:prstGeom prst="rect">
             <a:avLst/>
@@ -2308,7 +2308,7 @@
         <p:spPr>
           <a:xfrm>
             <a:off x="4023360" y="2203704"/>
-            <a:ext cx="54864" cy="241069"/>
+            <a:ext cx="54864" cy="272491"/>
           </a:xfrm>
           <a:prstGeom prst="rect">
             <a:avLst/>
@@ -2327,8 +2327,8 @@
         </p:nvSpPr>
         <p:spPr>
           <a:xfrm>
-            <a:off x="621792" y="2481349"/>
-            <a:ext cx="1673352" cy="314221"/>
+            <a:off x="621792" y="2512771"/>
+            <a:ext cx="1673352" cy="345643"/>
           </a:xfrm>
           <a:prstGeom prst="rect">
             <a:avLst/>
@@ -2366,8 +2366,8 @@
         </p:nvSpPr>
         <p:spPr>
           <a:xfrm>
-            <a:off x="2313432" y="2481349"/>
-            <a:ext cx="731520" cy="314221"/>
+            <a:off x="2313432" y="2512771"/>
+            <a:ext cx="731520" cy="345643"/>
           </a:xfrm>
           <a:prstGeom prst="rect">
             <a:avLst/>
@@ -2405,8 +2405,8 @@
         </p:nvSpPr>
         <p:spPr>
           <a:xfrm>
-            <a:off x="3063240" y="2481349"/>
-            <a:ext cx="914400" cy="314221"/>
+            <a:off x="3063240" y="2512771"/>
+            <a:ext cx="914400" cy="345643"/>
           </a:xfrm>
           <a:prstGeom prst="rect">
             <a:avLst/>
@@ -2444,8 +2444,8 @@
         </p:nvSpPr>
         <p:spPr>
           <a:xfrm>
-            <a:off x="621792" y="2795570"/>
-            <a:ext cx="1673352" cy="314221"/>
+            <a:off x="621792" y="2858414"/>
+            <a:ext cx="1673352" cy="345643"/>
           </a:xfrm>
           <a:prstGeom prst="rect">
             <a:avLst/>
@@ -2483,8 +2483,8 @@
         </p:nvSpPr>
         <p:spPr>
           <a:xfrm>
-            <a:off x="2313432" y="2795570"/>
-            <a:ext cx="731520" cy="314221"/>
+            <a:off x="2313432" y="2858414"/>
+            <a:ext cx="731520" cy="345643"/>
           </a:xfrm>
           <a:prstGeom prst="rect">
             <a:avLst/>
@@ -2522,8 +2522,8 @@
         </p:nvSpPr>
         <p:spPr>
           <a:xfrm>
-            <a:off x="3063240" y="2795570"/>
-            <a:ext cx="914400" cy="314221"/>
+            <a:off x="3063240" y="2858414"/>
+            <a:ext cx="914400" cy="345643"/>
           </a:xfrm>
           <a:prstGeom prst="rect">
             <a:avLst/>
@@ -2561,8 +2561,8 @@
         </p:nvSpPr>
         <p:spPr>
           <a:xfrm>
-            <a:off x="4023360" y="2832146"/>
-            <a:ext cx="54864" cy="241069"/>
+            <a:off x="4023360" y="2894990"/>
+            <a:ext cx="54864" cy="272491"/>
           </a:xfrm>
           <a:prstGeom prst="rect">
             <a:avLst/>
@@ -2581,8 +2581,8 @@
         </p:nvSpPr>
         <p:spPr>
           <a:xfrm>
-            <a:off x="621792" y="3109791"/>
-            <a:ext cx="1673352" cy="314221"/>
+            <a:off x="621792" y="3204058"/>
+            <a:ext cx="1673352" cy="345643"/>
           </a:xfrm>
           <a:prstGeom prst="rect">
             <a:avLst/>
@@ -2620,8 +2620,8 @@
         </p:nvSpPr>
         <p:spPr>
           <a:xfrm>
-            <a:off x="2313432" y="3109791"/>
-            <a:ext cx="731520" cy="314221"/>
+            <a:off x="2313432" y="3204058"/>
+            <a:ext cx="731520" cy="345643"/>
           </a:xfrm>
           <a:prstGeom prst="rect">
             <a:avLst/>
@@ -2659,8 +2659,8 @@
         </p:nvSpPr>
         <p:spPr>
           <a:xfrm>
-            <a:off x="3063240" y="3109791"/>
-            <a:ext cx="914400" cy="314221"/>
+            <a:off x="3063240" y="3204058"/>
+            <a:ext cx="914400" cy="345643"/>
           </a:xfrm>
           <a:prstGeom prst="rect">
             <a:avLst/>
@@ -2698,8 +2698,8 @@
         </p:nvSpPr>
         <p:spPr>
           <a:xfrm>
-            <a:off x="4023360" y="3146367"/>
-            <a:ext cx="54864" cy="241069"/>
+            <a:off x="4023360" y="3240634"/>
+            <a:ext cx="54864" cy="272491"/>
           </a:xfrm>
           <a:prstGeom prst="rect">
             <a:avLst/>
@@ -2718,8 +2718,8 @@
         </p:nvSpPr>
         <p:spPr>
           <a:xfrm>
-            <a:off x="621792" y="3424012"/>
-            <a:ext cx="1673352" cy="314221"/>
+            <a:off x="621792" y="3549701"/>
+            <a:ext cx="1673352" cy="345643"/>
           </a:xfrm>
           <a:prstGeom prst="rect">
             <a:avLst/>
@@ -2757,8 +2757,8 @@
         </p:nvSpPr>
         <p:spPr>
           <a:xfrm>
-            <a:off x="2313432" y="3424012"/>
-            <a:ext cx="731520" cy="314221"/>
+            <a:off x="2313432" y="3549701"/>
+            <a:ext cx="731520" cy="345643"/>
           </a:xfrm>
           <a:prstGeom prst="rect">
             <a:avLst/>
@@ -2796,8 +2796,8 @@
         </p:nvSpPr>
         <p:spPr>
           <a:xfrm>
-            <a:off x="3063240" y="3424012"/>
-            <a:ext cx="914400" cy="314221"/>
+            <a:off x="3063240" y="3549701"/>
+            <a:ext cx="914400" cy="345643"/>
           </a:xfrm>
           <a:prstGeom prst="rect">
             <a:avLst/>
@@ -2835,8 +2835,8 @@
         </p:nvSpPr>
         <p:spPr>
           <a:xfrm>
-            <a:off x="4023360" y="3460588"/>
-            <a:ext cx="54864" cy="241069"/>
+            <a:off x="4023360" y="3586277"/>
+            <a:ext cx="54864" cy="272491"/>
           </a:xfrm>
           <a:prstGeom prst="rect">
             <a:avLst/>
@@ -2855,7 +2855,7 @@
         </p:nvSpPr>
         <p:spPr>
           <a:xfrm>
-            <a:off x="621792" y="4070743"/>
+            <a:off x="621792" y="3913632"/>
             <a:ext cx="3355848" cy="22860"/>
           </a:xfrm>
           <a:prstGeom prst="rect">
@@ -2875,7 +2875,7 @@
         </p:nvSpPr>
         <p:spPr>
           <a:xfrm>
-            <a:off x="621792" y="4098175"/>
+            <a:off x="621792" y="3941064"/>
             <a:ext cx="1828800" cy="219456"/>
           </a:xfrm>
           <a:prstGeom prst="rect">
@@ -2914,7 +2914,7 @@
         </p:nvSpPr>
         <p:spPr>
           <a:xfrm>
-            <a:off x="2313432" y="4098175"/>
+            <a:off x="2313432" y="3941064"/>
             <a:ext cx="731520" cy="219456"/>
           </a:xfrm>
           <a:prstGeom prst="rect">
@@ -2953,7 +2953,7 @@
         </p:nvSpPr>
         <p:spPr>
           <a:xfrm>
-            <a:off x="3063240" y="4098175"/>
+            <a:off x="3063240" y="3941064"/>
             <a:ext cx="914400" cy="219456"/>
           </a:xfrm>
           <a:prstGeom prst="rect">
@@ -2992,8 +2992,8 @@
         </p:nvSpPr>
         <p:spPr>
           <a:xfrm>
-            <a:off x="621792" y="4326775"/>
-            <a:ext cx="1673352" cy="314221"/>
+            <a:off x="621792" y="4169664"/>
+            <a:ext cx="1673352" cy="345643"/>
           </a:xfrm>
           <a:prstGeom prst="rect">
             <a:avLst/>
@@ -3031,8 +3031,8 @@
         </p:nvSpPr>
         <p:spPr>
           <a:xfrm>
-            <a:off x="2313432" y="4326775"/>
-            <a:ext cx="731520" cy="314221"/>
+            <a:off x="2313432" y="4169664"/>
+            <a:ext cx="731520" cy="345643"/>
           </a:xfrm>
           <a:prstGeom prst="rect">
             <a:avLst/>
@@ -3070,8 +3070,8 @@
         </p:nvSpPr>
         <p:spPr>
           <a:xfrm>
-            <a:off x="3063240" y="4326775"/>
-            <a:ext cx="914400" cy="314221"/>
+            <a:off x="3063240" y="4169664"/>
+            <a:ext cx="914400" cy="345643"/>
           </a:xfrm>
           <a:prstGeom prst="rect">
             <a:avLst/>
@@ -3109,8 +3109,8 @@
         </p:nvSpPr>
         <p:spPr>
           <a:xfrm>
-            <a:off x="4023360" y="4363351"/>
-            <a:ext cx="54864" cy="241069"/>
+            <a:off x="4023360" y="4206240"/>
+            <a:ext cx="54864" cy="272491"/>
           </a:xfrm>
           <a:prstGeom prst="rect">
             <a:avLst/>
@@ -3129,8 +3129,8 @@
         </p:nvSpPr>
         <p:spPr>
           <a:xfrm>
-            <a:off x="621792" y="4640996"/>
-            <a:ext cx="1673352" cy="314221"/>
+            <a:off x="621792" y="4515307"/>
+            <a:ext cx="1673352" cy="345643"/>
           </a:xfrm>
           <a:prstGeom prst="rect">
             <a:avLst/>
@@ -3168,8 +3168,8 @@
         </p:nvSpPr>
         <p:spPr>
           <a:xfrm>
-            <a:off x="2313432" y="4640996"/>
-            <a:ext cx="731520" cy="314221"/>
+            <a:off x="2313432" y="4515307"/>
+            <a:ext cx="731520" cy="345643"/>
           </a:xfrm>
           <a:prstGeom prst="rect">
             <a:avLst/>
@@ -3207,8 +3207,8 @@
         </p:nvSpPr>
         <p:spPr>
           <a:xfrm>
-            <a:off x="3063240" y="4640996"/>
-            <a:ext cx="914400" cy="314221"/>
+            <a:off x="3063240" y="4515307"/>
+            <a:ext cx="914400" cy="345643"/>
           </a:xfrm>
           <a:prstGeom prst="rect">
             <a:avLst/>
@@ -3246,8 +3246,8 @@
         </p:nvSpPr>
         <p:spPr>
           <a:xfrm>
-            <a:off x="4023360" y="4677572"/>
-            <a:ext cx="54864" cy="241069"/>
+            <a:off x="4023360" y="4551883"/>
+            <a:ext cx="54864" cy="272491"/>
           </a:xfrm>
           <a:prstGeom prst="rect">
             <a:avLst/>
@@ -3266,8 +3266,8 @@
         </p:nvSpPr>
         <p:spPr>
           <a:xfrm>
-            <a:off x="621792" y="4955217"/>
-            <a:ext cx="1673352" cy="314221"/>
+            <a:off x="621792" y="4860950"/>
+            <a:ext cx="1673352" cy="345643"/>
           </a:xfrm>
           <a:prstGeom prst="rect">
             <a:avLst/>
@@ -3305,8 +3305,8 @@
         </p:nvSpPr>
         <p:spPr>
           <a:xfrm>
-            <a:off x="2313432" y="4955217"/>
-            <a:ext cx="731520" cy="314221"/>
+            <a:off x="2313432" y="4860950"/>
+            <a:ext cx="731520" cy="345643"/>
           </a:xfrm>
           <a:prstGeom prst="rect">
             <a:avLst/>
@@ -3344,8 +3344,8 @@
         </p:nvSpPr>
         <p:spPr>
           <a:xfrm>
-            <a:off x="3063240" y="4955217"/>
-            <a:ext cx="914400" cy="314221"/>
+            <a:off x="3063240" y="4860950"/>
+            <a:ext cx="914400" cy="345643"/>
           </a:xfrm>
           <a:prstGeom prst="rect">
             <a:avLst/>
@@ -3383,8 +3383,8 @@
         </p:nvSpPr>
         <p:spPr>
           <a:xfrm>
-            <a:off x="621792" y="5269438"/>
-            <a:ext cx="1673352" cy="314221"/>
+            <a:off x="621792" y="5206594"/>
+            <a:ext cx="1673352" cy="345643"/>
           </a:xfrm>
           <a:prstGeom prst="rect">
             <a:avLst/>
@@ -3422,8 +3422,8 @@
         </p:nvSpPr>
         <p:spPr>
           <a:xfrm>
-            <a:off x="2313432" y="5269438"/>
-            <a:ext cx="731520" cy="314221"/>
+            <a:off x="2313432" y="5206594"/>
+            <a:ext cx="731520" cy="345643"/>
           </a:xfrm>
           <a:prstGeom prst="rect">
             <a:avLst/>
@@ -3461,8 +3461,8 @@
         </p:nvSpPr>
         <p:spPr>
           <a:xfrm>
-            <a:off x="3063240" y="5269438"/>
-            <a:ext cx="914400" cy="314221"/>
+            <a:off x="3063240" y="5206594"/>
+            <a:ext cx="914400" cy="345643"/>
           </a:xfrm>
           <a:prstGeom prst="rect">
             <a:avLst/>
@@ -3500,8 +3500,8 @@
         </p:nvSpPr>
         <p:spPr>
           <a:xfrm>
-            <a:off x="4023360" y="5306014"/>
-            <a:ext cx="54864" cy="241069"/>
+            <a:off x="4023360" y="5243170"/>
+            <a:ext cx="54864" cy="272491"/>
           </a:xfrm>
           <a:prstGeom prst="rect">
             <a:avLst/>
@@ -3520,8 +3520,8 @@
         </p:nvSpPr>
         <p:spPr>
           <a:xfrm>
-            <a:off x="621792" y="5583659"/>
-            <a:ext cx="1673352" cy="314221"/>
+            <a:off x="621792" y="5552237"/>
+            <a:ext cx="1673352" cy="345643"/>
           </a:xfrm>
           <a:prstGeom prst="rect">
             <a:avLst/>
@@ -3559,8 +3559,8 @@
         </p:nvSpPr>
         <p:spPr>
           <a:xfrm>
-            <a:off x="2313432" y="5583659"/>
-            <a:ext cx="731520" cy="314221"/>
+            <a:off x="2313432" y="5552237"/>
+            <a:ext cx="731520" cy="345643"/>
           </a:xfrm>
           <a:prstGeom prst="rect">
             <a:avLst/>
@@ -3598,8 +3598,8 @@
         </p:nvSpPr>
         <p:spPr>
           <a:xfrm>
-            <a:off x="3063240" y="5583659"/>
-            <a:ext cx="914400" cy="314221"/>
+            <a:off x="3063240" y="5552237"/>
+            <a:ext cx="914400" cy="345643"/>
           </a:xfrm>
           <a:prstGeom prst="rect">
             <a:avLst/>
@@ -3637,8 +3637,8 @@
         </p:nvSpPr>
         <p:spPr>
           <a:xfrm>
-            <a:off x="4023360" y="5620235"/>
-            <a:ext cx="54864" cy="241069"/>
+            <a:off x="4023360" y="5588813"/>
+            <a:ext cx="54864" cy="272491"/>
           </a:xfrm>
           <a:prstGeom prst="rect">
             <a:avLst/>
@@ -3893,7 +3893,7 @@
         <p:spPr>
           <a:xfrm>
             <a:off x="4416552" y="2167128"/>
-            <a:ext cx="1673352" cy="314221"/>
+            <a:ext cx="1673352" cy="345643"/>
           </a:xfrm>
           <a:prstGeom prst="rect">
             <a:avLst/>
@@ -3932,7 +3932,7 @@
         <p:spPr>
           <a:xfrm>
             <a:off x="6108192" y="2167128"/>
-            <a:ext cx="731520" cy="314221"/>
+            <a:ext cx="731520" cy="345643"/>
           </a:xfrm>
           <a:prstGeom prst="rect">
             <a:avLst/>
@@ -3971,7 +3971,7 @@
         <p:spPr>
           <a:xfrm>
             <a:off x="6858000" y="2167128"/>
-            <a:ext cx="914400" cy="314221"/>
+            <a:ext cx="914400" cy="345643"/>
           </a:xfrm>
           <a:prstGeom prst="rect">
             <a:avLst/>
@@ -4010,7 +4010,7 @@
         <p:spPr>
           <a:xfrm>
             <a:off x="7818120" y="2203704"/>
-            <a:ext cx="54864" cy="241069"/>
+            <a:ext cx="54864" cy="272491"/>
           </a:xfrm>
           <a:prstGeom prst="rect">
             <a:avLst/>
@@ -4029,8 +4029,8 @@
         </p:nvSpPr>
         <p:spPr>
           <a:xfrm>
-            <a:off x="4416552" y="2481349"/>
-            <a:ext cx="1673352" cy="314221"/>
+            <a:off x="4416552" y="2512771"/>
+            <a:ext cx="1673352" cy="345643"/>
           </a:xfrm>
           <a:prstGeom prst="rect">
             <a:avLst/>
@@ -4068,8 +4068,8 @@
         </p:nvSpPr>
         <p:spPr>
           <a:xfrm>
-            <a:off x="6108192" y="2481349"/>
-            <a:ext cx="731520" cy="314221"/>
+            <a:off x="6108192" y="2512771"/>
+            <a:ext cx="731520" cy="345643"/>
           </a:xfrm>
           <a:prstGeom prst="rect">
             <a:avLst/>
@@ -4107,8 +4107,8 @@
         </p:nvSpPr>
         <p:spPr>
           <a:xfrm>
-            <a:off x="6858000" y="2481349"/>
-            <a:ext cx="914400" cy="314221"/>
+            <a:off x="6858000" y="2512771"/>
+            <a:ext cx="914400" cy="345643"/>
           </a:xfrm>
           <a:prstGeom prst="rect">
             <a:avLst/>
@@ -4146,8 +4146,8 @@
         </p:nvSpPr>
         <p:spPr>
           <a:xfrm>
-            <a:off x="7818120" y="2517925"/>
-            <a:ext cx="54864" cy="241069"/>
+            <a:off x="7818120" y="2549347"/>
+            <a:ext cx="54864" cy="272491"/>
           </a:xfrm>
           <a:prstGeom prst="rect">
             <a:avLst/>
@@ -4166,8 +4166,8 @@
         </p:nvSpPr>
         <p:spPr>
           <a:xfrm>
-            <a:off x="4416552" y="2795570"/>
-            <a:ext cx="1673352" cy="314221"/>
+            <a:off x="4416552" y="2858414"/>
+            <a:ext cx="1673352" cy="345643"/>
           </a:xfrm>
           <a:prstGeom prst="rect">
             <a:avLst/>
@@ -4205,8 +4205,8 @@
         </p:nvSpPr>
         <p:spPr>
           <a:xfrm>
-            <a:off x="6108192" y="2795570"/>
-            <a:ext cx="731520" cy="314221"/>
+            <a:off x="6108192" y="2858414"/>
+            <a:ext cx="731520" cy="345643"/>
           </a:xfrm>
           <a:prstGeom prst="rect">
             <a:avLst/>
@@ -4244,8 +4244,8 @@
         </p:nvSpPr>
         <p:spPr>
           <a:xfrm>
-            <a:off x="6858000" y="2795570"/>
-            <a:ext cx="914400" cy="314221"/>
+            <a:off x="6858000" y="2858414"/>
+            <a:ext cx="914400" cy="345643"/>
           </a:xfrm>
           <a:prstGeom prst="rect">
             <a:avLst/>
@@ -4283,8 +4283,8 @@
         </p:nvSpPr>
         <p:spPr>
           <a:xfrm>
-            <a:off x="7818120" y="2832146"/>
-            <a:ext cx="54864" cy="241069"/>
+            <a:off x="7818120" y="2894990"/>
+            <a:ext cx="54864" cy="272491"/>
           </a:xfrm>
           <a:prstGeom prst="rect">
             <a:avLst/>
@@ -4303,8 +4303,8 @@
         </p:nvSpPr>
         <p:spPr>
           <a:xfrm>
-            <a:off x="4416552" y="3109791"/>
-            <a:ext cx="1673352" cy="314221"/>
+            <a:off x="4416552" y="3204058"/>
+            <a:ext cx="1673352" cy="345643"/>
           </a:xfrm>
           <a:prstGeom prst="rect">
             <a:avLst/>
@@ -4342,8 +4342,8 @@
         </p:nvSpPr>
         <p:spPr>
           <a:xfrm>
-            <a:off x="6108192" y="3109791"/>
-            <a:ext cx="731520" cy="314221"/>
+            <a:off x="6108192" y="3204058"/>
+            <a:ext cx="731520" cy="345643"/>
           </a:xfrm>
           <a:prstGeom prst="rect">
             <a:avLst/>
@@ -4381,8 +4381,8 @@
         </p:nvSpPr>
         <p:spPr>
           <a:xfrm>
-            <a:off x="6858000" y="3109791"/>
-            <a:ext cx="914400" cy="314221"/>
+            <a:off x="6858000" y="3204058"/>
+            <a:ext cx="914400" cy="345643"/>
           </a:xfrm>
           <a:prstGeom prst="rect">
             <a:avLst/>
@@ -4420,8 +4420,8 @@
         </p:nvSpPr>
         <p:spPr>
           <a:xfrm>
-            <a:off x="7818120" y="3146367"/>
-            <a:ext cx="54864" cy="241069"/>
+            <a:off x="7818120" y="3240634"/>
+            <a:ext cx="54864" cy="272491"/>
           </a:xfrm>
           <a:prstGeom prst="rect">
             <a:avLst/>
@@ -4440,8 +4440,8 @@
         </p:nvSpPr>
         <p:spPr>
           <a:xfrm>
-            <a:off x="4416552" y="3424012"/>
-            <a:ext cx="1673352" cy="314221"/>
+            <a:off x="4416552" y="3549701"/>
+            <a:ext cx="1673352" cy="345643"/>
           </a:xfrm>
           <a:prstGeom prst="rect">
             <a:avLst/>
@@ -4479,8 +4479,8 @@
         </p:nvSpPr>
         <p:spPr>
           <a:xfrm>
-            <a:off x="6108192" y="3424012"/>
-            <a:ext cx="731520" cy="314221"/>
+            <a:off x="6108192" y="3549701"/>
+            <a:ext cx="731520" cy="345643"/>
           </a:xfrm>
           <a:prstGeom prst="rect">
             <a:avLst/>
@@ -4518,8 +4518,8 @@
         </p:nvSpPr>
         <p:spPr>
           <a:xfrm>
-            <a:off x="6858000" y="3424012"/>
-            <a:ext cx="914400" cy="314221"/>
+            <a:off x="6858000" y="3549701"/>
+            <a:ext cx="914400" cy="345643"/>
           </a:xfrm>
           <a:prstGeom prst="rect">
             <a:avLst/>
@@ -4557,7 +4557,7 @@
         </p:nvSpPr>
         <p:spPr>
           <a:xfrm>
-            <a:off x="4416552" y="4070743"/>
+            <a:off x="4416552" y="3913632"/>
             <a:ext cx="3355848" cy="22860"/>
           </a:xfrm>
           <a:prstGeom prst="rect">
@@ -4577,7 +4577,7 @@
         </p:nvSpPr>
         <p:spPr>
           <a:xfrm>
-            <a:off x="4416552" y="4098175"/>
+            <a:off x="4416552" y="3941064"/>
             <a:ext cx="1828800" cy="219456"/>
           </a:xfrm>
           <a:prstGeom prst="rect">
@@ -4616,7 +4616,7 @@
         </p:nvSpPr>
         <p:spPr>
           <a:xfrm>
-            <a:off x="6108192" y="4098175"/>
+            <a:off x="6108192" y="3941064"/>
             <a:ext cx="731520" cy="219456"/>
           </a:xfrm>
           <a:prstGeom prst="rect">
@@ -4655,7 +4655,7 @@
         </p:nvSpPr>
         <p:spPr>
           <a:xfrm>
-            <a:off x="6858000" y="4098175"/>
+            <a:off x="6858000" y="3941064"/>
             <a:ext cx="914400" cy="219456"/>
           </a:xfrm>
           <a:prstGeom prst="rect">
@@ -4694,8 +4694,8 @@
         </p:nvSpPr>
         <p:spPr>
           <a:xfrm>
-            <a:off x="4416552" y="4326775"/>
-            <a:ext cx="1673352" cy="314221"/>
+            <a:off x="4416552" y="4169664"/>
+            <a:ext cx="1673352" cy="345643"/>
           </a:xfrm>
           <a:prstGeom prst="rect">
             <a:avLst/>
@@ -4733,8 +4733,8 @@
         </p:nvSpPr>
         <p:spPr>
           <a:xfrm>
-            <a:off x="6108192" y="4326775"/>
-            <a:ext cx="731520" cy="314221"/>
+            <a:off x="6108192" y="4169664"/>
+            <a:ext cx="731520" cy="345643"/>
           </a:xfrm>
           <a:prstGeom prst="rect">
             <a:avLst/>
@@ -4772,8 +4772,8 @@
         </p:nvSpPr>
         <p:spPr>
           <a:xfrm>
-            <a:off x="6858000" y="4326775"/>
-            <a:ext cx="914400" cy="314221"/>
+            <a:off x="6858000" y="4169664"/>
+            <a:ext cx="914400" cy="345643"/>
           </a:xfrm>
           <a:prstGeom prst="rect">
             <a:avLst/>
@@ -4811,8 +4811,8 @@
         </p:nvSpPr>
         <p:spPr>
           <a:xfrm>
-            <a:off x="7818120" y="4363351"/>
-            <a:ext cx="54864" cy="241069"/>
+            <a:off x="7818120" y="4206240"/>
+            <a:ext cx="54864" cy="272491"/>
           </a:xfrm>
           <a:prstGeom prst="rect">
             <a:avLst/>
@@ -4831,8 +4831,8 @@
         </p:nvSpPr>
         <p:spPr>
           <a:xfrm>
-            <a:off x="4416552" y="4640996"/>
-            <a:ext cx="1673352" cy="314221"/>
+            <a:off x="4416552" y="4515307"/>
+            <a:ext cx="1673352" cy="345643"/>
           </a:xfrm>
           <a:prstGeom prst="rect">
             <a:avLst/>
@@ -4870,8 +4870,8 @@
         </p:nvSpPr>
         <p:spPr>
           <a:xfrm>
-            <a:off x="6108192" y="4640996"/>
-            <a:ext cx="731520" cy="314221"/>
+            <a:off x="6108192" y="4515307"/>
+            <a:ext cx="731520" cy="345643"/>
           </a:xfrm>
           <a:prstGeom prst="rect">
             <a:avLst/>
@@ -4909,8 +4909,8 @@
         </p:nvSpPr>
         <p:spPr>
           <a:xfrm>
-            <a:off x="6858000" y="4640996"/>
-            <a:ext cx="914400" cy="314221"/>
+            <a:off x="6858000" y="4515307"/>
+            <a:ext cx="914400" cy="345643"/>
           </a:xfrm>
           <a:prstGeom prst="rect">
             <a:avLst/>
@@ -4948,8 +4948,8 @@
         </p:nvSpPr>
         <p:spPr>
           <a:xfrm>
-            <a:off x="4416552" y="4955217"/>
-            <a:ext cx="1673352" cy="314221"/>
+            <a:off x="4416552" y="4860950"/>
+            <a:ext cx="1673352" cy="345643"/>
           </a:xfrm>
           <a:prstGeom prst="rect">
             <a:avLst/>
@@ -4987,8 +4987,8 @@
         </p:nvSpPr>
         <p:spPr>
           <a:xfrm>
-            <a:off x="6108192" y="4955217"/>
-            <a:ext cx="731520" cy="314221"/>
+            <a:off x="6108192" y="4860950"/>
+            <a:ext cx="731520" cy="345643"/>
           </a:xfrm>
           <a:prstGeom prst="rect">
             <a:avLst/>
@@ -5026,8 +5026,8 @@
         </p:nvSpPr>
         <p:spPr>
           <a:xfrm>
-            <a:off x="6858000" y="4955217"/>
-            <a:ext cx="914400" cy="314221"/>
+            <a:off x="6858000" y="4860950"/>
+            <a:ext cx="914400" cy="345643"/>
           </a:xfrm>
           <a:prstGeom prst="rect">
             <a:avLst/>
@@ -5065,8 +5065,8 @@
         </p:nvSpPr>
         <p:spPr>
           <a:xfrm>
-            <a:off x="4416552" y="5269438"/>
-            <a:ext cx="1673352" cy="314221"/>
+            <a:off x="4416552" y="5206594"/>
+            <a:ext cx="1673352" cy="345643"/>
           </a:xfrm>
           <a:prstGeom prst="rect">
             <a:avLst/>
@@ -5104,8 +5104,8 @@
         </p:nvSpPr>
         <p:spPr>
           <a:xfrm>
-            <a:off x="6108192" y="5269438"/>
-            <a:ext cx="731520" cy="314221"/>
+            <a:off x="6108192" y="5206594"/>
+            <a:ext cx="731520" cy="345643"/>
           </a:xfrm>
           <a:prstGeom prst="rect">
             <a:avLst/>
@@ -5143,8 +5143,8 @@
         </p:nvSpPr>
         <p:spPr>
           <a:xfrm>
-            <a:off x="6858000" y="5269438"/>
-            <a:ext cx="914400" cy="314221"/>
+            <a:off x="6858000" y="5206594"/>
+            <a:ext cx="914400" cy="345643"/>
           </a:xfrm>
           <a:prstGeom prst="rect">
             <a:avLst/>
@@ -5182,8 +5182,8 @@
         </p:nvSpPr>
         <p:spPr>
           <a:xfrm>
-            <a:off x="7818120" y="5306014"/>
-            <a:ext cx="54864" cy="241069"/>
+            <a:off x="7818120" y="5243170"/>
+            <a:ext cx="54864" cy="272491"/>
           </a:xfrm>
           <a:prstGeom prst="rect">
             <a:avLst/>
@@ -5202,8 +5202,8 @@
         </p:nvSpPr>
         <p:spPr>
           <a:xfrm>
-            <a:off x="4416552" y="5583659"/>
-            <a:ext cx="1673352" cy="314221"/>
+            <a:off x="4416552" y="5552237"/>
+            <a:ext cx="1673352" cy="345643"/>
           </a:xfrm>
           <a:prstGeom prst="rect">
             <a:avLst/>
@@ -5241,8 +5241,8 @@
         </p:nvSpPr>
         <p:spPr>
           <a:xfrm>
-            <a:off x="6108192" y="5583659"/>
-            <a:ext cx="731520" cy="314221"/>
+            <a:off x="6108192" y="5552237"/>
+            <a:ext cx="731520" cy="345643"/>
           </a:xfrm>
           <a:prstGeom prst="rect">
             <a:avLst/>
@@ -5280,8 +5280,8 @@
         </p:nvSpPr>
         <p:spPr>
           <a:xfrm>
-            <a:off x="6858000" y="5583659"/>
-            <a:ext cx="914400" cy="314221"/>
+            <a:off x="6858000" y="5552237"/>
+            <a:ext cx="914400" cy="345643"/>
           </a:xfrm>
           <a:prstGeom prst="rect">
             <a:avLst/>
@@ -5319,8 +5319,8 @@
         </p:nvSpPr>
         <p:spPr>
           <a:xfrm>
-            <a:off x="7818120" y="5620235"/>
-            <a:ext cx="54864" cy="241069"/>
+            <a:off x="7818120" y="5588813"/>
+            <a:ext cx="54864" cy="272491"/>
           </a:xfrm>
           <a:prstGeom prst="rect">
             <a:avLst/>
@@ -5496,34 +5496,34 @@
         </p:nvSpPr>
         <p:spPr>
           <a:xfrm>
-            <a:off x="9902952" y="1938528"/>
-            <a:ext cx="731520" cy="219456"/>
-          </a:xfrm>
-          <a:prstGeom prst="rect">
-            <a:avLst/>
-          </a:prstGeom>
-          <a:noFill/>
-          <a:ln/>
-        </p:spPr>
-        <p:txBody>
-          <a:bodyPr wrap="square" lIns="0" tIns="0" rIns="0" bIns="0" rtlCol="0" anchor="ctr"/>
-          <a:lstStyle/>
-          <a:p>
-            <a:pPr algn="r" indent="0" marL="0">
-              <a:buNone/>
-            </a:pPr>
-            <a:r>
-              <a:rPr lang="en-US" sz="1400" b="1" dirty="0">
-                <a:solidFill>
-                  <a:srgbClr val="595959"/>
-                </a:solidFill>
-                <a:latin typeface="Inter" pitchFamily="34" charset="0"/>
-                <a:ea typeface="Inter" pitchFamily="34" charset="-122"/>
-                <a:cs typeface="Inter" pitchFamily="34" charset="-120"/>
-              </a:rPr>
-              <a:t>Rate</a:t>
-            </a:r>
-            <a:endParaRPr lang="en-US" sz="1400" dirty="0"/>
+            <a:off x="8211312" y="2167128"/>
+            <a:ext cx="1632204" cy="345643"/>
+          </a:xfrm>
+          <a:prstGeom prst="rect">
+            <a:avLst/>
+          </a:prstGeom>
+          <a:noFill/>
+          <a:ln/>
+        </p:spPr>
+        <p:txBody>
+          <a:bodyPr wrap="square" lIns="0" tIns="0" rIns="0" bIns="0" rtlCol="0" anchor="ctr"/>
+          <a:lstStyle/>
+          <a:p>
+            <a:pPr indent="0" marL="0">
+              <a:buNone/>
+            </a:pPr>
+            <a:r>
+              <a:rPr lang="en-US" sz="1200" b="1" dirty="0">
+                <a:solidFill>
+                  <a:srgbClr val="0B7A4A"/>
+                </a:solidFill>
+                <a:latin typeface="Inter" pitchFamily="34" charset="0"/>
+                <a:ea typeface="Inter" pitchFamily="34" charset="-122"/>
+                <a:cs typeface="Inter" pitchFamily="34" charset="-120"/>
+              </a:rPr>
+              <a:t>Kia Las Vegas</a:t>
+            </a:r>
+            <a:endParaRPr lang="en-US" sz="1200" dirty="0"/>
           </a:p>
         </p:txBody>
       </p:sp>
@@ -5535,34 +5535,34 @@
         </p:nvSpPr>
         <p:spPr>
           <a:xfrm>
-            <a:off x="10652760" y="1938528"/>
-            <a:ext cx="914400" cy="219456"/>
-          </a:xfrm>
-          <a:prstGeom prst="rect">
-            <a:avLst/>
-          </a:prstGeom>
-          <a:noFill/>
-          <a:ln/>
-        </p:spPr>
-        <p:txBody>
-          <a:bodyPr wrap="square" lIns="0" tIns="0" rIns="0" bIns="0" rtlCol="0" anchor="ctr"/>
-          <a:lstStyle/>
-          <a:p>
-            <a:pPr algn="r" indent="0" marL="0">
-              <a:buNone/>
-            </a:pPr>
-            <a:r>
-              <a:rPr lang="en-US" sz="1400" b="1" dirty="0">
-                <a:solidFill>
-                  <a:srgbClr val="595959"/>
-                </a:solidFill>
-                <a:latin typeface="Inter" pitchFamily="34" charset="0"/>
-                <a:ea typeface="Inter" pitchFamily="34" charset="-122"/>
-                <a:cs typeface="Inter" pitchFamily="34" charset="-120"/>
-              </a:rPr>
-              <a:t>Open</a:t>
-            </a:r>
-            <a:endParaRPr lang="en-US" sz="1400" dirty="0"/>
+            <a:off x="9889236" y="2167128"/>
+            <a:ext cx="1632204" cy="345643"/>
+          </a:xfrm>
+          <a:prstGeom prst="rect">
+            <a:avLst/>
+          </a:prstGeom>
+          <a:noFill/>
+          <a:ln/>
+        </p:spPr>
+        <p:txBody>
+          <a:bodyPr wrap="square" lIns="0" tIns="0" rIns="0" bIns="0" rtlCol="0" anchor="ctr"/>
+          <a:lstStyle/>
+          <a:p>
+            <a:pPr indent="0" marL="0">
+              <a:buNone/>
+            </a:pPr>
+            <a:r>
+              <a:rPr lang="en-US" sz="1200" b="1" dirty="0">
+                <a:solidFill>
+                  <a:srgbClr val="0B7A4A"/>
+                </a:solidFill>
+                <a:latin typeface="Inter" pitchFamily="34" charset="0"/>
+                <a:ea typeface="Inter" pitchFamily="34" charset="-122"/>
+                <a:cs typeface="Inter" pitchFamily="34" charset="-120"/>
+              </a:rPr>
+              <a:t>Lincoln</a:t>
+            </a:r>
+            <a:endParaRPr lang="en-US" sz="1200" dirty="0"/>
           </a:p>
         </p:txBody>
       </p:sp>
@@ -5574,8 +5574,8 @@
         </p:nvSpPr>
         <p:spPr>
           <a:xfrm>
-            <a:off x="8211312" y="2167128"/>
-            <a:ext cx="1673352" cy="314221"/>
+            <a:off x="8211312" y="2512771"/>
+            <a:ext cx="1632204" cy="345643"/>
           </a:xfrm>
           <a:prstGeom prst="rect">
             <a:avLst/>
@@ -5591,17 +5591,17 @@
               <a:buNone/>
             </a:pPr>
             <a:r>
-              <a:rPr lang="en-US" sz="1300" dirty="0">
-                <a:solidFill>
-                  <a:srgbClr val="1A1A1A"/>
-                </a:solidFill>
-                <a:latin typeface="Inter" pitchFamily="34" charset="0"/>
-                <a:ea typeface="Inter" pitchFamily="34" charset="-122"/>
-                <a:cs typeface="Inter" pitchFamily="34" charset="-120"/>
-              </a:rPr>
-              <a:t>Kia Las Vegas</a:t>
-            </a:r>
-            <a:endParaRPr lang="en-US" sz="1300" dirty="0"/>
+              <a:rPr lang="en-US" sz="1200" b="1" dirty="0">
+                <a:solidFill>
+                  <a:srgbClr val="0B7A4A"/>
+                </a:solidFill>
+                <a:latin typeface="Inter" pitchFamily="34" charset="0"/>
+                <a:ea typeface="Inter" pitchFamily="34" charset="-122"/>
+                <a:cs typeface="Inter" pitchFamily="34" charset="-120"/>
+              </a:rPr>
+              <a:t>VW Henderson</a:t>
+            </a:r>
+            <a:endParaRPr lang="en-US" sz="1200" dirty="0"/>
           </a:p>
         </p:txBody>
       </p:sp>
@@ -5613,24 +5613,24 @@
         </p:nvSpPr>
         <p:spPr>
           <a:xfrm>
-            <a:off x="9902952" y="2167128"/>
-            <a:ext cx="731520" cy="314221"/>
-          </a:xfrm>
-          <a:prstGeom prst="rect">
-            <a:avLst/>
-          </a:prstGeom>
-          <a:noFill/>
-          <a:ln/>
-        </p:spPr>
-        <p:txBody>
-          <a:bodyPr wrap="square" lIns="0" tIns="0" rIns="0" bIns="0" rtlCol="0" anchor="ctr"/>
-          <a:lstStyle/>
-          <a:p>
-            <a:pPr algn="r" indent="0" marL="0">
-              <a:buNone/>
-            </a:pPr>
-            <a:r>
-              <a:rPr lang="en-US" sz="1300" b="1" dirty="0">
+            <a:off x="9889236" y="2512771"/>
+            <a:ext cx="1632204" cy="345643"/>
+          </a:xfrm>
+          <a:prstGeom prst="rect">
+            <a:avLst/>
+          </a:prstGeom>
+          <a:noFill/>
+          <a:ln/>
+        </p:spPr>
+        <p:txBody>
+          <a:bodyPr wrap="square" lIns="0" tIns="0" rIns="0" bIns="0" rtlCol="0" anchor="ctr"/>
+          <a:lstStyle/>
+          <a:p>
+            <a:pPr indent="0" marL="0">
+              <a:buNone/>
+            </a:pPr>
+            <a:r>
+              <a:rPr lang="en-US" sz="1200" b="1" dirty="0">
                 <a:solidFill>
                   <a:srgbClr val="0B7A4A"/>
                 </a:solidFill>
@@ -5638,9 +5638,9 @@
                 <a:ea typeface="Inter" pitchFamily="34" charset="-122"/>
                 <a:cs typeface="Inter" pitchFamily="34" charset="-120"/>
               </a:rPr>
-              <a:t>100.0%</a:t>
-            </a:r>
-            <a:endParaRPr lang="en-US" sz="1300" dirty="0"/>
+              <a:t>Land Rover Reno</a:t>
+            </a:r>
+            <a:endParaRPr lang="en-US" sz="1200" dirty="0"/>
           </a:p>
         </p:txBody>
       </p:sp>
@@ -5652,32 +5652,32 @@
         </p:nvSpPr>
         <p:spPr>
           <a:xfrm>
-            <a:off x="10652760" y="2167128"/>
-            <a:ext cx="914400" cy="314221"/>
-          </a:xfrm>
-          <a:prstGeom prst="rect">
-            <a:avLst/>
-          </a:prstGeom>
-          <a:noFill/>
-          <a:ln/>
-        </p:spPr>
-        <p:txBody>
-          <a:bodyPr wrap="square" lIns="0" tIns="0" rIns="0" bIns="0" rtlCol="0" anchor="ctr"/>
-          <a:lstStyle/>
-          <a:p>
-            <a:pPr algn="r" indent="0" marL="0">
-              <a:buNone/>
-            </a:pPr>
-            <a:r>
-              <a:rPr lang="en-US" sz="1200" dirty="0">
-                <a:solidFill>
-                  <a:srgbClr val="595959"/>
-                </a:solidFill>
-                <a:latin typeface="Inter" pitchFamily="34" charset="0"/>
-                <a:ea typeface="Inter" pitchFamily="34" charset="-122"/>
-                <a:cs typeface="Inter" pitchFamily="34" charset="-120"/>
-              </a:rPr>
-              <a:t>0</a:t>
+            <a:off x="8211312" y="2858414"/>
+            <a:ext cx="1632204" cy="345643"/>
+          </a:xfrm>
+          <a:prstGeom prst="rect">
+            <a:avLst/>
+          </a:prstGeom>
+          <a:noFill/>
+          <a:ln/>
+        </p:spPr>
+        <p:txBody>
+          <a:bodyPr wrap="square" lIns="0" tIns="0" rIns="0" bIns="0" rtlCol="0" anchor="ctr"/>
+          <a:lstStyle/>
+          <a:p>
+            <a:pPr indent="0" marL="0">
+              <a:buNone/>
+            </a:pPr>
+            <a:r>
+              <a:rPr lang="en-US" sz="1200" b="1" dirty="0">
+                <a:solidFill>
+                  <a:srgbClr val="0B7A4A"/>
+                </a:solidFill>
+                <a:latin typeface="Inter" pitchFamily="34" charset="0"/>
+                <a:ea typeface="Inter" pitchFamily="34" charset="-122"/>
+                <a:cs typeface="Inter" pitchFamily="34" charset="-120"/>
+              </a:rPr>
+              <a:t>Subaru of Las Vegas</a:t>
             </a:r>
             <a:endParaRPr lang="en-US" sz="1200" dirty="0"/>
           </a:p>
@@ -5691,8 +5691,8 @@
         </p:nvSpPr>
         <p:spPr>
           <a:xfrm>
-            <a:off x="8211312" y="2481349"/>
-            <a:ext cx="1673352" cy="314221"/>
+            <a:off x="9889236" y="2858414"/>
+            <a:ext cx="1632204" cy="345643"/>
           </a:xfrm>
           <a:prstGeom prst="rect">
             <a:avLst/>
@@ -5708,46 +5708,7 @@
               <a:buNone/>
             </a:pPr>
             <a:r>
-              <a:rPr lang="en-US" sz="1300" dirty="0">
-                <a:solidFill>
-                  <a:srgbClr val="1A1A1A"/>
-                </a:solidFill>
-                <a:latin typeface="Inter" pitchFamily="34" charset="0"/>
-                <a:ea typeface="Inter" pitchFamily="34" charset="-122"/>
-                <a:cs typeface="Inter" pitchFamily="34" charset="-120"/>
-              </a:rPr>
-              <a:t>Lincoln</a:t>
-            </a:r>
-            <a:endParaRPr lang="en-US" sz="1300" dirty="0"/>
-          </a:p>
-        </p:txBody>
-      </p:sp>
-      <p:sp>
-        <p:nvSpPr>
-          <p:cNvPr id="113" name="Text 111"/>
-          <p:cNvSpPr txBox="1"/>
-          <p:nvPr/>
-        </p:nvSpPr>
-        <p:spPr>
-          <a:xfrm>
-            <a:off x="9902952" y="2481349"/>
-            <a:ext cx="731520" cy="314221"/>
-          </a:xfrm>
-          <a:prstGeom prst="rect">
-            <a:avLst/>
-          </a:prstGeom>
-          <a:noFill/>
-          <a:ln/>
-        </p:spPr>
-        <p:txBody>
-          <a:bodyPr wrap="square" lIns="0" tIns="0" rIns="0" bIns="0" rtlCol="0" anchor="ctr"/>
-          <a:lstStyle/>
-          <a:p>
-            <a:pPr algn="r" indent="0" marL="0">
-              <a:buNone/>
-            </a:pPr>
-            <a:r>
-              <a:rPr lang="en-US" sz="1300" b="1" dirty="0">
+              <a:rPr lang="en-US" sz="1200" b="1" dirty="0">
                 <a:solidFill>
                   <a:srgbClr val="0B7A4A"/>
                 </a:solidFill>
@@ -5755,46 +5716,7 @@
                 <a:ea typeface="Inter" pitchFamily="34" charset="-122"/>
                 <a:cs typeface="Inter" pitchFamily="34" charset="-120"/>
               </a:rPr>
-              <a:t>100.0%</a:t>
-            </a:r>
-            <a:endParaRPr lang="en-US" sz="1300" dirty="0"/>
-          </a:p>
-        </p:txBody>
-      </p:sp>
-      <p:sp>
-        <p:nvSpPr>
-          <p:cNvPr id="114" name="Text 112"/>
-          <p:cNvSpPr txBox="1"/>
-          <p:nvPr/>
-        </p:nvSpPr>
-        <p:spPr>
-          <a:xfrm>
-            <a:off x="10652760" y="2481349"/>
-            <a:ext cx="914400" cy="314221"/>
-          </a:xfrm>
-          <a:prstGeom prst="rect">
-            <a:avLst/>
-          </a:prstGeom>
-          <a:noFill/>
-          <a:ln/>
-        </p:spPr>
-        <p:txBody>
-          <a:bodyPr wrap="square" lIns="0" tIns="0" rIns="0" bIns="0" rtlCol="0" anchor="ctr"/>
-          <a:lstStyle/>
-          <a:p>
-            <a:pPr algn="r" indent="0" marL="0">
-              <a:buNone/>
-            </a:pPr>
-            <a:r>
-              <a:rPr lang="en-US" sz="1200" dirty="0">
-                <a:solidFill>
-                  <a:srgbClr val="595959"/>
-                </a:solidFill>
-                <a:latin typeface="Inter" pitchFamily="34" charset="0"/>
-                <a:ea typeface="Inter" pitchFamily="34" charset="-122"/>
-                <a:cs typeface="Inter" pitchFamily="34" charset="-120"/>
-              </a:rPr>
-              <a:t>0</a:t>
+              <a:t>Acura</a:t>
             </a:r>
             <a:endParaRPr lang="en-US" sz="1200" dirty="0"/>
           </a:p>
@@ -5802,481 +5724,13 @@
       </p:sp>
       <p:sp>
         <p:nvSpPr>
-          <p:cNvPr id="115" name="Text 113"/>
-          <p:cNvSpPr txBox="1"/>
-          <p:nvPr/>
-        </p:nvSpPr>
-        <p:spPr>
-          <a:xfrm>
-            <a:off x="8211312" y="2795570"/>
-            <a:ext cx="1673352" cy="314221"/>
-          </a:xfrm>
-          <a:prstGeom prst="rect">
-            <a:avLst/>
-          </a:prstGeom>
-          <a:noFill/>
-          <a:ln/>
-        </p:spPr>
-        <p:txBody>
-          <a:bodyPr wrap="square" lIns="0" tIns="0" rIns="0" bIns="0" rtlCol="0" anchor="ctr"/>
-          <a:lstStyle/>
-          <a:p>
-            <a:pPr indent="0" marL="0">
-              <a:buNone/>
-            </a:pPr>
-            <a:r>
-              <a:rPr lang="en-US" sz="1300" dirty="0">
-                <a:solidFill>
-                  <a:srgbClr val="1A1A1A"/>
-                </a:solidFill>
-                <a:latin typeface="Inter" pitchFamily="34" charset="0"/>
-                <a:ea typeface="Inter" pitchFamily="34" charset="-122"/>
-                <a:cs typeface="Inter" pitchFamily="34" charset="-120"/>
-              </a:rPr>
-              <a:t>VW Henderson</a:t>
-            </a:r>
-            <a:endParaRPr lang="en-US" sz="1300" dirty="0"/>
-          </a:p>
-        </p:txBody>
-      </p:sp>
-      <p:sp>
-        <p:nvSpPr>
-          <p:cNvPr id="116" name="Text 114"/>
-          <p:cNvSpPr txBox="1"/>
-          <p:nvPr/>
-        </p:nvSpPr>
-        <p:spPr>
-          <a:xfrm>
-            <a:off x="9902952" y="2795570"/>
-            <a:ext cx="731520" cy="314221"/>
-          </a:xfrm>
-          <a:prstGeom prst="rect">
-            <a:avLst/>
-          </a:prstGeom>
-          <a:noFill/>
-          <a:ln/>
-        </p:spPr>
-        <p:txBody>
-          <a:bodyPr wrap="square" lIns="0" tIns="0" rIns="0" bIns="0" rtlCol="0" anchor="ctr"/>
-          <a:lstStyle/>
-          <a:p>
-            <a:pPr algn="r" indent="0" marL="0">
-              <a:buNone/>
-            </a:pPr>
-            <a:r>
-              <a:rPr lang="en-US" sz="1300" b="1" dirty="0">
-                <a:solidFill>
-                  <a:srgbClr val="0B7A4A"/>
-                </a:solidFill>
-                <a:latin typeface="Inter" pitchFamily="34" charset="0"/>
-                <a:ea typeface="Inter" pitchFamily="34" charset="-122"/>
-                <a:cs typeface="Inter" pitchFamily="34" charset="-120"/>
-              </a:rPr>
-              <a:t>100.0%</a:t>
-            </a:r>
-            <a:endParaRPr lang="en-US" sz="1300" dirty="0"/>
-          </a:p>
-        </p:txBody>
-      </p:sp>
-      <p:sp>
-        <p:nvSpPr>
-          <p:cNvPr id="117" name="Text 115"/>
-          <p:cNvSpPr txBox="1"/>
-          <p:nvPr/>
-        </p:nvSpPr>
-        <p:spPr>
-          <a:xfrm>
-            <a:off x="10652760" y="2795570"/>
-            <a:ext cx="914400" cy="314221"/>
-          </a:xfrm>
-          <a:prstGeom prst="rect">
-            <a:avLst/>
-          </a:prstGeom>
-          <a:noFill/>
-          <a:ln/>
-        </p:spPr>
-        <p:txBody>
-          <a:bodyPr wrap="square" lIns="0" tIns="0" rIns="0" bIns="0" rtlCol="0" anchor="ctr"/>
-          <a:lstStyle/>
-          <a:p>
-            <a:pPr algn="r" indent="0" marL="0">
-              <a:buNone/>
-            </a:pPr>
-            <a:r>
-              <a:rPr lang="en-US" sz="1200" dirty="0">
-                <a:solidFill>
-                  <a:srgbClr val="595959"/>
-                </a:solidFill>
-                <a:latin typeface="Inter" pitchFamily="34" charset="0"/>
-                <a:ea typeface="Inter" pitchFamily="34" charset="-122"/>
-                <a:cs typeface="Inter" pitchFamily="34" charset="-120"/>
-              </a:rPr>
-              <a:t>0</a:t>
-            </a:r>
-            <a:endParaRPr lang="en-US" sz="1200" dirty="0"/>
-          </a:p>
-        </p:txBody>
-      </p:sp>
-      <p:sp>
-        <p:nvSpPr>
-          <p:cNvPr id="118" name="Text 116"/>
-          <p:cNvSpPr txBox="1"/>
-          <p:nvPr/>
-        </p:nvSpPr>
-        <p:spPr>
-          <a:xfrm>
-            <a:off x="8211312" y="3109791"/>
-            <a:ext cx="1673352" cy="314221"/>
-          </a:xfrm>
-          <a:prstGeom prst="rect">
-            <a:avLst/>
-          </a:prstGeom>
-          <a:noFill/>
-          <a:ln/>
-        </p:spPr>
-        <p:txBody>
-          <a:bodyPr wrap="square" lIns="0" tIns="0" rIns="0" bIns="0" rtlCol="0" anchor="ctr"/>
-          <a:lstStyle/>
-          <a:p>
-            <a:pPr indent="0" marL="0">
-              <a:buNone/>
-            </a:pPr>
-            <a:r>
-              <a:rPr lang="en-US" sz="1300" dirty="0">
-                <a:solidFill>
-                  <a:srgbClr val="1A1A1A"/>
-                </a:solidFill>
-                <a:latin typeface="Inter" pitchFamily="34" charset="0"/>
-                <a:ea typeface="Inter" pitchFamily="34" charset="-122"/>
-                <a:cs typeface="Inter" pitchFamily="34" charset="-120"/>
-              </a:rPr>
-              <a:t>Land Rover Reno</a:t>
-            </a:r>
-            <a:endParaRPr lang="en-US" sz="1300" dirty="0"/>
-          </a:p>
-        </p:txBody>
-      </p:sp>
-      <p:sp>
-        <p:nvSpPr>
-          <p:cNvPr id="119" name="Text 117"/>
-          <p:cNvSpPr txBox="1"/>
-          <p:nvPr/>
-        </p:nvSpPr>
-        <p:spPr>
-          <a:xfrm>
-            <a:off x="9902952" y="3109791"/>
-            <a:ext cx="731520" cy="314221"/>
-          </a:xfrm>
-          <a:prstGeom prst="rect">
-            <a:avLst/>
-          </a:prstGeom>
-          <a:noFill/>
-          <a:ln/>
-        </p:spPr>
-        <p:txBody>
-          <a:bodyPr wrap="square" lIns="0" tIns="0" rIns="0" bIns="0" rtlCol="0" anchor="ctr"/>
-          <a:lstStyle/>
-          <a:p>
-            <a:pPr algn="r" indent="0" marL="0">
-              <a:buNone/>
-            </a:pPr>
-            <a:r>
-              <a:rPr lang="en-US" sz="1300" b="1" dirty="0">
-                <a:solidFill>
-                  <a:srgbClr val="0B7A4A"/>
-                </a:solidFill>
-                <a:latin typeface="Inter" pitchFamily="34" charset="0"/>
-                <a:ea typeface="Inter" pitchFamily="34" charset="-122"/>
-                <a:cs typeface="Inter" pitchFamily="34" charset="-120"/>
-              </a:rPr>
-              <a:t>100.0%</a:t>
-            </a:r>
-            <a:endParaRPr lang="en-US" sz="1300" dirty="0"/>
-          </a:p>
-        </p:txBody>
-      </p:sp>
-      <p:sp>
-        <p:nvSpPr>
-          <p:cNvPr id="120" name="Text 118"/>
-          <p:cNvSpPr txBox="1"/>
-          <p:nvPr/>
-        </p:nvSpPr>
-        <p:spPr>
-          <a:xfrm>
-            <a:off x="10652760" y="3109791"/>
-            <a:ext cx="914400" cy="314221"/>
-          </a:xfrm>
-          <a:prstGeom prst="rect">
-            <a:avLst/>
-          </a:prstGeom>
-          <a:noFill/>
-          <a:ln/>
-        </p:spPr>
-        <p:txBody>
-          <a:bodyPr wrap="square" lIns="0" tIns="0" rIns="0" bIns="0" rtlCol="0" anchor="ctr"/>
-          <a:lstStyle/>
-          <a:p>
-            <a:pPr algn="r" indent="0" marL="0">
-              <a:buNone/>
-            </a:pPr>
-            <a:r>
-              <a:rPr lang="en-US" sz="1200" dirty="0">
-                <a:solidFill>
-                  <a:srgbClr val="595959"/>
-                </a:solidFill>
-                <a:latin typeface="Inter" pitchFamily="34" charset="0"/>
-                <a:ea typeface="Inter" pitchFamily="34" charset="-122"/>
-                <a:cs typeface="Inter" pitchFamily="34" charset="-120"/>
-              </a:rPr>
-              <a:t>0</a:t>
-            </a:r>
-            <a:endParaRPr lang="en-US" sz="1200" dirty="0"/>
-          </a:p>
-        </p:txBody>
-      </p:sp>
-      <p:sp>
-        <p:nvSpPr>
-          <p:cNvPr id="121" name="Text 119"/>
-          <p:cNvSpPr txBox="1"/>
-          <p:nvPr/>
-        </p:nvSpPr>
-        <p:spPr>
-          <a:xfrm>
-            <a:off x="8211312" y="3424012"/>
-            <a:ext cx="1673352" cy="314221"/>
-          </a:xfrm>
-          <a:prstGeom prst="rect">
-            <a:avLst/>
-          </a:prstGeom>
-          <a:noFill/>
-          <a:ln/>
-        </p:spPr>
-        <p:txBody>
-          <a:bodyPr wrap="square" lIns="0" tIns="0" rIns="0" bIns="0" rtlCol="0" anchor="ctr"/>
-          <a:lstStyle/>
-          <a:p>
-            <a:pPr indent="0" marL="0">
-              <a:buNone/>
-            </a:pPr>
-            <a:r>
-              <a:rPr lang="en-US" sz="1300" dirty="0">
-                <a:solidFill>
-                  <a:srgbClr val="1A1A1A"/>
-                </a:solidFill>
-                <a:latin typeface="Inter" pitchFamily="34" charset="0"/>
-                <a:ea typeface="Inter" pitchFamily="34" charset="-122"/>
-                <a:cs typeface="Inter" pitchFamily="34" charset="-120"/>
-              </a:rPr>
-              <a:t>Subaru of Las Vegas</a:t>
-            </a:r>
-            <a:endParaRPr lang="en-US" sz="1300" dirty="0"/>
-          </a:p>
-        </p:txBody>
-      </p:sp>
-      <p:sp>
-        <p:nvSpPr>
-          <p:cNvPr id="122" name="Text 120"/>
-          <p:cNvSpPr txBox="1"/>
-          <p:nvPr/>
-        </p:nvSpPr>
-        <p:spPr>
-          <a:xfrm>
-            <a:off x="9902952" y="3424012"/>
-            <a:ext cx="731520" cy="314221"/>
-          </a:xfrm>
-          <a:prstGeom prst="rect">
-            <a:avLst/>
-          </a:prstGeom>
-          <a:noFill/>
-          <a:ln/>
-        </p:spPr>
-        <p:txBody>
-          <a:bodyPr wrap="square" lIns="0" tIns="0" rIns="0" bIns="0" rtlCol="0" anchor="ctr"/>
-          <a:lstStyle/>
-          <a:p>
-            <a:pPr algn="r" indent="0" marL="0">
-              <a:buNone/>
-            </a:pPr>
-            <a:r>
-              <a:rPr lang="en-US" sz="1300" b="1" dirty="0">
-                <a:solidFill>
-                  <a:srgbClr val="0B7A4A"/>
-                </a:solidFill>
-                <a:latin typeface="Inter" pitchFamily="34" charset="0"/>
-                <a:ea typeface="Inter" pitchFamily="34" charset="-122"/>
-                <a:cs typeface="Inter" pitchFamily="34" charset="-120"/>
-              </a:rPr>
-              <a:t>100.0%</a:t>
-            </a:r>
-            <a:endParaRPr lang="en-US" sz="1300" dirty="0"/>
-          </a:p>
-        </p:txBody>
-      </p:sp>
-      <p:sp>
-        <p:nvSpPr>
-          <p:cNvPr id="123" name="Text 121"/>
-          <p:cNvSpPr txBox="1"/>
-          <p:nvPr/>
-        </p:nvSpPr>
-        <p:spPr>
-          <a:xfrm>
-            <a:off x="10652760" y="3424012"/>
-            <a:ext cx="914400" cy="314221"/>
-          </a:xfrm>
-          <a:prstGeom prst="rect">
-            <a:avLst/>
-          </a:prstGeom>
-          <a:noFill/>
-          <a:ln/>
-        </p:spPr>
-        <p:txBody>
-          <a:bodyPr wrap="square" lIns="0" tIns="0" rIns="0" bIns="0" rtlCol="0" anchor="ctr"/>
-          <a:lstStyle/>
-          <a:p>
-            <a:pPr algn="r" indent="0" marL="0">
-              <a:buNone/>
-            </a:pPr>
-            <a:r>
-              <a:rPr lang="en-US" sz="1200" dirty="0">
-                <a:solidFill>
-                  <a:srgbClr val="595959"/>
-                </a:solidFill>
-                <a:latin typeface="Inter" pitchFamily="34" charset="0"/>
-                <a:ea typeface="Inter" pitchFamily="34" charset="-122"/>
-                <a:cs typeface="Inter" pitchFamily="34" charset="-120"/>
-              </a:rPr>
-              <a:t>0</a:t>
-            </a:r>
-            <a:endParaRPr lang="en-US" sz="1200" dirty="0"/>
-          </a:p>
-        </p:txBody>
-      </p:sp>
-      <p:sp>
-        <p:nvSpPr>
-          <p:cNvPr id="124" name="Text 122"/>
-          <p:cNvSpPr txBox="1"/>
-          <p:nvPr/>
-        </p:nvSpPr>
-        <p:spPr>
-          <a:xfrm>
-            <a:off x="8211312" y="3738233"/>
-            <a:ext cx="1673352" cy="314221"/>
-          </a:xfrm>
-          <a:prstGeom prst="rect">
-            <a:avLst/>
-          </a:prstGeom>
-          <a:noFill/>
-          <a:ln/>
-        </p:spPr>
-        <p:txBody>
-          <a:bodyPr wrap="square" lIns="0" tIns="0" rIns="0" bIns="0" rtlCol="0" anchor="ctr"/>
-          <a:lstStyle/>
-          <a:p>
-            <a:pPr indent="0" marL="0">
-              <a:buNone/>
-            </a:pPr>
-            <a:r>
-              <a:rPr lang="en-US" sz="1300" dirty="0">
-                <a:solidFill>
-                  <a:srgbClr val="1A1A1A"/>
-                </a:solidFill>
-                <a:latin typeface="Inter" pitchFamily="34" charset="0"/>
-                <a:ea typeface="Inter" pitchFamily="34" charset="-122"/>
-                <a:cs typeface="Inter" pitchFamily="34" charset="-120"/>
-              </a:rPr>
-              <a:t>Acura</a:t>
-            </a:r>
-            <a:endParaRPr lang="en-US" sz="1300" dirty="0"/>
-          </a:p>
-        </p:txBody>
-      </p:sp>
-      <p:sp>
-        <p:nvSpPr>
-          <p:cNvPr id="125" name="Text 123"/>
-          <p:cNvSpPr txBox="1"/>
-          <p:nvPr/>
-        </p:nvSpPr>
-        <p:spPr>
-          <a:xfrm>
-            <a:off x="9902952" y="3738233"/>
-            <a:ext cx="731520" cy="314221"/>
-          </a:xfrm>
-          <a:prstGeom prst="rect">
-            <a:avLst/>
-          </a:prstGeom>
-          <a:noFill/>
-          <a:ln/>
-        </p:spPr>
-        <p:txBody>
-          <a:bodyPr wrap="square" lIns="0" tIns="0" rIns="0" bIns="0" rtlCol="0" anchor="ctr"/>
-          <a:lstStyle/>
-          <a:p>
-            <a:pPr algn="r" indent="0" marL="0">
-              <a:buNone/>
-            </a:pPr>
-            <a:r>
-              <a:rPr lang="en-US" sz="1300" b="1" dirty="0">
-                <a:solidFill>
-                  <a:srgbClr val="0B7A4A"/>
-                </a:solidFill>
-                <a:latin typeface="Inter" pitchFamily="34" charset="0"/>
-                <a:ea typeface="Inter" pitchFamily="34" charset="-122"/>
-                <a:cs typeface="Inter" pitchFamily="34" charset="-120"/>
-              </a:rPr>
-              <a:t>100.0%</a:t>
-            </a:r>
-            <a:endParaRPr lang="en-US" sz="1300" dirty="0"/>
-          </a:p>
-        </p:txBody>
-      </p:sp>
-      <p:sp>
-        <p:nvSpPr>
-          <p:cNvPr id="126" name="Text 124"/>
-          <p:cNvSpPr txBox="1"/>
-          <p:nvPr/>
-        </p:nvSpPr>
-        <p:spPr>
-          <a:xfrm>
-            <a:off x="10652760" y="3738233"/>
-            <a:ext cx="914400" cy="314221"/>
-          </a:xfrm>
-          <a:prstGeom prst="rect">
-            <a:avLst/>
-          </a:prstGeom>
-          <a:noFill/>
-          <a:ln/>
-        </p:spPr>
-        <p:txBody>
-          <a:bodyPr wrap="square" lIns="0" tIns="0" rIns="0" bIns="0" rtlCol="0" anchor="ctr"/>
-          <a:lstStyle/>
-          <a:p>
-            <a:pPr algn="r" indent="0" marL="0">
-              <a:buNone/>
-            </a:pPr>
-            <a:r>
-              <a:rPr lang="en-US" sz="1200" dirty="0">
-                <a:solidFill>
-                  <a:srgbClr val="595959"/>
-                </a:solidFill>
-                <a:latin typeface="Inter" pitchFamily="34" charset="0"/>
-                <a:ea typeface="Inter" pitchFamily="34" charset="-122"/>
-                <a:cs typeface="Inter" pitchFamily="34" charset="-120"/>
-              </a:rPr>
-              <a:t>0</a:t>
-            </a:r>
-            <a:endParaRPr lang="en-US" sz="1200" dirty="0"/>
-          </a:p>
-        </p:txBody>
-      </p:sp>
-      <p:sp>
-        <p:nvSpPr>
-          <p:cNvPr id="127" name="Shape 125"/>
+          <p:cNvPr id="113" name="Shape 111"/>
           <p:cNvSpPr/>
           <p:nvPr/>
         </p:nvSpPr>
         <p:spPr>
           <a:xfrm>
-            <a:off x="8211312" y="4070743"/>
+            <a:off x="8211312" y="3913632"/>
             <a:ext cx="3355848" cy="22860"/>
           </a:xfrm>
           <a:prstGeom prst="rect">
@@ -6290,13 +5744,13 @@
       </p:sp>
       <p:sp>
         <p:nvSpPr>
-          <p:cNvPr id="128" name="Text 126"/>
-          <p:cNvSpPr txBox="1"/>
-          <p:nvPr/>
-        </p:nvSpPr>
-        <p:spPr>
-          <a:xfrm>
-            <a:off x="8211312" y="4098175"/>
+          <p:cNvPr id="114" name="Text 112"/>
+          <p:cNvSpPr txBox="1"/>
+          <p:nvPr/>
+        </p:nvSpPr>
+        <p:spPr>
+          <a:xfrm>
+            <a:off x="8211312" y="3941064"/>
             <a:ext cx="1828800" cy="219456"/>
           </a:xfrm>
           <a:prstGeom prst="rect">
@@ -6329,13 +5783,13 @@
       </p:sp>
       <p:sp>
         <p:nvSpPr>
-          <p:cNvPr id="129" name="Text 127"/>
-          <p:cNvSpPr txBox="1"/>
-          <p:nvPr/>
-        </p:nvSpPr>
-        <p:spPr>
-          <a:xfrm>
-            <a:off x="9902952" y="4098175"/>
+          <p:cNvPr id="115" name="Text 113"/>
+          <p:cNvSpPr txBox="1"/>
+          <p:nvPr/>
+        </p:nvSpPr>
+        <p:spPr>
+          <a:xfrm>
+            <a:off x="9902952" y="3941064"/>
             <a:ext cx="731520" cy="219456"/>
           </a:xfrm>
           <a:prstGeom prst="rect">
@@ -6368,13 +5822,13 @@
       </p:sp>
       <p:sp>
         <p:nvSpPr>
-          <p:cNvPr id="130" name="Text 128"/>
-          <p:cNvSpPr txBox="1"/>
-          <p:nvPr/>
-        </p:nvSpPr>
-        <p:spPr>
-          <a:xfrm>
-            <a:off x="10652760" y="4098175"/>
+          <p:cNvPr id="116" name="Text 114"/>
+          <p:cNvSpPr txBox="1"/>
+          <p:nvPr/>
+        </p:nvSpPr>
+        <p:spPr>
+          <a:xfrm>
+            <a:off x="10652760" y="3941064"/>
             <a:ext cx="914400" cy="219456"/>
           </a:xfrm>
           <a:prstGeom prst="rect">
@@ -6407,14 +5861,14 @@
       </p:sp>
       <p:sp>
         <p:nvSpPr>
-          <p:cNvPr id="131" name="Text 129"/>
-          <p:cNvSpPr txBox="1"/>
-          <p:nvPr/>
-        </p:nvSpPr>
-        <p:spPr>
-          <a:xfrm>
-            <a:off x="8211312" y="4326775"/>
-            <a:ext cx="1673352" cy="314221"/>
+          <p:cNvPr id="117" name="Text 115"/>
+          <p:cNvSpPr txBox="1"/>
+          <p:nvPr/>
+        </p:nvSpPr>
+        <p:spPr>
+          <a:xfrm>
+            <a:off x="8211312" y="4169664"/>
+            <a:ext cx="1673352" cy="345643"/>
           </a:xfrm>
           <a:prstGeom prst="rect">
             <a:avLst/>
@@ -6446,14 +5900,14 @@
       </p:sp>
       <p:sp>
         <p:nvSpPr>
-          <p:cNvPr id="132" name="Text 130"/>
-          <p:cNvSpPr txBox="1"/>
-          <p:nvPr/>
-        </p:nvSpPr>
-        <p:spPr>
-          <a:xfrm>
-            <a:off x="9902952" y="4326775"/>
-            <a:ext cx="731520" cy="314221"/>
+          <p:cNvPr id="118" name="Text 116"/>
+          <p:cNvSpPr txBox="1"/>
+          <p:nvPr/>
+        </p:nvSpPr>
+        <p:spPr>
+          <a:xfrm>
+            <a:off x="9902952" y="4169664"/>
+            <a:ext cx="731520" cy="345643"/>
           </a:xfrm>
           <a:prstGeom prst="rect">
             <a:avLst/>
@@ -6485,14 +5939,14 @@
       </p:sp>
       <p:sp>
         <p:nvSpPr>
-          <p:cNvPr id="133" name="Text 131"/>
-          <p:cNvSpPr txBox="1"/>
-          <p:nvPr/>
-        </p:nvSpPr>
-        <p:spPr>
-          <a:xfrm>
-            <a:off x="10652760" y="4326775"/>
-            <a:ext cx="914400" cy="314221"/>
+          <p:cNvPr id="119" name="Text 117"/>
+          <p:cNvSpPr txBox="1"/>
+          <p:nvPr/>
+        </p:nvSpPr>
+        <p:spPr>
+          <a:xfrm>
+            <a:off x="10652760" y="4169664"/>
+            <a:ext cx="914400" cy="345643"/>
           </a:xfrm>
           <a:prstGeom prst="rect">
             <a:avLst/>
@@ -6524,14 +5978,14 @@
       </p:sp>
       <p:sp>
         <p:nvSpPr>
-          <p:cNvPr id="134" name="Text 132"/>
-          <p:cNvSpPr txBox="1"/>
-          <p:nvPr/>
-        </p:nvSpPr>
-        <p:spPr>
-          <a:xfrm>
-            <a:off x="8211312" y="4640996"/>
-            <a:ext cx="1673352" cy="314221"/>
+          <p:cNvPr id="120" name="Text 118"/>
+          <p:cNvSpPr txBox="1"/>
+          <p:nvPr/>
+        </p:nvSpPr>
+        <p:spPr>
+          <a:xfrm>
+            <a:off x="8211312" y="4515307"/>
+            <a:ext cx="1673352" cy="345643"/>
           </a:xfrm>
           <a:prstGeom prst="rect">
             <a:avLst/>
@@ -6563,14 +6017,14 @@
       </p:sp>
       <p:sp>
         <p:nvSpPr>
-          <p:cNvPr id="135" name="Text 133"/>
-          <p:cNvSpPr txBox="1"/>
-          <p:nvPr/>
-        </p:nvSpPr>
-        <p:spPr>
-          <a:xfrm>
-            <a:off x="9902952" y="4640996"/>
-            <a:ext cx="731520" cy="314221"/>
+          <p:cNvPr id="121" name="Text 119"/>
+          <p:cNvSpPr txBox="1"/>
+          <p:nvPr/>
+        </p:nvSpPr>
+        <p:spPr>
+          <a:xfrm>
+            <a:off x="9902952" y="4515307"/>
+            <a:ext cx="731520" cy="345643"/>
           </a:xfrm>
           <a:prstGeom prst="rect">
             <a:avLst/>
@@ -6602,14 +6056,14 @@
       </p:sp>
       <p:sp>
         <p:nvSpPr>
-          <p:cNvPr id="136" name="Text 134"/>
-          <p:cNvSpPr txBox="1"/>
-          <p:nvPr/>
-        </p:nvSpPr>
-        <p:spPr>
-          <a:xfrm>
-            <a:off x="10652760" y="4640996"/>
-            <a:ext cx="914400" cy="314221"/>
+          <p:cNvPr id="122" name="Text 120"/>
+          <p:cNvSpPr txBox="1"/>
+          <p:nvPr/>
+        </p:nvSpPr>
+        <p:spPr>
+          <a:xfrm>
+            <a:off x="10652760" y="4515307"/>
+            <a:ext cx="914400" cy="345643"/>
           </a:xfrm>
           <a:prstGeom prst="rect">
             <a:avLst/>
@@ -6641,14 +6095,14 @@
       </p:sp>
       <p:sp>
         <p:nvSpPr>
-          <p:cNvPr id="137" name="Text 135"/>
-          <p:cNvSpPr txBox="1"/>
-          <p:nvPr/>
-        </p:nvSpPr>
-        <p:spPr>
-          <a:xfrm>
-            <a:off x="8211312" y="4955217"/>
-            <a:ext cx="1673352" cy="314221"/>
+          <p:cNvPr id="123" name="Text 121"/>
+          <p:cNvSpPr txBox="1"/>
+          <p:nvPr/>
+        </p:nvSpPr>
+        <p:spPr>
+          <a:xfrm>
+            <a:off x="8211312" y="4860950"/>
+            <a:ext cx="1673352" cy="345643"/>
           </a:xfrm>
           <a:prstGeom prst="rect">
             <a:avLst/>
@@ -6680,14 +6134,14 @@
       </p:sp>
       <p:sp>
         <p:nvSpPr>
-          <p:cNvPr id="138" name="Text 136"/>
-          <p:cNvSpPr txBox="1"/>
-          <p:nvPr/>
-        </p:nvSpPr>
-        <p:spPr>
-          <a:xfrm>
-            <a:off x="9902952" y="4955217"/>
-            <a:ext cx="731520" cy="314221"/>
+          <p:cNvPr id="124" name="Text 122"/>
+          <p:cNvSpPr txBox="1"/>
+          <p:nvPr/>
+        </p:nvSpPr>
+        <p:spPr>
+          <a:xfrm>
+            <a:off x="9902952" y="4860950"/>
+            <a:ext cx="731520" cy="345643"/>
           </a:xfrm>
           <a:prstGeom prst="rect">
             <a:avLst/>
@@ -6719,14 +6173,14 @@
       </p:sp>
       <p:sp>
         <p:nvSpPr>
-          <p:cNvPr id="139" name="Text 137"/>
-          <p:cNvSpPr txBox="1"/>
-          <p:nvPr/>
-        </p:nvSpPr>
-        <p:spPr>
-          <a:xfrm>
-            <a:off x="10652760" y="4955217"/>
-            <a:ext cx="914400" cy="314221"/>
+          <p:cNvPr id="125" name="Text 123"/>
+          <p:cNvSpPr txBox="1"/>
+          <p:nvPr/>
+        </p:nvSpPr>
+        <p:spPr>
+          <a:xfrm>
+            <a:off x="10652760" y="4860950"/>
+            <a:ext cx="914400" cy="345643"/>
           </a:xfrm>
           <a:prstGeom prst="rect">
             <a:avLst/>
@@ -6758,14 +6212,14 @@
       </p:sp>
       <p:sp>
         <p:nvSpPr>
-          <p:cNvPr id="140" name="Shape 138"/>
+          <p:cNvPr id="126" name="Shape 124"/>
           <p:cNvSpPr/>
           <p:nvPr/>
         </p:nvSpPr>
         <p:spPr>
           <a:xfrm>
-            <a:off x="11612880" y="4991793"/>
-            <a:ext cx="54864" cy="241069"/>
+            <a:off x="11612880" y="4897526"/>
+            <a:ext cx="54864" cy="272491"/>
           </a:xfrm>
           <a:prstGeom prst="rect">
             <a:avLst/>
@@ -6778,14 +6232,14 @@
       </p:sp>
       <p:sp>
         <p:nvSpPr>
-          <p:cNvPr id="141" name="Text 139"/>
-          <p:cNvSpPr txBox="1"/>
-          <p:nvPr/>
-        </p:nvSpPr>
-        <p:spPr>
-          <a:xfrm>
-            <a:off x="8211312" y="5269438"/>
-            <a:ext cx="1673352" cy="314221"/>
+          <p:cNvPr id="127" name="Text 125"/>
+          <p:cNvSpPr txBox="1"/>
+          <p:nvPr/>
+        </p:nvSpPr>
+        <p:spPr>
+          <a:xfrm>
+            <a:off x="8211312" y="5206594"/>
+            <a:ext cx="1673352" cy="345643"/>
           </a:xfrm>
           <a:prstGeom prst="rect">
             <a:avLst/>
@@ -6817,14 +6271,14 @@
       </p:sp>
       <p:sp>
         <p:nvSpPr>
-          <p:cNvPr id="142" name="Text 140"/>
-          <p:cNvSpPr txBox="1"/>
-          <p:nvPr/>
-        </p:nvSpPr>
-        <p:spPr>
-          <a:xfrm>
-            <a:off x="9902952" y="5269438"/>
-            <a:ext cx="731520" cy="314221"/>
+          <p:cNvPr id="128" name="Text 126"/>
+          <p:cNvSpPr txBox="1"/>
+          <p:nvPr/>
+        </p:nvSpPr>
+        <p:spPr>
+          <a:xfrm>
+            <a:off x="9902952" y="5206594"/>
+            <a:ext cx="731520" cy="345643"/>
           </a:xfrm>
           <a:prstGeom prst="rect">
             <a:avLst/>
@@ -6856,14 +6310,14 @@
       </p:sp>
       <p:sp>
         <p:nvSpPr>
-          <p:cNvPr id="143" name="Text 141"/>
-          <p:cNvSpPr txBox="1"/>
-          <p:nvPr/>
-        </p:nvSpPr>
-        <p:spPr>
-          <a:xfrm>
-            <a:off x="10652760" y="5269438"/>
-            <a:ext cx="914400" cy="314221"/>
+          <p:cNvPr id="129" name="Text 127"/>
+          <p:cNvSpPr txBox="1"/>
+          <p:nvPr/>
+        </p:nvSpPr>
+        <p:spPr>
+          <a:xfrm>
+            <a:off x="10652760" y="5206594"/>
+            <a:ext cx="914400" cy="345643"/>
           </a:xfrm>
           <a:prstGeom prst="rect">
             <a:avLst/>
@@ -6895,14 +6349,14 @@
       </p:sp>
       <p:sp>
         <p:nvSpPr>
-          <p:cNvPr id="144" name="Shape 142"/>
+          <p:cNvPr id="130" name="Shape 128"/>
           <p:cNvSpPr/>
           <p:nvPr/>
         </p:nvSpPr>
         <p:spPr>
           <a:xfrm>
-            <a:off x="11612880" y="5306014"/>
-            <a:ext cx="54864" cy="241069"/>
+            <a:off x="11612880" y="5243170"/>
+            <a:ext cx="54864" cy="272491"/>
           </a:xfrm>
           <a:prstGeom prst="rect">
             <a:avLst/>
@@ -6915,14 +6369,14 @@
       </p:sp>
       <p:sp>
         <p:nvSpPr>
-          <p:cNvPr id="145" name="Text 143"/>
-          <p:cNvSpPr txBox="1"/>
-          <p:nvPr/>
-        </p:nvSpPr>
-        <p:spPr>
-          <a:xfrm>
-            <a:off x="8211312" y="5583659"/>
-            <a:ext cx="1673352" cy="314221"/>
+          <p:cNvPr id="131" name="Text 129"/>
+          <p:cNvSpPr txBox="1"/>
+          <p:nvPr/>
+        </p:nvSpPr>
+        <p:spPr>
+          <a:xfrm>
+            <a:off x="8211312" y="5552237"/>
+            <a:ext cx="1673352" cy="345643"/>
           </a:xfrm>
           <a:prstGeom prst="rect">
             <a:avLst/>
@@ -6954,14 +6408,14 @@
       </p:sp>
       <p:sp>
         <p:nvSpPr>
-          <p:cNvPr id="146" name="Text 144"/>
-          <p:cNvSpPr txBox="1"/>
-          <p:nvPr/>
-        </p:nvSpPr>
-        <p:spPr>
-          <a:xfrm>
-            <a:off x="9902952" y="5583659"/>
-            <a:ext cx="731520" cy="314221"/>
+          <p:cNvPr id="132" name="Text 130"/>
+          <p:cNvSpPr txBox="1"/>
+          <p:nvPr/>
+        </p:nvSpPr>
+        <p:spPr>
+          <a:xfrm>
+            <a:off x="9902952" y="5552237"/>
+            <a:ext cx="731520" cy="345643"/>
           </a:xfrm>
           <a:prstGeom prst="rect">
             <a:avLst/>
@@ -6993,14 +6447,14 @@
       </p:sp>
       <p:sp>
         <p:nvSpPr>
-          <p:cNvPr id="147" name="Text 145"/>
-          <p:cNvSpPr txBox="1"/>
-          <p:nvPr/>
-        </p:nvSpPr>
-        <p:spPr>
-          <a:xfrm>
-            <a:off x="10652760" y="5583659"/>
-            <a:ext cx="914400" cy="314221"/>
+          <p:cNvPr id="133" name="Text 131"/>
+          <p:cNvSpPr txBox="1"/>
+          <p:nvPr/>
+        </p:nvSpPr>
+        <p:spPr>
+          <a:xfrm>
+            <a:off x="10652760" y="5552237"/>
+            <a:ext cx="914400" cy="345643"/>
           </a:xfrm>
           <a:prstGeom prst="rect">
             <a:avLst/>
@@ -7032,7 +6486,7 @@
       </p:sp>
       <p:sp>
         <p:nvSpPr>
-          <p:cNvPr id="148" name="Shape 146"/>
+          <p:cNvPr id="134" name="Shape 132"/>
           <p:cNvSpPr/>
           <p:nvPr/>
         </p:nvSpPr>
@@ -7052,7 +6506,7 @@
       </p:sp>
       <p:sp>
         <p:nvSpPr>
-          <p:cNvPr id="149" name="Text 147"/>
+          <p:cNvPr id="135" name="Text 133"/>
           <p:cNvSpPr txBox="1"/>
           <p:nvPr/>
         </p:nvSpPr>

--- a/day2-deck/decks/Voice AI - Flai.pptx
+++ b/day2-deck/decks/Voice AI - Flai.pptx
@@ -5423,7 +5423,7 @@
                 <a:ea typeface="Inter" pitchFamily="34" charset="-122"/>
                 <a:cs typeface="Inter" pitchFamily="34" charset="-120"/>
               </a:rPr>
-              <a:t>Group 98.2%</a:t>
+              <a:t>Group 98.2% · 6 stores at 100%</a:t>
             </a:r>
             <a:endParaRPr lang="en-US" sz="1400" dirty="0"/>
           </a:p>
@@ -5482,7 +5482,7 @@
                 <a:ea typeface="Inter" pitchFamily="34" charset="-122"/>
                 <a:cs typeface="Inter" pitchFamily="34" charset="-120"/>
               </a:rPr>
-              <a:t>AT 100% (6)</a:t>
+              <a:t>TOP 5</a:t>
             </a:r>
             <a:endParaRPr lang="en-US" sz="1400" dirty="0"/>
           </a:p>
@@ -5496,8 +5496,86 @@
         </p:nvSpPr>
         <p:spPr>
           <a:xfrm>
+            <a:off x="9902952" y="1938528"/>
+            <a:ext cx="731520" cy="219456"/>
+          </a:xfrm>
+          <a:prstGeom prst="rect">
+            <a:avLst/>
+          </a:prstGeom>
+          <a:noFill/>
+          <a:ln/>
+        </p:spPr>
+        <p:txBody>
+          <a:bodyPr wrap="square" lIns="0" tIns="0" rIns="0" bIns="0" rtlCol="0" anchor="ctr"/>
+          <a:lstStyle/>
+          <a:p>
+            <a:pPr algn="r" indent="0" marL="0">
+              <a:buNone/>
+            </a:pPr>
+            <a:r>
+              <a:rPr lang="en-US" sz="1400" b="1" dirty="0">
+                <a:solidFill>
+                  <a:srgbClr val="595959"/>
+                </a:solidFill>
+                <a:latin typeface="Inter" pitchFamily="34" charset="0"/>
+                <a:ea typeface="Inter" pitchFamily="34" charset="-122"/>
+                <a:cs typeface="Inter" pitchFamily="34" charset="-120"/>
+              </a:rPr>
+              <a:t>Rate</a:t>
+            </a:r>
+            <a:endParaRPr lang="en-US" sz="1400" dirty="0"/>
+          </a:p>
+        </p:txBody>
+      </p:sp>
+      <p:sp>
+        <p:nvSpPr>
+          <p:cNvPr id="108" name="Text 106"/>
+          <p:cNvSpPr txBox="1"/>
+          <p:nvPr/>
+        </p:nvSpPr>
+        <p:spPr>
+          <a:xfrm>
+            <a:off x="10652760" y="1938528"/>
+            <a:ext cx="914400" cy="219456"/>
+          </a:xfrm>
+          <a:prstGeom prst="rect">
+            <a:avLst/>
+          </a:prstGeom>
+          <a:noFill/>
+          <a:ln/>
+        </p:spPr>
+        <p:txBody>
+          <a:bodyPr wrap="square" lIns="0" tIns="0" rIns="0" bIns="0" rtlCol="0" anchor="ctr"/>
+          <a:lstStyle/>
+          <a:p>
+            <a:pPr algn="r" indent="0" marL="0">
+              <a:buNone/>
+            </a:pPr>
+            <a:r>
+              <a:rPr lang="en-US" sz="1400" b="1" dirty="0">
+                <a:solidFill>
+                  <a:srgbClr val="595959"/>
+                </a:solidFill>
+                <a:latin typeface="Inter" pitchFamily="34" charset="0"/>
+                <a:ea typeface="Inter" pitchFamily="34" charset="-122"/>
+                <a:cs typeface="Inter" pitchFamily="34" charset="-120"/>
+              </a:rPr>
+              <a:t>Calls</a:t>
+            </a:r>
+            <a:endParaRPr lang="en-US" sz="1400" dirty="0"/>
+          </a:p>
+        </p:txBody>
+      </p:sp>
+      <p:sp>
+        <p:nvSpPr>
+          <p:cNvPr id="109" name="Text 107"/>
+          <p:cNvSpPr txBox="1"/>
+          <p:nvPr/>
+        </p:nvSpPr>
+        <p:spPr>
+          <a:xfrm>
             <a:off x="8211312" y="2167128"/>
-            <a:ext cx="1632204" cy="345643"/>
+            <a:ext cx="1673352" cy="345643"/>
           </a:xfrm>
           <a:prstGeom prst="rect">
             <a:avLst/>
@@ -5513,7 +5591,46 @@
               <a:buNone/>
             </a:pPr>
             <a:r>
-              <a:rPr lang="en-US" sz="1200" b="1" dirty="0">
+              <a:rPr lang="en-US" sz="1300" dirty="0">
+                <a:solidFill>
+                  <a:srgbClr val="1A1A1A"/>
+                </a:solidFill>
+                <a:latin typeface="Inter" pitchFamily="34" charset="0"/>
+                <a:ea typeface="Inter" pitchFamily="34" charset="-122"/>
+                <a:cs typeface="Inter" pitchFamily="34" charset="-120"/>
+              </a:rPr>
+              <a:t>Kia Las Vegas</a:t>
+            </a:r>
+            <a:endParaRPr lang="en-US" sz="1300" dirty="0"/>
+          </a:p>
+        </p:txBody>
+      </p:sp>
+      <p:sp>
+        <p:nvSpPr>
+          <p:cNvPr id="110" name="Text 108"/>
+          <p:cNvSpPr txBox="1"/>
+          <p:nvPr/>
+        </p:nvSpPr>
+        <p:spPr>
+          <a:xfrm>
+            <a:off x="9902952" y="2167128"/>
+            <a:ext cx="731520" cy="345643"/>
+          </a:xfrm>
+          <a:prstGeom prst="rect">
+            <a:avLst/>
+          </a:prstGeom>
+          <a:noFill/>
+          <a:ln/>
+        </p:spPr>
+        <p:txBody>
+          <a:bodyPr wrap="square" lIns="0" tIns="0" rIns="0" bIns="0" rtlCol="0" anchor="ctr"/>
+          <a:lstStyle/>
+          <a:p>
+            <a:pPr algn="r" indent="0" marL="0">
+              <a:buNone/>
+            </a:pPr>
+            <a:r>
+              <a:rPr lang="en-US" sz="1300" b="1" dirty="0">
                 <a:solidFill>
                   <a:srgbClr val="0B7A4A"/>
                 </a:solidFill>
@@ -5521,7 +5638,46 @@
                 <a:ea typeface="Inter" pitchFamily="34" charset="-122"/>
                 <a:cs typeface="Inter" pitchFamily="34" charset="-120"/>
               </a:rPr>
-              <a:t>Kia Las Vegas</a:t>
+              <a:t>100.0%</a:t>
+            </a:r>
+            <a:endParaRPr lang="en-US" sz="1300" dirty="0"/>
+          </a:p>
+        </p:txBody>
+      </p:sp>
+      <p:sp>
+        <p:nvSpPr>
+          <p:cNvPr id="111" name="Text 109"/>
+          <p:cNvSpPr txBox="1"/>
+          <p:nvPr/>
+        </p:nvSpPr>
+        <p:spPr>
+          <a:xfrm>
+            <a:off x="10652760" y="2167128"/>
+            <a:ext cx="914400" cy="345643"/>
+          </a:xfrm>
+          <a:prstGeom prst="rect">
+            <a:avLst/>
+          </a:prstGeom>
+          <a:noFill/>
+          <a:ln/>
+        </p:spPr>
+        <p:txBody>
+          <a:bodyPr wrap="square" lIns="0" tIns="0" rIns="0" bIns="0" rtlCol="0" anchor="ctr"/>
+          <a:lstStyle/>
+          <a:p>
+            <a:pPr algn="r" indent="0" marL="0">
+              <a:buNone/>
+            </a:pPr>
+            <a:r>
+              <a:rPr lang="en-US" sz="1200" dirty="0">
+                <a:solidFill>
+                  <a:srgbClr val="595959"/>
+                </a:solidFill>
+                <a:latin typeface="Inter" pitchFamily="34" charset="0"/>
+                <a:ea typeface="Inter" pitchFamily="34" charset="-122"/>
+                <a:cs typeface="Inter" pitchFamily="34" charset="-120"/>
+              </a:rPr>
+              <a:t>1,570</a:t>
             </a:r>
             <a:endParaRPr lang="en-US" sz="1200" dirty="0"/>
           </a:p>
@@ -5529,14 +5685,14 @@
       </p:sp>
       <p:sp>
         <p:nvSpPr>
-          <p:cNvPr id="108" name="Text 106"/>
-          <p:cNvSpPr txBox="1"/>
-          <p:nvPr/>
-        </p:nvSpPr>
-        <p:spPr>
-          <a:xfrm>
-            <a:off x="9889236" y="2167128"/>
-            <a:ext cx="1632204" cy="345643"/>
+          <p:cNvPr id="112" name="Text 110"/>
+          <p:cNvSpPr txBox="1"/>
+          <p:nvPr/>
+        </p:nvSpPr>
+        <p:spPr>
+          <a:xfrm>
+            <a:off x="8211312" y="2512771"/>
+            <a:ext cx="1673352" cy="345643"/>
           </a:xfrm>
           <a:prstGeom prst="rect">
             <a:avLst/>
@@ -5552,7 +5708,46 @@
               <a:buNone/>
             </a:pPr>
             <a:r>
-              <a:rPr lang="en-US" sz="1200" b="1" dirty="0">
+              <a:rPr lang="en-US" sz="1300" dirty="0">
+                <a:solidFill>
+                  <a:srgbClr val="1A1A1A"/>
+                </a:solidFill>
+                <a:latin typeface="Inter" pitchFamily="34" charset="0"/>
+                <a:ea typeface="Inter" pitchFamily="34" charset="-122"/>
+                <a:cs typeface="Inter" pitchFamily="34" charset="-120"/>
+              </a:rPr>
+              <a:t>VW Henderson</a:t>
+            </a:r>
+            <a:endParaRPr lang="en-US" sz="1300" dirty="0"/>
+          </a:p>
+        </p:txBody>
+      </p:sp>
+      <p:sp>
+        <p:nvSpPr>
+          <p:cNvPr id="113" name="Text 111"/>
+          <p:cNvSpPr txBox="1"/>
+          <p:nvPr/>
+        </p:nvSpPr>
+        <p:spPr>
+          <a:xfrm>
+            <a:off x="9902952" y="2512771"/>
+            <a:ext cx="731520" cy="345643"/>
+          </a:xfrm>
+          <a:prstGeom prst="rect">
+            <a:avLst/>
+          </a:prstGeom>
+          <a:noFill/>
+          <a:ln/>
+        </p:spPr>
+        <p:txBody>
+          <a:bodyPr wrap="square" lIns="0" tIns="0" rIns="0" bIns="0" rtlCol="0" anchor="ctr"/>
+          <a:lstStyle/>
+          <a:p>
+            <a:pPr algn="r" indent="0" marL="0">
+              <a:buNone/>
+            </a:pPr>
+            <a:r>
+              <a:rPr lang="en-US" sz="1300" b="1" dirty="0">
                 <a:solidFill>
                   <a:srgbClr val="0B7A4A"/>
                 </a:solidFill>
@@ -5560,22 +5755,178 @@
                 <a:ea typeface="Inter" pitchFamily="34" charset="-122"/>
                 <a:cs typeface="Inter" pitchFamily="34" charset="-120"/>
               </a:rPr>
+              <a:t>100.0%</a:t>
+            </a:r>
+            <a:endParaRPr lang="en-US" sz="1300" dirty="0"/>
+          </a:p>
+        </p:txBody>
+      </p:sp>
+      <p:sp>
+        <p:nvSpPr>
+          <p:cNvPr id="114" name="Text 112"/>
+          <p:cNvSpPr txBox="1"/>
+          <p:nvPr/>
+        </p:nvSpPr>
+        <p:spPr>
+          <a:xfrm>
+            <a:off x="10652760" y="2512771"/>
+            <a:ext cx="914400" cy="345643"/>
+          </a:xfrm>
+          <a:prstGeom prst="rect">
+            <a:avLst/>
+          </a:prstGeom>
+          <a:noFill/>
+          <a:ln/>
+        </p:spPr>
+        <p:txBody>
+          <a:bodyPr wrap="square" lIns="0" tIns="0" rIns="0" bIns="0" rtlCol="0" anchor="ctr"/>
+          <a:lstStyle/>
+          <a:p>
+            <a:pPr algn="r" indent="0" marL="0">
+              <a:buNone/>
+            </a:pPr>
+            <a:r>
+              <a:rPr lang="en-US" sz="1200" dirty="0">
+                <a:solidFill>
+                  <a:srgbClr val="595959"/>
+                </a:solidFill>
+                <a:latin typeface="Inter" pitchFamily="34" charset="0"/>
+                <a:ea typeface="Inter" pitchFamily="34" charset="-122"/>
+                <a:cs typeface="Inter" pitchFamily="34" charset="-120"/>
+              </a:rPr>
+              <a:t>1,565</a:t>
+            </a:r>
+            <a:endParaRPr lang="en-US" sz="1200" dirty="0"/>
+          </a:p>
+        </p:txBody>
+      </p:sp>
+      <p:sp>
+        <p:nvSpPr>
+          <p:cNvPr id="115" name="Text 113"/>
+          <p:cNvSpPr txBox="1"/>
+          <p:nvPr/>
+        </p:nvSpPr>
+        <p:spPr>
+          <a:xfrm>
+            <a:off x="8211312" y="2858414"/>
+            <a:ext cx="1673352" cy="345643"/>
+          </a:xfrm>
+          <a:prstGeom prst="rect">
+            <a:avLst/>
+          </a:prstGeom>
+          <a:noFill/>
+          <a:ln/>
+        </p:spPr>
+        <p:txBody>
+          <a:bodyPr wrap="square" lIns="0" tIns="0" rIns="0" bIns="0" rtlCol="0" anchor="ctr"/>
+          <a:lstStyle/>
+          <a:p>
+            <a:pPr indent="0" marL="0">
+              <a:buNone/>
+            </a:pPr>
+            <a:r>
+              <a:rPr lang="en-US" sz="1300" dirty="0">
+                <a:solidFill>
+                  <a:srgbClr val="1A1A1A"/>
+                </a:solidFill>
+                <a:latin typeface="Inter" pitchFamily="34" charset="0"/>
+                <a:ea typeface="Inter" pitchFamily="34" charset="-122"/>
+                <a:cs typeface="Inter" pitchFamily="34" charset="-120"/>
+              </a:rPr>
               <a:t>Lincoln</a:t>
             </a:r>
+            <a:endParaRPr lang="en-US" sz="1300" dirty="0"/>
+          </a:p>
+        </p:txBody>
+      </p:sp>
+      <p:sp>
+        <p:nvSpPr>
+          <p:cNvPr id="116" name="Text 114"/>
+          <p:cNvSpPr txBox="1"/>
+          <p:nvPr/>
+        </p:nvSpPr>
+        <p:spPr>
+          <a:xfrm>
+            <a:off x="9902952" y="2858414"/>
+            <a:ext cx="731520" cy="345643"/>
+          </a:xfrm>
+          <a:prstGeom prst="rect">
+            <a:avLst/>
+          </a:prstGeom>
+          <a:noFill/>
+          <a:ln/>
+        </p:spPr>
+        <p:txBody>
+          <a:bodyPr wrap="square" lIns="0" tIns="0" rIns="0" bIns="0" rtlCol="0" anchor="ctr"/>
+          <a:lstStyle/>
+          <a:p>
+            <a:pPr algn="r" indent="0" marL="0">
+              <a:buNone/>
+            </a:pPr>
+            <a:r>
+              <a:rPr lang="en-US" sz="1300" b="1" dirty="0">
+                <a:solidFill>
+                  <a:srgbClr val="0B7A4A"/>
+                </a:solidFill>
+                <a:latin typeface="Inter" pitchFamily="34" charset="0"/>
+                <a:ea typeface="Inter" pitchFamily="34" charset="-122"/>
+                <a:cs typeface="Inter" pitchFamily="34" charset="-120"/>
+              </a:rPr>
+              <a:t>100.0%</a:t>
+            </a:r>
+            <a:endParaRPr lang="en-US" sz="1300" dirty="0"/>
+          </a:p>
+        </p:txBody>
+      </p:sp>
+      <p:sp>
+        <p:nvSpPr>
+          <p:cNvPr id="117" name="Text 115"/>
+          <p:cNvSpPr txBox="1"/>
+          <p:nvPr/>
+        </p:nvSpPr>
+        <p:spPr>
+          <a:xfrm>
+            <a:off x="10652760" y="2858414"/>
+            <a:ext cx="914400" cy="345643"/>
+          </a:xfrm>
+          <a:prstGeom prst="rect">
+            <a:avLst/>
+          </a:prstGeom>
+          <a:noFill/>
+          <a:ln/>
+        </p:spPr>
+        <p:txBody>
+          <a:bodyPr wrap="square" lIns="0" tIns="0" rIns="0" bIns="0" rtlCol="0" anchor="ctr"/>
+          <a:lstStyle/>
+          <a:p>
+            <a:pPr algn="r" indent="0" marL="0">
+              <a:buNone/>
+            </a:pPr>
+            <a:r>
+              <a:rPr lang="en-US" sz="1200" dirty="0">
+                <a:solidFill>
+                  <a:srgbClr val="595959"/>
+                </a:solidFill>
+                <a:latin typeface="Inter" pitchFamily="34" charset="0"/>
+                <a:ea typeface="Inter" pitchFamily="34" charset="-122"/>
+                <a:cs typeface="Inter" pitchFamily="34" charset="-120"/>
+              </a:rPr>
+              <a:t>1,458</a:t>
+            </a:r>
             <a:endParaRPr lang="en-US" sz="1200" dirty="0"/>
           </a:p>
         </p:txBody>
       </p:sp>
       <p:sp>
         <p:nvSpPr>
-          <p:cNvPr id="109" name="Text 107"/>
-          <p:cNvSpPr txBox="1"/>
-          <p:nvPr/>
-        </p:nvSpPr>
-        <p:spPr>
-          <a:xfrm>
-            <a:off x="8211312" y="2512771"/>
-            <a:ext cx="1632204" cy="345643"/>
+          <p:cNvPr id="118" name="Text 116"/>
+          <p:cNvSpPr txBox="1"/>
+          <p:nvPr/>
+        </p:nvSpPr>
+        <p:spPr>
+          <a:xfrm>
+            <a:off x="8211312" y="3204058"/>
+            <a:ext cx="1673352" cy="345643"/>
           </a:xfrm>
           <a:prstGeom prst="rect">
             <a:avLst/>
@@ -5591,7 +5942,46 @@
               <a:buNone/>
             </a:pPr>
             <a:r>
-              <a:rPr lang="en-US" sz="1200" b="1" dirty="0">
+              <a:rPr lang="en-US" sz="1300" dirty="0">
+                <a:solidFill>
+                  <a:srgbClr val="1A1A1A"/>
+                </a:solidFill>
+                <a:latin typeface="Inter" pitchFamily="34" charset="0"/>
+                <a:ea typeface="Inter" pitchFamily="34" charset="-122"/>
+                <a:cs typeface="Inter" pitchFamily="34" charset="-120"/>
+              </a:rPr>
+              <a:t>Subaru of Las Vegas</a:t>
+            </a:r>
+            <a:endParaRPr lang="en-US" sz="1300" dirty="0"/>
+          </a:p>
+        </p:txBody>
+      </p:sp>
+      <p:sp>
+        <p:nvSpPr>
+          <p:cNvPr id="119" name="Text 117"/>
+          <p:cNvSpPr txBox="1"/>
+          <p:nvPr/>
+        </p:nvSpPr>
+        <p:spPr>
+          <a:xfrm>
+            <a:off x="9902952" y="3204058"/>
+            <a:ext cx="731520" cy="345643"/>
+          </a:xfrm>
+          <a:prstGeom prst="rect">
+            <a:avLst/>
+          </a:prstGeom>
+          <a:noFill/>
+          <a:ln/>
+        </p:spPr>
+        <p:txBody>
+          <a:bodyPr wrap="square" lIns="0" tIns="0" rIns="0" bIns="0" rtlCol="0" anchor="ctr"/>
+          <a:lstStyle/>
+          <a:p>
+            <a:pPr algn="r" indent="0" marL="0">
+              <a:buNone/>
+            </a:pPr>
+            <a:r>
+              <a:rPr lang="en-US" sz="1300" b="1" dirty="0">
                 <a:solidFill>
                   <a:srgbClr val="0B7A4A"/>
                 </a:solidFill>
@@ -5599,7 +5989,46 @@
                 <a:ea typeface="Inter" pitchFamily="34" charset="-122"/>
                 <a:cs typeface="Inter" pitchFamily="34" charset="-120"/>
               </a:rPr>
-              <a:t>VW Henderson</a:t>
+              <a:t>100.0%</a:t>
+            </a:r>
+            <a:endParaRPr lang="en-US" sz="1300" dirty="0"/>
+          </a:p>
+        </p:txBody>
+      </p:sp>
+      <p:sp>
+        <p:nvSpPr>
+          <p:cNvPr id="120" name="Text 118"/>
+          <p:cNvSpPr txBox="1"/>
+          <p:nvPr/>
+        </p:nvSpPr>
+        <p:spPr>
+          <a:xfrm>
+            <a:off x="10652760" y="3204058"/>
+            <a:ext cx="914400" cy="345643"/>
+          </a:xfrm>
+          <a:prstGeom prst="rect">
+            <a:avLst/>
+          </a:prstGeom>
+          <a:noFill/>
+          <a:ln/>
+        </p:spPr>
+        <p:txBody>
+          <a:bodyPr wrap="square" lIns="0" tIns="0" rIns="0" bIns="0" rtlCol="0" anchor="ctr"/>
+          <a:lstStyle/>
+          <a:p>
+            <a:pPr algn="r" indent="0" marL="0">
+              <a:buNone/>
+            </a:pPr>
+            <a:r>
+              <a:rPr lang="en-US" sz="1200" dirty="0">
+                <a:solidFill>
+                  <a:srgbClr val="595959"/>
+                </a:solidFill>
+                <a:latin typeface="Inter" pitchFamily="34" charset="0"/>
+                <a:ea typeface="Inter" pitchFamily="34" charset="-122"/>
+                <a:cs typeface="Inter" pitchFamily="34" charset="-120"/>
+              </a:rPr>
+              <a:t>1,120</a:t>
             </a:r>
             <a:endParaRPr lang="en-US" sz="1200" dirty="0"/>
           </a:p>
@@ -5607,14 +6036,14 @@
       </p:sp>
       <p:sp>
         <p:nvSpPr>
-          <p:cNvPr id="110" name="Text 108"/>
-          <p:cNvSpPr txBox="1"/>
-          <p:nvPr/>
-        </p:nvSpPr>
-        <p:spPr>
-          <a:xfrm>
-            <a:off x="9889236" y="2512771"/>
-            <a:ext cx="1632204" cy="345643"/>
+          <p:cNvPr id="121" name="Text 119"/>
+          <p:cNvSpPr txBox="1"/>
+          <p:nvPr/>
+        </p:nvSpPr>
+        <p:spPr>
+          <a:xfrm>
+            <a:off x="8211312" y="3549701"/>
+            <a:ext cx="1673352" cy="345643"/>
           </a:xfrm>
           <a:prstGeom prst="rect">
             <a:avLst/>
@@ -5630,7 +6059,46 @@
               <a:buNone/>
             </a:pPr>
             <a:r>
-              <a:rPr lang="en-US" sz="1200" b="1" dirty="0">
+              <a:rPr lang="en-US" sz="1300" dirty="0">
+                <a:solidFill>
+                  <a:srgbClr val="1A1A1A"/>
+                </a:solidFill>
+                <a:latin typeface="Inter" pitchFamily="34" charset="0"/>
+                <a:ea typeface="Inter" pitchFamily="34" charset="-122"/>
+                <a:cs typeface="Inter" pitchFamily="34" charset="-120"/>
+              </a:rPr>
+              <a:t>Land Rover Reno</a:t>
+            </a:r>
+            <a:endParaRPr lang="en-US" sz="1300" dirty="0"/>
+          </a:p>
+        </p:txBody>
+      </p:sp>
+      <p:sp>
+        <p:nvSpPr>
+          <p:cNvPr id="122" name="Text 120"/>
+          <p:cNvSpPr txBox="1"/>
+          <p:nvPr/>
+        </p:nvSpPr>
+        <p:spPr>
+          <a:xfrm>
+            <a:off x="9902952" y="3549701"/>
+            <a:ext cx="731520" cy="345643"/>
+          </a:xfrm>
+          <a:prstGeom prst="rect">
+            <a:avLst/>
+          </a:prstGeom>
+          <a:noFill/>
+          <a:ln/>
+        </p:spPr>
+        <p:txBody>
+          <a:bodyPr wrap="square" lIns="0" tIns="0" rIns="0" bIns="0" rtlCol="0" anchor="ctr"/>
+          <a:lstStyle/>
+          <a:p>
+            <a:pPr algn="r" indent="0" marL="0">
+              <a:buNone/>
+            </a:pPr>
+            <a:r>
+              <a:rPr lang="en-US" sz="1300" b="1" dirty="0">
                 <a:solidFill>
                   <a:srgbClr val="0B7A4A"/>
                 </a:solidFill>
@@ -5638,7 +6106,46 @@
                 <a:ea typeface="Inter" pitchFamily="34" charset="-122"/>
                 <a:cs typeface="Inter" pitchFamily="34" charset="-120"/>
               </a:rPr>
-              <a:t>Land Rover Reno</a:t>
+              <a:t>100.0%</a:t>
+            </a:r>
+            <a:endParaRPr lang="en-US" sz="1300" dirty="0"/>
+          </a:p>
+        </p:txBody>
+      </p:sp>
+      <p:sp>
+        <p:nvSpPr>
+          <p:cNvPr id="123" name="Text 121"/>
+          <p:cNvSpPr txBox="1"/>
+          <p:nvPr/>
+        </p:nvSpPr>
+        <p:spPr>
+          <a:xfrm>
+            <a:off x="10652760" y="3549701"/>
+            <a:ext cx="914400" cy="345643"/>
+          </a:xfrm>
+          <a:prstGeom prst="rect">
+            <a:avLst/>
+          </a:prstGeom>
+          <a:noFill/>
+          <a:ln/>
+        </p:spPr>
+        <p:txBody>
+          <a:bodyPr wrap="square" lIns="0" tIns="0" rIns="0" bIns="0" rtlCol="0" anchor="ctr"/>
+          <a:lstStyle/>
+          <a:p>
+            <a:pPr algn="r" indent="0" marL="0">
+              <a:buNone/>
+            </a:pPr>
+            <a:r>
+              <a:rPr lang="en-US" sz="1200" dirty="0">
+                <a:solidFill>
+                  <a:srgbClr val="595959"/>
+                </a:solidFill>
+                <a:latin typeface="Inter" pitchFamily="34" charset="0"/>
+                <a:ea typeface="Inter" pitchFamily="34" charset="-122"/>
+                <a:cs typeface="Inter" pitchFamily="34" charset="-120"/>
+              </a:rPr>
+              <a:t>911</a:t>
             </a:r>
             <a:endParaRPr lang="en-US" sz="1200" dirty="0"/>
           </a:p>
@@ -5646,85 +6153,7 @@
       </p:sp>
       <p:sp>
         <p:nvSpPr>
-          <p:cNvPr id="111" name="Text 109"/>
-          <p:cNvSpPr txBox="1"/>
-          <p:nvPr/>
-        </p:nvSpPr>
-        <p:spPr>
-          <a:xfrm>
-            <a:off x="8211312" y="2858414"/>
-            <a:ext cx="1632204" cy="345643"/>
-          </a:xfrm>
-          <a:prstGeom prst="rect">
-            <a:avLst/>
-          </a:prstGeom>
-          <a:noFill/>
-          <a:ln/>
-        </p:spPr>
-        <p:txBody>
-          <a:bodyPr wrap="square" lIns="0" tIns="0" rIns="0" bIns="0" rtlCol="0" anchor="ctr"/>
-          <a:lstStyle/>
-          <a:p>
-            <a:pPr indent="0" marL="0">
-              <a:buNone/>
-            </a:pPr>
-            <a:r>
-              <a:rPr lang="en-US" sz="1200" b="1" dirty="0">
-                <a:solidFill>
-                  <a:srgbClr val="0B7A4A"/>
-                </a:solidFill>
-                <a:latin typeface="Inter" pitchFamily="34" charset="0"/>
-                <a:ea typeface="Inter" pitchFamily="34" charset="-122"/>
-                <a:cs typeface="Inter" pitchFamily="34" charset="-120"/>
-              </a:rPr>
-              <a:t>Subaru of Las Vegas</a:t>
-            </a:r>
-            <a:endParaRPr lang="en-US" sz="1200" dirty="0"/>
-          </a:p>
-        </p:txBody>
-      </p:sp>
-      <p:sp>
-        <p:nvSpPr>
-          <p:cNvPr id="112" name="Text 110"/>
-          <p:cNvSpPr txBox="1"/>
-          <p:nvPr/>
-        </p:nvSpPr>
-        <p:spPr>
-          <a:xfrm>
-            <a:off x="9889236" y="2858414"/>
-            <a:ext cx="1632204" cy="345643"/>
-          </a:xfrm>
-          <a:prstGeom prst="rect">
-            <a:avLst/>
-          </a:prstGeom>
-          <a:noFill/>
-          <a:ln/>
-        </p:spPr>
-        <p:txBody>
-          <a:bodyPr wrap="square" lIns="0" tIns="0" rIns="0" bIns="0" rtlCol="0" anchor="ctr"/>
-          <a:lstStyle/>
-          <a:p>
-            <a:pPr indent="0" marL="0">
-              <a:buNone/>
-            </a:pPr>
-            <a:r>
-              <a:rPr lang="en-US" sz="1200" b="1" dirty="0">
-                <a:solidFill>
-                  <a:srgbClr val="0B7A4A"/>
-                </a:solidFill>
-                <a:latin typeface="Inter" pitchFamily="34" charset="0"/>
-                <a:ea typeface="Inter" pitchFamily="34" charset="-122"/>
-                <a:cs typeface="Inter" pitchFamily="34" charset="-120"/>
-              </a:rPr>
-              <a:t>Acura</a:t>
-            </a:r>
-            <a:endParaRPr lang="en-US" sz="1200" dirty="0"/>
-          </a:p>
-        </p:txBody>
-      </p:sp>
-      <p:sp>
-        <p:nvSpPr>
-          <p:cNvPr id="113" name="Shape 111"/>
+          <p:cNvPr id="124" name="Shape 122"/>
           <p:cNvSpPr/>
           <p:nvPr/>
         </p:nvSpPr>
@@ -5744,7 +6173,7 @@
       </p:sp>
       <p:sp>
         <p:nvSpPr>
-          <p:cNvPr id="114" name="Text 112"/>
+          <p:cNvPr id="125" name="Text 123"/>
           <p:cNvSpPr txBox="1"/>
           <p:nvPr/>
         </p:nvSpPr>
@@ -5783,7 +6212,7 @@
       </p:sp>
       <p:sp>
         <p:nvSpPr>
-          <p:cNvPr id="115" name="Text 113"/>
+          <p:cNvPr id="126" name="Text 124"/>
           <p:cNvSpPr txBox="1"/>
           <p:nvPr/>
         </p:nvSpPr>
@@ -5822,7 +6251,7 @@
       </p:sp>
       <p:sp>
         <p:nvSpPr>
-          <p:cNvPr id="116" name="Text 114"/>
+          <p:cNvPr id="127" name="Text 125"/>
           <p:cNvSpPr txBox="1"/>
           <p:nvPr/>
         </p:nvSpPr>
@@ -5861,7 +6290,7 @@
       </p:sp>
       <p:sp>
         <p:nvSpPr>
-          <p:cNvPr id="117" name="Text 115"/>
+          <p:cNvPr id="128" name="Text 126"/>
           <p:cNvSpPr txBox="1"/>
           <p:nvPr/>
         </p:nvSpPr>
@@ -5900,7 +6329,7 @@
       </p:sp>
       <p:sp>
         <p:nvSpPr>
-          <p:cNvPr id="118" name="Text 116"/>
+          <p:cNvPr id="129" name="Text 127"/>
           <p:cNvSpPr txBox="1"/>
           <p:nvPr/>
         </p:nvSpPr>
@@ -5939,7 +6368,7 @@
       </p:sp>
       <p:sp>
         <p:nvSpPr>
-          <p:cNvPr id="119" name="Text 117"/>
+          <p:cNvPr id="130" name="Text 128"/>
           <p:cNvSpPr txBox="1"/>
           <p:nvPr/>
         </p:nvSpPr>
@@ -5978,7 +6407,7 @@
       </p:sp>
       <p:sp>
         <p:nvSpPr>
-          <p:cNvPr id="120" name="Text 118"/>
+          <p:cNvPr id="131" name="Text 129"/>
           <p:cNvSpPr txBox="1"/>
           <p:nvPr/>
         </p:nvSpPr>
@@ -6017,7 +6446,7 @@
       </p:sp>
       <p:sp>
         <p:nvSpPr>
-          <p:cNvPr id="121" name="Text 119"/>
+          <p:cNvPr id="132" name="Text 130"/>
           <p:cNvSpPr txBox="1"/>
           <p:nvPr/>
         </p:nvSpPr>
@@ -6056,7 +6485,7 @@
       </p:sp>
       <p:sp>
         <p:nvSpPr>
-          <p:cNvPr id="122" name="Text 120"/>
+          <p:cNvPr id="133" name="Text 131"/>
           <p:cNvSpPr txBox="1"/>
           <p:nvPr/>
         </p:nvSpPr>
@@ -6095,7 +6524,7 @@
       </p:sp>
       <p:sp>
         <p:nvSpPr>
-          <p:cNvPr id="123" name="Text 121"/>
+          <p:cNvPr id="134" name="Text 132"/>
           <p:cNvSpPr txBox="1"/>
           <p:nvPr/>
         </p:nvSpPr>
@@ -6134,7 +6563,7 @@
       </p:sp>
       <p:sp>
         <p:nvSpPr>
-          <p:cNvPr id="124" name="Text 122"/>
+          <p:cNvPr id="135" name="Text 133"/>
           <p:cNvSpPr txBox="1"/>
           <p:nvPr/>
         </p:nvSpPr>
@@ -6173,7 +6602,7 @@
       </p:sp>
       <p:sp>
         <p:nvSpPr>
-          <p:cNvPr id="125" name="Text 123"/>
+          <p:cNvPr id="136" name="Text 134"/>
           <p:cNvSpPr txBox="1"/>
           <p:nvPr/>
         </p:nvSpPr>
@@ -6212,7 +6641,7 @@
       </p:sp>
       <p:sp>
         <p:nvSpPr>
-          <p:cNvPr id="126" name="Shape 124"/>
+          <p:cNvPr id="137" name="Shape 135"/>
           <p:cNvSpPr/>
           <p:nvPr/>
         </p:nvSpPr>
@@ -6232,7 +6661,7 @@
       </p:sp>
       <p:sp>
         <p:nvSpPr>
-          <p:cNvPr id="127" name="Text 125"/>
+          <p:cNvPr id="138" name="Text 136"/>
           <p:cNvSpPr txBox="1"/>
           <p:nvPr/>
         </p:nvSpPr>
@@ -6271,7 +6700,7 @@
       </p:sp>
       <p:sp>
         <p:nvSpPr>
-          <p:cNvPr id="128" name="Text 126"/>
+          <p:cNvPr id="139" name="Text 137"/>
           <p:cNvSpPr txBox="1"/>
           <p:nvPr/>
         </p:nvSpPr>
@@ -6310,7 +6739,7 @@
       </p:sp>
       <p:sp>
         <p:nvSpPr>
-          <p:cNvPr id="129" name="Text 127"/>
+          <p:cNvPr id="140" name="Text 138"/>
           <p:cNvSpPr txBox="1"/>
           <p:nvPr/>
         </p:nvSpPr>
@@ -6349,7 +6778,7 @@
       </p:sp>
       <p:sp>
         <p:nvSpPr>
-          <p:cNvPr id="130" name="Shape 128"/>
+          <p:cNvPr id="141" name="Shape 139"/>
           <p:cNvSpPr/>
           <p:nvPr/>
         </p:nvSpPr>
@@ -6369,7 +6798,7 @@
       </p:sp>
       <p:sp>
         <p:nvSpPr>
-          <p:cNvPr id="131" name="Text 129"/>
+          <p:cNvPr id="142" name="Text 140"/>
           <p:cNvSpPr txBox="1"/>
           <p:nvPr/>
         </p:nvSpPr>
@@ -6408,7 +6837,7 @@
       </p:sp>
       <p:sp>
         <p:nvSpPr>
-          <p:cNvPr id="132" name="Text 130"/>
+          <p:cNvPr id="143" name="Text 141"/>
           <p:cNvSpPr txBox="1"/>
           <p:nvPr/>
         </p:nvSpPr>
@@ -6447,7 +6876,7 @@
       </p:sp>
       <p:sp>
         <p:nvSpPr>
-          <p:cNvPr id="133" name="Text 131"/>
+          <p:cNvPr id="144" name="Text 142"/>
           <p:cNvSpPr txBox="1"/>
           <p:nvPr/>
         </p:nvSpPr>
@@ -6486,7 +6915,7 @@
       </p:sp>
       <p:sp>
         <p:nvSpPr>
-          <p:cNvPr id="134" name="Shape 132"/>
+          <p:cNvPr id="145" name="Shape 143"/>
           <p:cNvSpPr/>
           <p:nvPr/>
         </p:nvSpPr>
@@ -6506,7 +6935,7 @@
       </p:sp>
       <p:sp>
         <p:nvSpPr>
-          <p:cNvPr id="135" name="Text 133"/>
+          <p:cNvPr id="146" name="Text 144"/>
           <p:cNvSpPr txBox="1"/>
           <p:nvPr/>
         </p:nvSpPr>

--- a/day2-deck/decks/Voice AI - Flai.pptx
+++ b/day2-deck/decks/Voice AI - Flai.pptx
@@ -591,7 +591,7 @@
           <a:p>
             <a:r>
               <a:rPr lang="en-US" dirty="0"/>
-              <a:t>Source: Flai voice AI dashboard, Service view, standings export, Jul 26 - Oct 26, 2026 (93 days). Flai's location names (26 with calls). Pickup rate and resolution as Flai reports them. Flai's estimated savings, revenue and profit are not used. Green bar: the store is in more than one top list; red bar: in more than one bottom 5. Ranked among the 23 locations with 300+ calls (Subaru St George, Land Rover Henderson, Jaguar Land Rover Las Vegas have fewer). Honda Spokane shows no calls in the period.Talk track: the voice AI answers every call, books what it can and hands the rest to the store. What happens next is ours: someone has to pick up the transfer, and every callback has to be closed. A store that doesn't pick up is sending a customer it already has to voicemail.
+              <a:t>Takeaway (off the slide): Chevy GMC Bullhead picks up 77.1% of transfers; Kia St George picks up 21.9%. Nissan and Prescott Hyundai hold 272 of the group's 484 open callbacks.Source: Flai voice AI dashboard, Service view, standings export, Jul 26 - Oct 26, 2026 (93 days). Flai's location names (26 with calls). Pickup rate and resolution as Flai reports them. Flai's estimated savings, revenue and profit are not used. Green bar: the store is in more than one top list; red bar: in more than one bottom 5. Ranked among the 23 locations with 300+ calls (Subaru St George, Land Rover Henderson, Jaguar Land Rover Las Vegas have fewer). Honda Spokane shows no calls in the period.Talk track: the voice AI answers every call, books what it can and hands the rest to the store. What happens next is ours: someone has to pick up the transfer, and every callback has to be closed. A store that doesn't pick up is sending a customer it already has to voicemail.
 Definitions to confirm against Flai: pickup rate is read as the share of transferred calls a person picked up; resolution as the share of callback requests closed. Resolve time in the export runs to weeks at some locations and is not shown.</a:t>
             </a:r>
             <a:endParaRPr lang="en-US" dirty="0"/>
@@ -1956,7 +1956,7 @@
         <p:spPr>
           <a:xfrm>
             <a:off x="457200" y="1207008"/>
-            <a:ext cx="3685032" cy="4782312"/>
+            <a:ext cx="3685032" cy="5148072"/>
           </a:xfrm>
           <a:prstGeom prst="rect">
             <a:avLst/>
@@ -2191,7 +2191,7 @@
         <p:spPr>
           <a:xfrm>
             <a:off x="621792" y="2167128"/>
-            <a:ext cx="1673352" cy="345643"/>
+            <a:ext cx="1673352" cy="382219"/>
           </a:xfrm>
           <a:prstGeom prst="rect">
             <a:avLst/>
@@ -2230,7 +2230,7 @@
         <p:spPr>
           <a:xfrm>
             <a:off x="2313432" y="2167128"/>
-            <a:ext cx="731520" cy="345643"/>
+            <a:ext cx="731520" cy="382219"/>
           </a:xfrm>
           <a:prstGeom prst="rect">
             <a:avLst/>
@@ -2269,7 +2269,7 @@
         <p:spPr>
           <a:xfrm>
             <a:off x="3063240" y="2167128"/>
-            <a:ext cx="914400" cy="345643"/>
+            <a:ext cx="914400" cy="382219"/>
           </a:xfrm>
           <a:prstGeom prst="rect">
             <a:avLst/>
@@ -2308,7 +2308,7 @@
         <p:spPr>
           <a:xfrm>
             <a:off x="4023360" y="2203704"/>
-            <a:ext cx="54864" cy="272491"/>
+            <a:ext cx="54864" cy="309067"/>
           </a:xfrm>
           <a:prstGeom prst="rect">
             <a:avLst/>
@@ -2327,8 +2327,8 @@
         </p:nvSpPr>
         <p:spPr>
           <a:xfrm>
-            <a:off x="621792" y="2512771"/>
-            <a:ext cx="1673352" cy="345643"/>
+            <a:off x="621792" y="2549347"/>
+            <a:ext cx="1673352" cy="382219"/>
           </a:xfrm>
           <a:prstGeom prst="rect">
             <a:avLst/>
@@ -2366,8 +2366,8 @@
         </p:nvSpPr>
         <p:spPr>
           <a:xfrm>
-            <a:off x="2313432" y="2512771"/>
-            <a:ext cx="731520" cy="345643"/>
+            <a:off x="2313432" y="2549347"/>
+            <a:ext cx="731520" cy="382219"/>
           </a:xfrm>
           <a:prstGeom prst="rect">
             <a:avLst/>
@@ -2405,8 +2405,8 @@
         </p:nvSpPr>
         <p:spPr>
           <a:xfrm>
-            <a:off x="3063240" y="2512771"/>
-            <a:ext cx="914400" cy="345643"/>
+            <a:off x="3063240" y="2549347"/>
+            <a:ext cx="914400" cy="382219"/>
           </a:xfrm>
           <a:prstGeom prst="rect">
             <a:avLst/>
@@ -2444,8 +2444,8 @@
         </p:nvSpPr>
         <p:spPr>
           <a:xfrm>
-            <a:off x="621792" y="2858414"/>
-            <a:ext cx="1673352" cy="345643"/>
+            <a:off x="621792" y="2931566"/>
+            <a:ext cx="1673352" cy="382219"/>
           </a:xfrm>
           <a:prstGeom prst="rect">
             <a:avLst/>
@@ -2483,8 +2483,8 @@
         </p:nvSpPr>
         <p:spPr>
           <a:xfrm>
-            <a:off x="2313432" y="2858414"/>
-            <a:ext cx="731520" cy="345643"/>
+            <a:off x="2313432" y="2931566"/>
+            <a:ext cx="731520" cy="382219"/>
           </a:xfrm>
           <a:prstGeom prst="rect">
             <a:avLst/>
@@ -2522,8 +2522,8 @@
         </p:nvSpPr>
         <p:spPr>
           <a:xfrm>
-            <a:off x="3063240" y="2858414"/>
-            <a:ext cx="914400" cy="345643"/>
+            <a:off x="3063240" y="2931566"/>
+            <a:ext cx="914400" cy="382219"/>
           </a:xfrm>
           <a:prstGeom prst="rect">
             <a:avLst/>
@@ -2561,8 +2561,8 @@
         </p:nvSpPr>
         <p:spPr>
           <a:xfrm>
-            <a:off x="4023360" y="2894990"/>
-            <a:ext cx="54864" cy="272491"/>
+            <a:off x="4023360" y="2968142"/>
+            <a:ext cx="54864" cy="309067"/>
           </a:xfrm>
           <a:prstGeom prst="rect">
             <a:avLst/>
@@ -2581,8 +2581,8 @@
         </p:nvSpPr>
         <p:spPr>
           <a:xfrm>
-            <a:off x="621792" y="3204058"/>
-            <a:ext cx="1673352" cy="345643"/>
+            <a:off x="621792" y="3313786"/>
+            <a:ext cx="1673352" cy="382219"/>
           </a:xfrm>
           <a:prstGeom prst="rect">
             <a:avLst/>
@@ -2620,8 +2620,8 @@
         </p:nvSpPr>
         <p:spPr>
           <a:xfrm>
-            <a:off x="2313432" y="3204058"/>
-            <a:ext cx="731520" cy="345643"/>
+            <a:off x="2313432" y="3313786"/>
+            <a:ext cx="731520" cy="382219"/>
           </a:xfrm>
           <a:prstGeom prst="rect">
             <a:avLst/>
@@ -2659,8 +2659,8 @@
         </p:nvSpPr>
         <p:spPr>
           <a:xfrm>
-            <a:off x="3063240" y="3204058"/>
-            <a:ext cx="914400" cy="345643"/>
+            <a:off x="3063240" y="3313786"/>
+            <a:ext cx="914400" cy="382219"/>
           </a:xfrm>
           <a:prstGeom prst="rect">
             <a:avLst/>
@@ -2698,8 +2698,8 @@
         </p:nvSpPr>
         <p:spPr>
           <a:xfrm>
-            <a:off x="4023360" y="3240634"/>
-            <a:ext cx="54864" cy="272491"/>
+            <a:off x="4023360" y="3350362"/>
+            <a:ext cx="54864" cy="309067"/>
           </a:xfrm>
           <a:prstGeom prst="rect">
             <a:avLst/>
@@ -2718,8 +2718,8 @@
         </p:nvSpPr>
         <p:spPr>
           <a:xfrm>
-            <a:off x="621792" y="3549701"/>
-            <a:ext cx="1673352" cy="345643"/>
+            <a:off x="621792" y="3696005"/>
+            <a:ext cx="1673352" cy="382219"/>
           </a:xfrm>
           <a:prstGeom prst="rect">
             <a:avLst/>
@@ -2757,8 +2757,8 @@
         </p:nvSpPr>
         <p:spPr>
           <a:xfrm>
-            <a:off x="2313432" y="3549701"/>
-            <a:ext cx="731520" cy="345643"/>
+            <a:off x="2313432" y="3696005"/>
+            <a:ext cx="731520" cy="382219"/>
           </a:xfrm>
           <a:prstGeom prst="rect">
             <a:avLst/>
@@ -2796,8 +2796,8 @@
         </p:nvSpPr>
         <p:spPr>
           <a:xfrm>
-            <a:off x="3063240" y="3549701"/>
-            <a:ext cx="914400" cy="345643"/>
+            <a:off x="3063240" y="3696005"/>
+            <a:ext cx="914400" cy="382219"/>
           </a:xfrm>
           <a:prstGeom prst="rect">
             <a:avLst/>
@@ -2835,8 +2835,8 @@
         </p:nvSpPr>
         <p:spPr>
           <a:xfrm>
-            <a:off x="4023360" y="3586277"/>
-            <a:ext cx="54864" cy="272491"/>
+            <a:off x="4023360" y="3732581"/>
+            <a:ext cx="54864" cy="309067"/>
           </a:xfrm>
           <a:prstGeom prst="rect">
             <a:avLst/>
@@ -2855,7 +2855,7 @@
         </p:nvSpPr>
         <p:spPr>
           <a:xfrm>
-            <a:off x="621792" y="3913632"/>
+            <a:off x="621792" y="4096512"/>
             <a:ext cx="3355848" cy="22860"/>
           </a:xfrm>
           <a:prstGeom prst="rect">
@@ -2875,7 +2875,7 @@
         </p:nvSpPr>
         <p:spPr>
           <a:xfrm>
-            <a:off x="621792" y="3941064"/>
+            <a:off x="621792" y="4123944"/>
             <a:ext cx="1828800" cy="219456"/>
           </a:xfrm>
           <a:prstGeom prst="rect">
@@ -2914,7 +2914,7 @@
         </p:nvSpPr>
         <p:spPr>
           <a:xfrm>
-            <a:off x="2313432" y="3941064"/>
+            <a:off x="2313432" y="4123944"/>
             <a:ext cx="731520" cy="219456"/>
           </a:xfrm>
           <a:prstGeom prst="rect">
@@ -2953,7 +2953,7 @@
         </p:nvSpPr>
         <p:spPr>
           <a:xfrm>
-            <a:off x="3063240" y="3941064"/>
+            <a:off x="3063240" y="4123944"/>
             <a:ext cx="914400" cy="219456"/>
           </a:xfrm>
           <a:prstGeom prst="rect">
@@ -2992,8 +2992,8 @@
         </p:nvSpPr>
         <p:spPr>
           <a:xfrm>
-            <a:off x="621792" y="4169664"/>
-            <a:ext cx="1673352" cy="345643"/>
+            <a:off x="621792" y="4352544"/>
+            <a:ext cx="1673352" cy="382219"/>
           </a:xfrm>
           <a:prstGeom prst="rect">
             <a:avLst/>
@@ -3031,8 +3031,8 @@
         </p:nvSpPr>
         <p:spPr>
           <a:xfrm>
-            <a:off x="2313432" y="4169664"/>
-            <a:ext cx="731520" cy="345643"/>
+            <a:off x="2313432" y="4352544"/>
+            <a:ext cx="731520" cy="382219"/>
           </a:xfrm>
           <a:prstGeom prst="rect">
             <a:avLst/>
@@ -3070,8 +3070,8 @@
         </p:nvSpPr>
         <p:spPr>
           <a:xfrm>
-            <a:off x="3063240" y="4169664"/>
-            <a:ext cx="914400" cy="345643"/>
+            <a:off x="3063240" y="4352544"/>
+            <a:ext cx="914400" cy="382219"/>
           </a:xfrm>
           <a:prstGeom prst="rect">
             <a:avLst/>
@@ -3109,8 +3109,8 @@
         </p:nvSpPr>
         <p:spPr>
           <a:xfrm>
-            <a:off x="4023360" y="4206240"/>
-            <a:ext cx="54864" cy="272491"/>
+            <a:off x="4023360" y="4389120"/>
+            <a:ext cx="54864" cy="309067"/>
           </a:xfrm>
           <a:prstGeom prst="rect">
             <a:avLst/>
@@ -3129,8 +3129,8 @@
         </p:nvSpPr>
         <p:spPr>
           <a:xfrm>
-            <a:off x="621792" y="4515307"/>
-            <a:ext cx="1673352" cy="345643"/>
+            <a:off x="621792" y="4734763"/>
+            <a:ext cx="1673352" cy="382219"/>
           </a:xfrm>
           <a:prstGeom prst="rect">
             <a:avLst/>
@@ -3168,8 +3168,8 @@
         </p:nvSpPr>
         <p:spPr>
           <a:xfrm>
-            <a:off x="2313432" y="4515307"/>
-            <a:ext cx="731520" cy="345643"/>
+            <a:off x="2313432" y="4734763"/>
+            <a:ext cx="731520" cy="382219"/>
           </a:xfrm>
           <a:prstGeom prst="rect">
             <a:avLst/>
@@ -3207,8 +3207,8 @@
         </p:nvSpPr>
         <p:spPr>
           <a:xfrm>
-            <a:off x="3063240" y="4515307"/>
-            <a:ext cx="914400" cy="345643"/>
+            <a:off x="3063240" y="4734763"/>
+            <a:ext cx="914400" cy="382219"/>
           </a:xfrm>
           <a:prstGeom prst="rect">
             <a:avLst/>
@@ -3246,8 +3246,8 @@
         </p:nvSpPr>
         <p:spPr>
           <a:xfrm>
-            <a:off x="4023360" y="4551883"/>
-            <a:ext cx="54864" cy="272491"/>
+            <a:off x="4023360" y="4771339"/>
+            <a:ext cx="54864" cy="309067"/>
           </a:xfrm>
           <a:prstGeom prst="rect">
             <a:avLst/>
@@ -3266,8 +3266,8 @@
         </p:nvSpPr>
         <p:spPr>
           <a:xfrm>
-            <a:off x="621792" y="4860950"/>
-            <a:ext cx="1673352" cy="345643"/>
+            <a:off x="621792" y="5116982"/>
+            <a:ext cx="1673352" cy="382219"/>
           </a:xfrm>
           <a:prstGeom prst="rect">
             <a:avLst/>
@@ -3305,8 +3305,8 @@
         </p:nvSpPr>
         <p:spPr>
           <a:xfrm>
-            <a:off x="2313432" y="4860950"/>
-            <a:ext cx="731520" cy="345643"/>
+            <a:off x="2313432" y="5116982"/>
+            <a:ext cx="731520" cy="382219"/>
           </a:xfrm>
           <a:prstGeom prst="rect">
             <a:avLst/>
@@ -3344,8 +3344,8 @@
         </p:nvSpPr>
         <p:spPr>
           <a:xfrm>
-            <a:off x="3063240" y="4860950"/>
-            <a:ext cx="914400" cy="345643"/>
+            <a:off x="3063240" y="5116982"/>
+            <a:ext cx="914400" cy="382219"/>
           </a:xfrm>
           <a:prstGeom prst="rect">
             <a:avLst/>
@@ -3383,8 +3383,8 @@
         </p:nvSpPr>
         <p:spPr>
           <a:xfrm>
-            <a:off x="621792" y="5206594"/>
-            <a:ext cx="1673352" cy="345643"/>
+            <a:off x="621792" y="5499202"/>
+            <a:ext cx="1673352" cy="382219"/>
           </a:xfrm>
           <a:prstGeom prst="rect">
             <a:avLst/>
@@ -3422,8 +3422,8 @@
         </p:nvSpPr>
         <p:spPr>
           <a:xfrm>
-            <a:off x="2313432" y="5206594"/>
-            <a:ext cx="731520" cy="345643"/>
+            <a:off x="2313432" y="5499202"/>
+            <a:ext cx="731520" cy="382219"/>
           </a:xfrm>
           <a:prstGeom prst="rect">
             <a:avLst/>
@@ -3461,8 +3461,8 @@
         </p:nvSpPr>
         <p:spPr>
           <a:xfrm>
-            <a:off x="3063240" y="5206594"/>
-            <a:ext cx="914400" cy="345643"/>
+            <a:off x="3063240" y="5499202"/>
+            <a:ext cx="914400" cy="382219"/>
           </a:xfrm>
           <a:prstGeom prst="rect">
             <a:avLst/>
@@ -3500,8 +3500,8 @@
         </p:nvSpPr>
         <p:spPr>
           <a:xfrm>
-            <a:off x="4023360" y="5243170"/>
-            <a:ext cx="54864" cy="272491"/>
+            <a:off x="4023360" y="5535778"/>
+            <a:ext cx="54864" cy="309067"/>
           </a:xfrm>
           <a:prstGeom prst="rect">
             <a:avLst/>
@@ -3520,8 +3520,8 @@
         </p:nvSpPr>
         <p:spPr>
           <a:xfrm>
-            <a:off x="621792" y="5552237"/>
-            <a:ext cx="1673352" cy="345643"/>
+            <a:off x="621792" y="5881421"/>
+            <a:ext cx="1673352" cy="382219"/>
           </a:xfrm>
           <a:prstGeom prst="rect">
             <a:avLst/>
@@ -3559,8 +3559,8 @@
         </p:nvSpPr>
         <p:spPr>
           <a:xfrm>
-            <a:off x="2313432" y="5552237"/>
-            <a:ext cx="731520" cy="345643"/>
+            <a:off x="2313432" y="5881421"/>
+            <a:ext cx="731520" cy="382219"/>
           </a:xfrm>
           <a:prstGeom prst="rect">
             <a:avLst/>
@@ -3598,8 +3598,8 @@
         </p:nvSpPr>
         <p:spPr>
           <a:xfrm>
-            <a:off x="3063240" y="5552237"/>
-            <a:ext cx="914400" cy="345643"/>
+            <a:off x="3063240" y="5881421"/>
+            <a:ext cx="914400" cy="382219"/>
           </a:xfrm>
           <a:prstGeom prst="rect">
             <a:avLst/>
@@ -3637,8 +3637,8 @@
         </p:nvSpPr>
         <p:spPr>
           <a:xfrm>
-            <a:off x="4023360" y="5588813"/>
-            <a:ext cx="54864" cy="272491"/>
+            <a:off x="4023360" y="5917997"/>
+            <a:ext cx="54864" cy="309067"/>
           </a:xfrm>
           <a:prstGeom prst="rect">
             <a:avLst/>
@@ -3658,7 +3658,7 @@
         <p:spPr>
           <a:xfrm>
             <a:off x="4251960" y="1207008"/>
-            <a:ext cx="3685032" cy="4782312"/>
+            <a:ext cx="3685032" cy="5148072"/>
           </a:xfrm>
           <a:prstGeom prst="rect">
             <a:avLst/>
@@ -3893,7 +3893,7 @@
         <p:spPr>
           <a:xfrm>
             <a:off x="4416552" y="2167128"/>
-            <a:ext cx="1673352" cy="345643"/>
+            <a:ext cx="1673352" cy="382219"/>
           </a:xfrm>
           <a:prstGeom prst="rect">
             <a:avLst/>
@@ -3932,7 +3932,7 @@
         <p:spPr>
           <a:xfrm>
             <a:off x="6108192" y="2167128"/>
-            <a:ext cx="731520" cy="345643"/>
+            <a:ext cx="731520" cy="382219"/>
           </a:xfrm>
           <a:prstGeom prst="rect">
             <a:avLst/>
@@ -3971,7 +3971,7 @@
         <p:spPr>
           <a:xfrm>
             <a:off x="6858000" y="2167128"/>
-            <a:ext cx="914400" cy="345643"/>
+            <a:ext cx="914400" cy="382219"/>
           </a:xfrm>
           <a:prstGeom prst="rect">
             <a:avLst/>
@@ -4010,7 +4010,7 @@
         <p:spPr>
           <a:xfrm>
             <a:off x="7818120" y="2203704"/>
-            <a:ext cx="54864" cy="272491"/>
+            <a:ext cx="54864" cy="309067"/>
           </a:xfrm>
           <a:prstGeom prst="rect">
             <a:avLst/>
@@ -4029,8 +4029,8 @@
         </p:nvSpPr>
         <p:spPr>
           <a:xfrm>
-            <a:off x="4416552" y="2512771"/>
-            <a:ext cx="1673352" cy="345643"/>
+            <a:off x="4416552" y="2549347"/>
+            <a:ext cx="1673352" cy="382219"/>
           </a:xfrm>
           <a:prstGeom prst="rect">
             <a:avLst/>
@@ -4068,8 +4068,8 @@
         </p:nvSpPr>
         <p:spPr>
           <a:xfrm>
-            <a:off x="6108192" y="2512771"/>
-            <a:ext cx="731520" cy="345643"/>
+            <a:off x="6108192" y="2549347"/>
+            <a:ext cx="731520" cy="382219"/>
           </a:xfrm>
           <a:prstGeom prst="rect">
             <a:avLst/>
@@ -4107,8 +4107,8 @@
         </p:nvSpPr>
         <p:spPr>
           <a:xfrm>
-            <a:off x="6858000" y="2512771"/>
-            <a:ext cx="914400" cy="345643"/>
+            <a:off x="6858000" y="2549347"/>
+            <a:ext cx="914400" cy="382219"/>
           </a:xfrm>
           <a:prstGeom prst="rect">
             <a:avLst/>
@@ -4146,8 +4146,8 @@
         </p:nvSpPr>
         <p:spPr>
           <a:xfrm>
-            <a:off x="7818120" y="2549347"/>
-            <a:ext cx="54864" cy="272491"/>
+            <a:off x="7818120" y="2585923"/>
+            <a:ext cx="54864" cy="309067"/>
           </a:xfrm>
           <a:prstGeom prst="rect">
             <a:avLst/>
@@ -4166,8 +4166,8 @@
         </p:nvSpPr>
         <p:spPr>
           <a:xfrm>
-            <a:off x="4416552" y="2858414"/>
-            <a:ext cx="1673352" cy="345643"/>
+            <a:off x="4416552" y="2931566"/>
+            <a:ext cx="1673352" cy="382219"/>
           </a:xfrm>
           <a:prstGeom prst="rect">
             <a:avLst/>
@@ -4205,8 +4205,8 @@
         </p:nvSpPr>
         <p:spPr>
           <a:xfrm>
-            <a:off x="6108192" y="2858414"/>
-            <a:ext cx="731520" cy="345643"/>
+            <a:off x="6108192" y="2931566"/>
+            <a:ext cx="731520" cy="382219"/>
           </a:xfrm>
           <a:prstGeom prst="rect">
             <a:avLst/>
@@ -4244,8 +4244,8 @@
         </p:nvSpPr>
         <p:spPr>
           <a:xfrm>
-            <a:off x="6858000" y="2858414"/>
-            <a:ext cx="914400" cy="345643"/>
+            <a:off x="6858000" y="2931566"/>
+            <a:ext cx="914400" cy="382219"/>
           </a:xfrm>
           <a:prstGeom prst="rect">
             <a:avLst/>
@@ -4283,8 +4283,8 @@
         </p:nvSpPr>
         <p:spPr>
           <a:xfrm>
-            <a:off x="7818120" y="2894990"/>
-            <a:ext cx="54864" cy="272491"/>
+            <a:off x="7818120" y="2968142"/>
+            <a:ext cx="54864" cy="309067"/>
           </a:xfrm>
           <a:prstGeom prst="rect">
             <a:avLst/>
@@ -4303,8 +4303,8 @@
         </p:nvSpPr>
         <p:spPr>
           <a:xfrm>
-            <a:off x="4416552" y="3204058"/>
-            <a:ext cx="1673352" cy="345643"/>
+            <a:off x="4416552" y="3313786"/>
+            <a:ext cx="1673352" cy="382219"/>
           </a:xfrm>
           <a:prstGeom prst="rect">
             <a:avLst/>
@@ -4342,8 +4342,8 @@
         </p:nvSpPr>
         <p:spPr>
           <a:xfrm>
-            <a:off x="6108192" y="3204058"/>
-            <a:ext cx="731520" cy="345643"/>
+            <a:off x="6108192" y="3313786"/>
+            <a:ext cx="731520" cy="382219"/>
           </a:xfrm>
           <a:prstGeom prst="rect">
             <a:avLst/>
@@ -4381,8 +4381,8 @@
         </p:nvSpPr>
         <p:spPr>
           <a:xfrm>
-            <a:off x="6858000" y="3204058"/>
-            <a:ext cx="914400" cy="345643"/>
+            <a:off x="6858000" y="3313786"/>
+            <a:ext cx="914400" cy="382219"/>
           </a:xfrm>
           <a:prstGeom prst="rect">
             <a:avLst/>
@@ -4420,8 +4420,8 @@
         </p:nvSpPr>
         <p:spPr>
           <a:xfrm>
-            <a:off x="7818120" y="3240634"/>
-            <a:ext cx="54864" cy="272491"/>
+            <a:off x="7818120" y="3350362"/>
+            <a:ext cx="54864" cy="309067"/>
           </a:xfrm>
           <a:prstGeom prst="rect">
             <a:avLst/>
@@ -4440,8 +4440,8 @@
         </p:nvSpPr>
         <p:spPr>
           <a:xfrm>
-            <a:off x="4416552" y="3549701"/>
-            <a:ext cx="1673352" cy="345643"/>
+            <a:off x="4416552" y="3696005"/>
+            <a:ext cx="1673352" cy="382219"/>
           </a:xfrm>
           <a:prstGeom prst="rect">
             <a:avLst/>
@@ -4479,8 +4479,8 @@
         </p:nvSpPr>
         <p:spPr>
           <a:xfrm>
-            <a:off x="6108192" y="3549701"/>
-            <a:ext cx="731520" cy="345643"/>
+            <a:off x="6108192" y="3696005"/>
+            <a:ext cx="731520" cy="382219"/>
           </a:xfrm>
           <a:prstGeom prst="rect">
             <a:avLst/>
@@ -4518,8 +4518,8 @@
         </p:nvSpPr>
         <p:spPr>
           <a:xfrm>
-            <a:off x="6858000" y="3549701"/>
-            <a:ext cx="914400" cy="345643"/>
+            <a:off x="6858000" y="3696005"/>
+            <a:ext cx="914400" cy="382219"/>
           </a:xfrm>
           <a:prstGeom prst="rect">
             <a:avLst/>
@@ -4557,7 +4557,7 @@
         </p:nvSpPr>
         <p:spPr>
           <a:xfrm>
-            <a:off x="4416552" y="3913632"/>
+            <a:off x="4416552" y="4096512"/>
             <a:ext cx="3355848" cy="22860"/>
           </a:xfrm>
           <a:prstGeom prst="rect">
@@ -4577,7 +4577,7 @@
         </p:nvSpPr>
         <p:spPr>
           <a:xfrm>
-            <a:off x="4416552" y="3941064"/>
+            <a:off x="4416552" y="4123944"/>
             <a:ext cx="1828800" cy="219456"/>
           </a:xfrm>
           <a:prstGeom prst="rect">
@@ -4616,7 +4616,7 @@
         </p:nvSpPr>
         <p:spPr>
           <a:xfrm>
-            <a:off x="6108192" y="3941064"/>
+            <a:off x="6108192" y="4123944"/>
             <a:ext cx="731520" cy="219456"/>
           </a:xfrm>
           <a:prstGeom prst="rect">
@@ -4655,7 +4655,7 @@
         </p:nvSpPr>
         <p:spPr>
           <a:xfrm>
-            <a:off x="6858000" y="3941064"/>
+            <a:off x="6858000" y="4123944"/>
             <a:ext cx="914400" cy="219456"/>
           </a:xfrm>
           <a:prstGeom prst="rect">
@@ -4694,8 +4694,8 @@
         </p:nvSpPr>
         <p:spPr>
           <a:xfrm>
-            <a:off x="4416552" y="4169664"/>
-            <a:ext cx="1673352" cy="345643"/>
+            <a:off x="4416552" y="4352544"/>
+            <a:ext cx="1673352" cy="382219"/>
           </a:xfrm>
           <a:prstGeom prst="rect">
             <a:avLst/>
@@ -4733,8 +4733,8 @@
         </p:nvSpPr>
         <p:spPr>
           <a:xfrm>
-            <a:off x="6108192" y="4169664"/>
-            <a:ext cx="731520" cy="345643"/>
+            <a:off x="6108192" y="4352544"/>
+            <a:ext cx="731520" cy="382219"/>
           </a:xfrm>
           <a:prstGeom prst="rect">
             <a:avLst/>
@@ -4772,8 +4772,8 @@
         </p:nvSpPr>
         <p:spPr>
           <a:xfrm>
-            <a:off x="6858000" y="4169664"/>
-            <a:ext cx="914400" cy="345643"/>
+            <a:off x="6858000" y="4352544"/>
+            <a:ext cx="914400" cy="382219"/>
           </a:xfrm>
           <a:prstGeom prst="rect">
             <a:avLst/>
@@ -4811,8 +4811,8 @@
         </p:nvSpPr>
         <p:spPr>
           <a:xfrm>
-            <a:off x="7818120" y="4206240"/>
-            <a:ext cx="54864" cy="272491"/>
+            <a:off x="7818120" y="4389120"/>
+            <a:ext cx="54864" cy="309067"/>
           </a:xfrm>
           <a:prstGeom prst="rect">
             <a:avLst/>
@@ -4831,8 +4831,8 @@
         </p:nvSpPr>
         <p:spPr>
           <a:xfrm>
-            <a:off x="4416552" y="4515307"/>
-            <a:ext cx="1673352" cy="345643"/>
+            <a:off x="4416552" y="4734763"/>
+            <a:ext cx="1673352" cy="382219"/>
           </a:xfrm>
           <a:prstGeom prst="rect">
             <a:avLst/>
@@ -4870,8 +4870,8 @@
         </p:nvSpPr>
         <p:spPr>
           <a:xfrm>
-            <a:off x="6108192" y="4515307"/>
-            <a:ext cx="731520" cy="345643"/>
+            <a:off x="6108192" y="4734763"/>
+            <a:ext cx="731520" cy="382219"/>
           </a:xfrm>
           <a:prstGeom prst="rect">
             <a:avLst/>
@@ -4909,8 +4909,8 @@
         </p:nvSpPr>
         <p:spPr>
           <a:xfrm>
-            <a:off x="6858000" y="4515307"/>
-            <a:ext cx="914400" cy="345643"/>
+            <a:off x="6858000" y="4734763"/>
+            <a:ext cx="914400" cy="382219"/>
           </a:xfrm>
           <a:prstGeom prst="rect">
             <a:avLst/>
@@ -4948,8 +4948,8 @@
         </p:nvSpPr>
         <p:spPr>
           <a:xfrm>
-            <a:off x="4416552" y="4860950"/>
-            <a:ext cx="1673352" cy="345643"/>
+            <a:off x="4416552" y="5116982"/>
+            <a:ext cx="1673352" cy="382219"/>
           </a:xfrm>
           <a:prstGeom prst="rect">
             <a:avLst/>
@@ -4987,8 +4987,8 @@
         </p:nvSpPr>
         <p:spPr>
           <a:xfrm>
-            <a:off x="6108192" y="4860950"/>
-            <a:ext cx="731520" cy="345643"/>
+            <a:off x="6108192" y="5116982"/>
+            <a:ext cx="731520" cy="382219"/>
           </a:xfrm>
           <a:prstGeom prst="rect">
             <a:avLst/>
@@ -5026,8 +5026,8 @@
         </p:nvSpPr>
         <p:spPr>
           <a:xfrm>
-            <a:off x="6858000" y="4860950"/>
-            <a:ext cx="914400" cy="345643"/>
+            <a:off x="6858000" y="5116982"/>
+            <a:ext cx="914400" cy="382219"/>
           </a:xfrm>
           <a:prstGeom prst="rect">
             <a:avLst/>
@@ -5065,8 +5065,8 @@
         </p:nvSpPr>
         <p:spPr>
           <a:xfrm>
-            <a:off x="4416552" y="5206594"/>
-            <a:ext cx="1673352" cy="345643"/>
+            <a:off x="4416552" y="5499202"/>
+            <a:ext cx="1673352" cy="382219"/>
           </a:xfrm>
           <a:prstGeom prst="rect">
             <a:avLst/>
@@ -5104,8 +5104,8 @@
         </p:nvSpPr>
         <p:spPr>
           <a:xfrm>
-            <a:off x="6108192" y="5206594"/>
-            <a:ext cx="731520" cy="345643"/>
+            <a:off x="6108192" y="5499202"/>
+            <a:ext cx="731520" cy="382219"/>
           </a:xfrm>
           <a:prstGeom prst="rect">
             <a:avLst/>
@@ -5143,8 +5143,8 @@
         </p:nvSpPr>
         <p:spPr>
           <a:xfrm>
-            <a:off x="6858000" y="5206594"/>
-            <a:ext cx="914400" cy="345643"/>
+            <a:off x="6858000" y="5499202"/>
+            <a:ext cx="914400" cy="382219"/>
           </a:xfrm>
           <a:prstGeom prst="rect">
             <a:avLst/>
@@ -5182,8 +5182,8 @@
         </p:nvSpPr>
         <p:spPr>
           <a:xfrm>
-            <a:off x="7818120" y="5243170"/>
-            <a:ext cx="54864" cy="272491"/>
+            <a:off x="7818120" y="5535778"/>
+            <a:ext cx="54864" cy="309067"/>
           </a:xfrm>
           <a:prstGeom prst="rect">
             <a:avLst/>
@@ -5202,8 +5202,8 @@
         </p:nvSpPr>
         <p:spPr>
           <a:xfrm>
-            <a:off x="4416552" y="5552237"/>
-            <a:ext cx="1673352" cy="345643"/>
+            <a:off x="4416552" y="5881421"/>
+            <a:ext cx="1673352" cy="382219"/>
           </a:xfrm>
           <a:prstGeom prst="rect">
             <a:avLst/>
@@ -5241,8 +5241,8 @@
         </p:nvSpPr>
         <p:spPr>
           <a:xfrm>
-            <a:off x="6108192" y="5552237"/>
-            <a:ext cx="731520" cy="345643"/>
+            <a:off x="6108192" y="5881421"/>
+            <a:ext cx="731520" cy="382219"/>
           </a:xfrm>
           <a:prstGeom prst="rect">
             <a:avLst/>
@@ -5280,8 +5280,8 @@
         </p:nvSpPr>
         <p:spPr>
           <a:xfrm>
-            <a:off x="6858000" y="5552237"/>
-            <a:ext cx="914400" cy="345643"/>
+            <a:off x="6858000" y="5881421"/>
+            <a:ext cx="914400" cy="382219"/>
           </a:xfrm>
           <a:prstGeom prst="rect">
             <a:avLst/>
@@ -5319,8 +5319,8 @@
         </p:nvSpPr>
         <p:spPr>
           <a:xfrm>
-            <a:off x="7818120" y="5588813"/>
-            <a:ext cx="54864" cy="272491"/>
+            <a:off x="7818120" y="5917997"/>
+            <a:ext cx="54864" cy="309067"/>
           </a:xfrm>
           <a:prstGeom prst="rect">
             <a:avLst/>
@@ -5340,7 +5340,7 @@
         <p:spPr>
           <a:xfrm>
             <a:off x="8046720" y="1207008"/>
-            <a:ext cx="3685032" cy="4782312"/>
+            <a:ext cx="3685032" cy="5148072"/>
           </a:xfrm>
           <a:prstGeom prst="rect">
             <a:avLst/>
@@ -5575,7 +5575,7 @@
         <p:spPr>
           <a:xfrm>
             <a:off x="8211312" y="2167128"/>
-            <a:ext cx="1673352" cy="345643"/>
+            <a:ext cx="1673352" cy="382219"/>
           </a:xfrm>
           <a:prstGeom prst="rect">
             <a:avLst/>
@@ -5614,7 +5614,7 @@
         <p:spPr>
           <a:xfrm>
             <a:off x="9902952" y="2167128"/>
-            <a:ext cx="731520" cy="345643"/>
+            <a:ext cx="731520" cy="382219"/>
           </a:xfrm>
           <a:prstGeom prst="rect">
             <a:avLst/>
@@ -5653,7 +5653,7 @@
         <p:spPr>
           <a:xfrm>
             <a:off x="10652760" y="2167128"/>
-            <a:ext cx="914400" cy="345643"/>
+            <a:ext cx="914400" cy="382219"/>
           </a:xfrm>
           <a:prstGeom prst="rect">
             <a:avLst/>
@@ -5691,8 +5691,8 @@
         </p:nvSpPr>
         <p:spPr>
           <a:xfrm>
-            <a:off x="8211312" y="2512771"/>
-            <a:ext cx="1673352" cy="345643"/>
+            <a:off x="8211312" y="2549347"/>
+            <a:ext cx="1673352" cy="382219"/>
           </a:xfrm>
           <a:prstGeom prst="rect">
             <a:avLst/>
@@ -5730,8 +5730,8 @@
         </p:nvSpPr>
         <p:spPr>
           <a:xfrm>
-            <a:off x="9902952" y="2512771"/>
-            <a:ext cx="731520" cy="345643"/>
+            <a:off x="9902952" y="2549347"/>
+            <a:ext cx="731520" cy="382219"/>
           </a:xfrm>
           <a:prstGeom prst="rect">
             <a:avLst/>
@@ -5769,8 +5769,8 @@
         </p:nvSpPr>
         <p:spPr>
           <a:xfrm>
-            <a:off x="10652760" y="2512771"/>
-            <a:ext cx="914400" cy="345643"/>
+            <a:off x="10652760" y="2549347"/>
+            <a:ext cx="914400" cy="382219"/>
           </a:xfrm>
           <a:prstGeom prst="rect">
             <a:avLst/>
@@ -5808,8 +5808,8 @@
         </p:nvSpPr>
         <p:spPr>
           <a:xfrm>
-            <a:off x="8211312" y="2858414"/>
-            <a:ext cx="1673352" cy="345643"/>
+            <a:off x="8211312" y="2931566"/>
+            <a:ext cx="1673352" cy="382219"/>
           </a:xfrm>
           <a:prstGeom prst="rect">
             <a:avLst/>
@@ -5847,8 +5847,8 @@
         </p:nvSpPr>
         <p:spPr>
           <a:xfrm>
-            <a:off x="9902952" y="2858414"/>
-            <a:ext cx="731520" cy="345643"/>
+            <a:off x="9902952" y="2931566"/>
+            <a:ext cx="731520" cy="382219"/>
           </a:xfrm>
           <a:prstGeom prst="rect">
             <a:avLst/>
@@ -5886,8 +5886,8 @@
         </p:nvSpPr>
         <p:spPr>
           <a:xfrm>
-            <a:off x="10652760" y="2858414"/>
-            <a:ext cx="914400" cy="345643"/>
+            <a:off x="10652760" y="2931566"/>
+            <a:ext cx="914400" cy="382219"/>
           </a:xfrm>
           <a:prstGeom prst="rect">
             <a:avLst/>
@@ -5925,8 +5925,8 @@
         </p:nvSpPr>
         <p:spPr>
           <a:xfrm>
-            <a:off x="8211312" y="3204058"/>
-            <a:ext cx="1673352" cy="345643"/>
+            <a:off x="8211312" y="3313786"/>
+            <a:ext cx="1673352" cy="382219"/>
           </a:xfrm>
           <a:prstGeom prst="rect">
             <a:avLst/>
@@ -5964,8 +5964,8 @@
         </p:nvSpPr>
         <p:spPr>
           <a:xfrm>
-            <a:off x="9902952" y="3204058"/>
-            <a:ext cx="731520" cy="345643"/>
+            <a:off x="9902952" y="3313786"/>
+            <a:ext cx="731520" cy="382219"/>
           </a:xfrm>
           <a:prstGeom prst="rect">
             <a:avLst/>
@@ -6003,8 +6003,8 @@
         </p:nvSpPr>
         <p:spPr>
           <a:xfrm>
-            <a:off x="10652760" y="3204058"/>
-            <a:ext cx="914400" cy="345643"/>
+            <a:off x="10652760" y="3313786"/>
+            <a:ext cx="914400" cy="382219"/>
           </a:xfrm>
           <a:prstGeom prst="rect">
             <a:avLst/>
@@ -6042,8 +6042,8 @@
         </p:nvSpPr>
         <p:spPr>
           <a:xfrm>
-            <a:off x="8211312" y="3549701"/>
-            <a:ext cx="1673352" cy="345643"/>
+            <a:off x="8211312" y="3696005"/>
+            <a:ext cx="1673352" cy="382219"/>
           </a:xfrm>
           <a:prstGeom prst="rect">
             <a:avLst/>
@@ -6081,8 +6081,8 @@
         </p:nvSpPr>
         <p:spPr>
           <a:xfrm>
-            <a:off x="9902952" y="3549701"/>
-            <a:ext cx="731520" cy="345643"/>
+            <a:off x="9902952" y="3696005"/>
+            <a:ext cx="731520" cy="382219"/>
           </a:xfrm>
           <a:prstGeom prst="rect">
             <a:avLst/>
@@ -6120,8 +6120,8 @@
         </p:nvSpPr>
         <p:spPr>
           <a:xfrm>
-            <a:off x="10652760" y="3549701"/>
-            <a:ext cx="914400" cy="345643"/>
+            <a:off x="10652760" y="3696005"/>
+            <a:ext cx="914400" cy="382219"/>
           </a:xfrm>
           <a:prstGeom prst="rect">
             <a:avLst/>
@@ -6159,7 +6159,7 @@
         </p:nvSpPr>
         <p:spPr>
           <a:xfrm>
-            <a:off x="8211312" y="3913632"/>
+            <a:off x="8211312" y="4096512"/>
             <a:ext cx="3355848" cy="22860"/>
           </a:xfrm>
           <a:prstGeom prst="rect">
@@ -6179,7 +6179,7 @@
         </p:nvSpPr>
         <p:spPr>
           <a:xfrm>
-            <a:off x="8211312" y="3941064"/>
+            <a:off x="8211312" y="4123944"/>
             <a:ext cx="1828800" cy="219456"/>
           </a:xfrm>
           <a:prstGeom prst="rect">
@@ -6218,7 +6218,7 @@
         </p:nvSpPr>
         <p:spPr>
           <a:xfrm>
-            <a:off x="9902952" y="3941064"/>
+            <a:off x="9902952" y="4123944"/>
             <a:ext cx="731520" cy="219456"/>
           </a:xfrm>
           <a:prstGeom prst="rect">
@@ -6257,7 +6257,7 @@
         </p:nvSpPr>
         <p:spPr>
           <a:xfrm>
-            <a:off x="10652760" y="3941064"/>
+            <a:off x="10652760" y="4123944"/>
             <a:ext cx="914400" cy="219456"/>
           </a:xfrm>
           <a:prstGeom prst="rect">
@@ -6296,8 +6296,8 @@
         </p:nvSpPr>
         <p:spPr>
           <a:xfrm>
-            <a:off x="8211312" y="4169664"/>
-            <a:ext cx="1673352" cy="345643"/>
+            <a:off x="8211312" y="4352544"/>
+            <a:ext cx="1673352" cy="382219"/>
           </a:xfrm>
           <a:prstGeom prst="rect">
             <a:avLst/>
@@ -6335,8 +6335,8 @@
         </p:nvSpPr>
         <p:spPr>
           <a:xfrm>
-            <a:off x="9902952" y="4169664"/>
-            <a:ext cx="731520" cy="345643"/>
+            <a:off x="9902952" y="4352544"/>
+            <a:ext cx="731520" cy="382219"/>
           </a:xfrm>
           <a:prstGeom prst="rect">
             <a:avLst/>
@@ -6374,8 +6374,8 @@
         </p:nvSpPr>
         <p:spPr>
           <a:xfrm>
-            <a:off x="10652760" y="4169664"/>
-            <a:ext cx="914400" cy="345643"/>
+            <a:off x="10652760" y="4352544"/>
+            <a:ext cx="914400" cy="382219"/>
           </a:xfrm>
           <a:prstGeom prst="rect">
             <a:avLst/>
@@ -6413,8 +6413,8 @@
         </p:nvSpPr>
         <p:spPr>
           <a:xfrm>
-            <a:off x="8211312" y="4515307"/>
-            <a:ext cx="1673352" cy="345643"/>
+            <a:off x="8211312" y="4734763"/>
+            <a:ext cx="1673352" cy="382219"/>
           </a:xfrm>
           <a:prstGeom prst="rect">
             <a:avLst/>
@@ -6452,8 +6452,8 @@
         </p:nvSpPr>
         <p:spPr>
           <a:xfrm>
-            <a:off x="9902952" y="4515307"/>
-            <a:ext cx="731520" cy="345643"/>
+            <a:off x="9902952" y="4734763"/>
+            <a:ext cx="731520" cy="382219"/>
           </a:xfrm>
           <a:prstGeom prst="rect">
             <a:avLst/>
@@ -6491,8 +6491,8 @@
         </p:nvSpPr>
         <p:spPr>
           <a:xfrm>
-            <a:off x="10652760" y="4515307"/>
-            <a:ext cx="914400" cy="345643"/>
+            <a:off x="10652760" y="4734763"/>
+            <a:ext cx="914400" cy="382219"/>
           </a:xfrm>
           <a:prstGeom prst="rect">
             <a:avLst/>
@@ -6530,8 +6530,8 @@
         </p:nvSpPr>
         <p:spPr>
           <a:xfrm>
-            <a:off x="8211312" y="4860950"/>
-            <a:ext cx="1673352" cy="345643"/>
+            <a:off x="8211312" y="5116982"/>
+            <a:ext cx="1673352" cy="382219"/>
           </a:xfrm>
           <a:prstGeom prst="rect">
             <a:avLst/>
@@ -6569,8 +6569,8 @@
         </p:nvSpPr>
         <p:spPr>
           <a:xfrm>
-            <a:off x="9902952" y="4860950"/>
-            <a:ext cx="731520" cy="345643"/>
+            <a:off x="9902952" y="5116982"/>
+            <a:ext cx="731520" cy="382219"/>
           </a:xfrm>
           <a:prstGeom prst="rect">
             <a:avLst/>
@@ -6608,8 +6608,8 @@
         </p:nvSpPr>
         <p:spPr>
           <a:xfrm>
-            <a:off x="10652760" y="4860950"/>
-            <a:ext cx="914400" cy="345643"/>
+            <a:off x="10652760" y="5116982"/>
+            <a:ext cx="914400" cy="382219"/>
           </a:xfrm>
           <a:prstGeom prst="rect">
             <a:avLst/>
@@ -6647,8 +6647,8 @@
         </p:nvSpPr>
         <p:spPr>
           <a:xfrm>
-            <a:off x="11612880" y="4897526"/>
-            <a:ext cx="54864" cy="272491"/>
+            <a:off x="11612880" y="5153558"/>
+            <a:ext cx="54864" cy="309067"/>
           </a:xfrm>
           <a:prstGeom prst="rect">
             <a:avLst/>
@@ -6667,8 +6667,8 @@
         </p:nvSpPr>
         <p:spPr>
           <a:xfrm>
-            <a:off x="8211312" y="5206594"/>
-            <a:ext cx="1673352" cy="345643"/>
+            <a:off x="8211312" y="5499202"/>
+            <a:ext cx="1673352" cy="382219"/>
           </a:xfrm>
           <a:prstGeom prst="rect">
             <a:avLst/>
@@ -6706,8 +6706,8 @@
         </p:nvSpPr>
         <p:spPr>
           <a:xfrm>
-            <a:off x="9902952" y="5206594"/>
-            <a:ext cx="731520" cy="345643"/>
+            <a:off x="9902952" y="5499202"/>
+            <a:ext cx="731520" cy="382219"/>
           </a:xfrm>
           <a:prstGeom prst="rect">
             <a:avLst/>
@@ -6745,8 +6745,8 @@
         </p:nvSpPr>
         <p:spPr>
           <a:xfrm>
-            <a:off x="10652760" y="5206594"/>
-            <a:ext cx="914400" cy="345643"/>
+            <a:off x="10652760" y="5499202"/>
+            <a:ext cx="914400" cy="382219"/>
           </a:xfrm>
           <a:prstGeom prst="rect">
             <a:avLst/>
@@ -6784,8 +6784,8 @@
         </p:nvSpPr>
         <p:spPr>
           <a:xfrm>
-            <a:off x="11612880" y="5243170"/>
-            <a:ext cx="54864" cy="272491"/>
+            <a:off x="11612880" y="5535778"/>
+            <a:ext cx="54864" cy="309067"/>
           </a:xfrm>
           <a:prstGeom prst="rect">
             <a:avLst/>
@@ -6804,8 +6804,8 @@
         </p:nvSpPr>
         <p:spPr>
           <a:xfrm>
-            <a:off x="8211312" y="5552237"/>
-            <a:ext cx="1673352" cy="345643"/>
+            <a:off x="8211312" y="5881421"/>
+            <a:ext cx="1673352" cy="382219"/>
           </a:xfrm>
           <a:prstGeom prst="rect">
             <a:avLst/>
@@ -6843,8 +6843,8 @@
         </p:nvSpPr>
         <p:spPr>
           <a:xfrm>
-            <a:off x="9902952" y="5552237"/>
-            <a:ext cx="731520" cy="345643"/>
+            <a:off x="9902952" y="5881421"/>
+            <a:ext cx="731520" cy="382219"/>
           </a:xfrm>
           <a:prstGeom prst="rect">
             <a:avLst/>
@@ -6882,8 +6882,8 @@
         </p:nvSpPr>
         <p:spPr>
           <a:xfrm>
-            <a:off x="10652760" y="5552237"/>
-            <a:ext cx="914400" cy="345643"/>
+            <a:off x="10652760" y="5881421"/>
+            <a:ext cx="914400" cy="382219"/>
           </a:xfrm>
           <a:prstGeom prst="rect">
             <a:avLst/>
@@ -6910,65 +6910,6 @@
               <a:t>3</a:t>
             </a:r>
             <a:endParaRPr lang="en-US" sz="1200" dirty="0"/>
-          </a:p>
-        </p:txBody>
-      </p:sp>
-      <p:sp>
-        <p:nvSpPr>
-          <p:cNvPr id="145" name="Shape 143"/>
-          <p:cNvSpPr/>
-          <p:nvPr/>
-        </p:nvSpPr>
-        <p:spPr>
-          <a:xfrm>
-            <a:off x="457200" y="6126480"/>
-            <a:ext cx="11274552" cy="615696"/>
-          </a:xfrm>
-          <a:prstGeom prst="rect">
-            <a:avLst/>
-          </a:prstGeom>
-          <a:solidFill>
-            <a:srgbClr val="EDF4FA"/>
-          </a:solidFill>
-          <a:ln/>
-        </p:spPr>
-      </p:sp>
-      <p:sp>
-        <p:nvSpPr>
-          <p:cNvPr id="146" name="Text 144"/>
-          <p:cNvSpPr txBox="1"/>
-          <p:nvPr/>
-        </p:nvSpPr>
-        <p:spPr>
-          <a:xfrm>
-            <a:off x="658368" y="6144768"/>
-            <a:ext cx="10927080" cy="579120"/>
-          </a:xfrm>
-          <a:prstGeom prst="rect">
-            <a:avLst/>
-          </a:prstGeom>
-          <a:noFill/>
-          <a:ln/>
-        </p:spPr>
-        <p:txBody>
-          <a:bodyPr wrap="square" lIns="0" tIns="0" rIns="0" bIns="0" rtlCol="0" anchor="ctr"/>
-          <a:lstStyle/>
-          <a:p>
-            <a:pPr indent="0" marL="0">
-              <a:buNone/>
-            </a:pPr>
-            <a:r>
-              <a:rPr lang="en-US" sz="1600" b="1" dirty="0">
-                <a:solidFill>
-                  <a:srgbClr val="0B2C4A"/>
-                </a:solidFill>
-                <a:latin typeface="Inter" pitchFamily="34" charset="0"/>
-                <a:ea typeface="Inter" pitchFamily="34" charset="-122"/>
-                <a:cs typeface="Inter" pitchFamily="34" charset="-120"/>
-              </a:rPr>
-              <a:t>Chevy GMC Bullhead picks up 77.1% of transfers; Kia St George picks up 21.9%. Nissan and Prescott Hyundai hold 272 of the group's 484 open callbacks.</a:t>
-            </a:r>
-            <a:endParaRPr lang="en-US" sz="1600" dirty="0"/>
           </a:p>
         </p:txBody>
       </p:sp>

--- a/day2-deck/decks/Voice AI - Flai.pptx
+++ b/day2-deck/decks/Voice AI - Flai.pptx
@@ -591,7 +591,7 @@
           <a:p>
             <a:r>
               <a:rPr lang="en-US" dirty="0"/>
-              <a:t>Takeaway (off the slide): Chevy GMC Bullhead picks up 77.1% of transfers; Kia St George picks up 21.9%. Nissan and Prescott Hyundai hold 272 of the group's 484 open callbacks.Source: Flai voice AI dashboard, Service view, standings export, Jul 26 - Oct 26, 2026 (93 days). Flai's location names (26 with calls). Pickup rate and resolution as Flai reports them. Flai's estimated savings, revenue and profit are not used. Green bar: the store is in more than one top list; red bar: in more than one bottom 5. Ranked among the 23 locations with 300+ calls (Subaru St George, Land Rover Henderson, Jaguar Land Rover Las Vegas have fewer). Honda Spokane shows no calls in the period.Talk track: the voice AI answers every call, books what it can and hands the rest to the store. What happens next is ours: someone has to pick up the transfer, and every callback has to be closed. A store that doesn't pick up is sending a customer it already has to voicemail.
+              <a:t>Takeaway with the store call-outs (off the slide): Chevy GMC Bullhead picks up 77.1% of transfers; Kia St George picks up 21.9%. Nissan and Prescott Hyundai hold 272 of the group's 484 open callbacks.Source: Flai voice AI dashboard, Service view, standings export, Jul 26 - Oct 26, 2026 (93 days). Flai's location names (26 with calls). Pickup rate and resolution as Flai reports them. Flai's estimated savings, revenue and profit are not used. Green bar: the store is in more than one top list; red bar: in more than one bottom 5. Ranked among the 23 locations with 300+ calls (Subaru St George, Land Rover Henderson, Jaguar Land Rover Las Vegas have fewer). Honda Spokane shows no calls in the period.Talk track: the voice AI answers every call, books what it can and hands the rest to the store. What happens next is ours: someone has to pick up the transfer, and every callback has to be closed. A store that doesn't pick up is sending a customer it already has to voicemail.
 Definitions to confirm against Flai: pickup rate is read as the share of transferred calls a person picked up; resolution as the share of callback requests closed. Resolve time in the export runs to weeks at some locations and is not shown.</a:t>
             </a:r>
             <a:endParaRPr lang="en-US" dirty="0"/>

--- a/day2-deck/decks/Voice AI - Flai.pptx
+++ b/day2-deck/decks/Voice AI - Flai.pptx
@@ -1018,7 +1018,7 @@
                 <a:ea typeface="Inter" pitchFamily="34" charset="-122"/>
                 <a:cs typeface="Inter" pitchFamily="34" charset="-120"/>
               </a:rPr>
-              <a:t>VOICE AI · FLAI · LAST 90 DAYS</a:t>
+              <a:t>VOICE AI · FLAI · JUL 26 – OCT 26, 2026</a:t>
             </a:r>
             <a:endParaRPr lang="en-US" sz="1400" dirty="0"/>
           </a:p>
@@ -1752,7 +1752,7 @@
                 <a:ea typeface="Inter" pitchFamily="34" charset="-122"/>
                 <a:cs typeface="Inter" pitchFamily="34" charset="-120"/>
               </a:rPr>
-              <a:t>The AI books and routes the call; the store still has to answer the transfer and close every callback in the Flai dashboard. Source: Flai service calls, last 90 days.</a:t>
+              <a:t>The AI books and routes the call; the store still has to answer the transfer and close every callback in the Flai dashboard. Source: Flai service calls, Jul 26 – Oct 26, 2026.</a:t>
             </a:r>
             <a:endParaRPr lang="en-US" sz="1700" dirty="0"/>
           </a:p>
@@ -1902,7 +1902,7 @@
                 <a:ea typeface="Inter" pitchFamily="34" charset="-122"/>
                 <a:cs typeface="Inter" pitchFamily="34" charset="-120"/>
               </a:rPr>
-              <a:t>VOICE AI · FLAI · LAST 90 DAYS</a:t>
+              <a:t>VOICE AI · FLAI · JUL 26 – OCT 26, 2026</a:t>
             </a:r>
             <a:endParaRPr lang="en-US" sz="1400" dirty="0"/>
           </a:p>
@@ -2191,7 +2191,7 @@
         <p:spPr>
           <a:xfrm>
             <a:off x="621792" y="2167128"/>
-            <a:ext cx="1673352" cy="382219"/>
+            <a:ext cx="1673352" cy="347472"/>
           </a:xfrm>
           <a:prstGeom prst="rect">
             <a:avLst/>
@@ -2230,7 +2230,7 @@
         <p:spPr>
           <a:xfrm>
             <a:off x="2313432" y="2167128"/>
-            <a:ext cx="731520" cy="382219"/>
+            <a:ext cx="731520" cy="347472"/>
           </a:xfrm>
           <a:prstGeom prst="rect">
             <a:avLst/>
@@ -2269,7 +2269,7 @@
         <p:spPr>
           <a:xfrm>
             <a:off x="3063240" y="2167128"/>
-            <a:ext cx="914400" cy="382219"/>
+            <a:ext cx="914400" cy="347472"/>
           </a:xfrm>
           <a:prstGeom prst="rect">
             <a:avLst/>
@@ -2308,7 +2308,7 @@
         <p:spPr>
           <a:xfrm>
             <a:off x="4023360" y="2203704"/>
-            <a:ext cx="54864" cy="309067"/>
+            <a:ext cx="54864" cy="274320"/>
           </a:xfrm>
           <a:prstGeom prst="rect">
             <a:avLst/>
@@ -2327,8 +2327,8 @@
         </p:nvSpPr>
         <p:spPr>
           <a:xfrm>
-            <a:off x="621792" y="2549347"/>
-            <a:ext cx="1673352" cy="382219"/>
+            <a:off x="621792" y="2514600"/>
+            <a:ext cx="1673352" cy="347472"/>
           </a:xfrm>
           <a:prstGeom prst="rect">
             <a:avLst/>
@@ -2366,8 +2366,8 @@
         </p:nvSpPr>
         <p:spPr>
           <a:xfrm>
-            <a:off x="2313432" y="2549347"/>
-            <a:ext cx="731520" cy="382219"/>
+            <a:off x="2313432" y="2514600"/>
+            <a:ext cx="731520" cy="347472"/>
           </a:xfrm>
           <a:prstGeom prst="rect">
             <a:avLst/>
@@ -2405,8 +2405,8 @@
         </p:nvSpPr>
         <p:spPr>
           <a:xfrm>
-            <a:off x="3063240" y="2549347"/>
-            <a:ext cx="914400" cy="382219"/>
+            <a:off x="3063240" y="2514600"/>
+            <a:ext cx="914400" cy="347472"/>
           </a:xfrm>
           <a:prstGeom prst="rect">
             <a:avLst/>
@@ -2444,8 +2444,8 @@
         </p:nvSpPr>
         <p:spPr>
           <a:xfrm>
-            <a:off x="621792" y="2931566"/>
-            <a:ext cx="1673352" cy="382219"/>
+            <a:off x="621792" y="2862072"/>
+            <a:ext cx="1673352" cy="347472"/>
           </a:xfrm>
           <a:prstGeom prst="rect">
             <a:avLst/>
@@ -2483,8 +2483,8 @@
         </p:nvSpPr>
         <p:spPr>
           <a:xfrm>
-            <a:off x="2313432" y="2931566"/>
-            <a:ext cx="731520" cy="382219"/>
+            <a:off x="2313432" y="2862072"/>
+            <a:ext cx="731520" cy="347472"/>
           </a:xfrm>
           <a:prstGeom prst="rect">
             <a:avLst/>
@@ -2522,8 +2522,8 @@
         </p:nvSpPr>
         <p:spPr>
           <a:xfrm>
-            <a:off x="3063240" y="2931566"/>
-            <a:ext cx="914400" cy="382219"/>
+            <a:off x="3063240" y="2862072"/>
+            <a:ext cx="914400" cy="347472"/>
           </a:xfrm>
           <a:prstGeom prst="rect">
             <a:avLst/>
@@ -2561,8 +2561,8 @@
         </p:nvSpPr>
         <p:spPr>
           <a:xfrm>
-            <a:off x="4023360" y="2968142"/>
-            <a:ext cx="54864" cy="309067"/>
+            <a:off x="4023360" y="2898648"/>
+            <a:ext cx="54864" cy="274320"/>
           </a:xfrm>
           <a:prstGeom prst="rect">
             <a:avLst/>
@@ -2581,8 +2581,8 @@
         </p:nvSpPr>
         <p:spPr>
           <a:xfrm>
-            <a:off x="621792" y="3313786"/>
-            <a:ext cx="1673352" cy="382219"/>
+            <a:off x="621792" y="3209544"/>
+            <a:ext cx="1673352" cy="347472"/>
           </a:xfrm>
           <a:prstGeom prst="rect">
             <a:avLst/>
@@ -2620,8 +2620,8 @@
         </p:nvSpPr>
         <p:spPr>
           <a:xfrm>
-            <a:off x="2313432" y="3313786"/>
-            <a:ext cx="731520" cy="382219"/>
+            <a:off x="2313432" y="3209544"/>
+            <a:ext cx="731520" cy="347472"/>
           </a:xfrm>
           <a:prstGeom prst="rect">
             <a:avLst/>
@@ -2659,8 +2659,8 @@
         </p:nvSpPr>
         <p:spPr>
           <a:xfrm>
-            <a:off x="3063240" y="3313786"/>
-            <a:ext cx="914400" cy="382219"/>
+            <a:off x="3063240" y="3209544"/>
+            <a:ext cx="914400" cy="347472"/>
           </a:xfrm>
           <a:prstGeom prst="rect">
             <a:avLst/>
@@ -2698,8 +2698,8 @@
         </p:nvSpPr>
         <p:spPr>
           <a:xfrm>
-            <a:off x="4023360" y="3350362"/>
-            <a:ext cx="54864" cy="309067"/>
+            <a:off x="4023360" y="3246120"/>
+            <a:ext cx="54864" cy="274320"/>
           </a:xfrm>
           <a:prstGeom prst="rect">
             <a:avLst/>
@@ -2718,8 +2718,8 @@
         </p:nvSpPr>
         <p:spPr>
           <a:xfrm>
-            <a:off x="621792" y="3696005"/>
-            <a:ext cx="1673352" cy="382219"/>
+            <a:off x="621792" y="3557016"/>
+            <a:ext cx="1673352" cy="347472"/>
           </a:xfrm>
           <a:prstGeom prst="rect">
             <a:avLst/>
@@ -2757,8 +2757,8 @@
         </p:nvSpPr>
         <p:spPr>
           <a:xfrm>
-            <a:off x="2313432" y="3696005"/>
-            <a:ext cx="731520" cy="382219"/>
+            <a:off x="2313432" y="3557016"/>
+            <a:ext cx="731520" cy="347472"/>
           </a:xfrm>
           <a:prstGeom prst="rect">
             <a:avLst/>
@@ -2796,8 +2796,8 @@
         </p:nvSpPr>
         <p:spPr>
           <a:xfrm>
-            <a:off x="3063240" y="3696005"/>
-            <a:ext cx="914400" cy="382219"/>
+            <a:off x="3063240" y="3557016"/>
+            <a:ext cx="914400" cy="347472"/>
           </a:xfrm>
           <a:prstGeom prst="rect">
             <a:avLst/>
@@ -2835,8 +2835,8 @@
         </p:nvSpPr>
         <p:spPr>
           <a:xfrm>
-            <a:off x="4023360" y="3732581"/>
-            <a:ext cx="54864" cy="309067"/>
+            <a:off x="4023360" y="3593592"/>
+            <a:ext cx="54864" cy="274320"/>
           </a:xfrm>
           <a:prstGeom prst="rect">
             <a:avLst/>
@@ -2855,7 +2855,7 @@
         </p:nvSpPr>
         <p:spPr>
           <a:xfrm>
-            <a:off x="621792" y="4096512"/>
+            <a:off x="621792" y="4270248"/>
             <a:ext cx="3355848" cy="22860"/>
           </a:xfrm>
           <a:prstGeom prst="rect">
@@ -2875,7 +2875,7 @@
         </p:nvSpPr>
         <p:spPr>
           <a:xfrm>
-            <a:off x="621792" y="4123944"/>
+            <a:off x="621792" y="4297680"/>
             <a:ext cx="1828800" cy="219456"/>
           </a:xfrm>
           <a:prstGeom prst="rect">
@@ -2914,7 +2914,7 @@
         </p:nvSpPr>
         <p:spPr>
           <a:xfrm>
-            <a:off x="2313432" y="4123944"/>
+            <a:off x="2313432" y="4297680"/>
             <a:ext cx="731520" cy="219456"/>
           </a:xfrm>
           <a:prstGeom prst="rect">
@@ -2953,7 +2953,7 @@
         </p:nvSpPr>
         <p:spPr>
           <a:xfrm>
-            <a:off x="3063240" y="4123944"/>
+            <a:off x="3063240" y="4297680"/>
             <a:ext cx="914400" cy="219456"/>
           </a:xfrm>
           <a:prstGeom prst="rect">
@@ -2992,8 +2992,8 @@
         </p:nvSpPr>
         <p:spPr>
           <a:xfrm>
-            <a:off x="621792" y="4352544"/>
-            <a:ext cx="1673352" cy="382219"/>
+            <a:off x="621792" y="4526280"/>
+            <a:ext cx="1673352" cy="347472"/>
           </a:xfrm>
           <a:prstGeom prst="rect">
             <a:avLst/>
@@ -3031,8 +3031,8 @@
         </p:nvSpPr>
         <p:spPr>
           <a:xfrm>
-            <a:off x="2313432" y="4352544"/>
-            <a:ext cx="731520" cy="382219"/>
+            <a:off x="2313432" y="4526280"/>
+            <a:ext cx="731520" cy="347472"/>
           </a:xfrm>
           <a:prstGeom prst="rect">
             <a:avLst/>
@@ -3070,8 +3070,8 @@
         </p:nvSpPr>
         <p:spPr>
           <a:xfrm>
-            <a:off x="3063240" y="4352544"/>
-            <a:ext cx="914400" cy="382219"/>
+            <a:off x="3063240" y="4526280"/>
+            <a:ext cx="914400" cy="347472"/>
           </a:xfrm>
           <a:prstGeom prst="rect">
             <a:avLst/>
@@ -3109,8 +3109,8 @@
         </p:nvSpPr>
         <p:spPr>
           <a:xfrm>
-            <a:off x="4023360" y="4389120"/>
-            <a:ext cx="54864" cy="309067"/>
+            <a:off x="4023360" y="4562856"/>
+            <a:ext cx="54864" cy="274320"/>
           </a:xfrm>
           <a:prstGeom prst="rect">
             <a:avLst/>
@@ -3129,8 +3129,8 @@
         </p:nvSpPr>
         <p:spPr>
           <a:xfrm>
-            <a:off x="621792" y="4734763"/>
-            <a:ext cx="1673352" cy="382219"/>
+            <a:off x="621792" y="4873752"/>
+            <a:ext cx="1673352" cy="347472"/>
           </a:xfrm>
           <a:prstGeom prst="rect">
             <a:avLst/>
@@ -3168,8 +3168,8 @@
         </p:nvSpPr>
         <p:spPr>
           <a:xfrm>
-            <a:off x="2313432" y="4734763"/>
-            <a:ext cx="731520" cy="382219"/>
+            <a:off x="2313432" y="4873752"/>
+            <a:ext cx="731520" cy="347472"/>
           </a:xfrm>
           <a:prstGeom prst="rect">
             <a:avLst/>
@@ -3207,8 +3207,8 @@
         </p:nvSpPr>
         <p:spPr>
           <a:xfrm>
-            <a:off x="3063240" y="4734763"/>
-            <a:ext cx="914400" cy="382219"/>
+            <a:off x="3063240" y="4873752"/>
+            <a:ext cx="914400" cy="347472"/>
           </a:xfrm>
           <a:prstGeom prst="rect">
             <a:avLst/>
@@ -3246,8 +3246,8 @@
         </p:nvSpPr>
         <p:spPr>
           <a:xfrm>
-            <a:off x="4023360" y="4771339"/>
-            <a:ext cx="54864" cy="309067"/>
+            <a:off x="4023360" y="4910328"/>
+            <a:ext cx="54864" cy="274320"/>
           </a:xfrm>
           <a:prstGeom prst="rect">
             <a:avLst/>
@@ -3266,8 +3266,8 @@
         </p:nvSpPr>
         <p:spPr>
           <a:xfrm>
-            <a:off x="621792" y="5116982"/>
-            <a:ext cx="1673352" cy="382219"/>
+            <a:off x="621792" y="5221224"/>
+            <a:ext cx="1673352" cy="347472"/>
           </a:xfrm>
           <a:prstGeom prst="rect">
             <a:avLst/>
@@ -3305,8 +3305,8 @@
         </p:nvSpPr>
         <p:spPr>
           <a:xfrm>
-            <a:off x="2313432" y="5116982"/>
-            <a:ext cx="731520" cy="382219"/>
+            <a:off x="2313432" y="5221224"/>
+            <a:ext cx="731520" cy="347472"/>
           </a:xfrm>
           <a:prstGeom prst="rect">
             <a:avLst/>
@@ -3344,8 +3344,8 @@
         </p:nvSpPr>
         <p:spPr>
           <a:xfrm>
-            <a:off x="3063240" y="5116982"/>
-            <a:ext cx="914400" cy="382219"/>
+            <a:off x="3063240" y="5221224"/>
+            <a:ext cx="914400" cy="347472"/>
           </a:xfrm>
           <a:prstGeom prst="rect">
             <a:avLst/>
@@ -3383,8 +3383,8 @@
         </p:nvSpPr>
         <p:spPr>
           <a:xfrm>
-            <a:off x="621792" y="5499202"/>
-            <a:ext cx="1673352" cy="382219"/>
+            <a:off x="621792" y="5568696"/>
+            <a:ext cx="1673352" cy="347472"/>
           </a:xfrm>
           <a:prstGeom prst="rect">
             <a:avLst/>
@@ -3422,8 +3422,8 @@
         </p:nvSpPr>
         <p:spPr>
           <a:xfrm>
-            <a:off x="2313432" y="5499202"/>
-            <a:ext cx="731520" cy="382219"/>
+            <a:off x="2313432" y="5568696"/>
+            <a:ext cx="731520" cy="347472"/>
           </a:xfrm>
           <a:prstGeom prst="rect">
             <a:avLst/>
@@ -3461,8 +3461,8 @@
         </p:nvSpPr>
         <p:spPr>
           <a:xfrm>
-            <a:off x="3063240" y="5499202"/>
-            <a:ext cx="914400" cy="382219"/>
+            <a:off x="3063240" y="5568696"/>
+            <a:ext cx="914400" cy="347472"/>
           </a:xfrm>
           <a:prstGeom prst="rect">
             <a:avLst/>
@@ -3500,8 +3500,8 @@
         </p:nvSpPr>
         <p:spPr>
           <a:xfrm>
-            <a:off x="4023360" y="5535778"/>
-            <a:ext cx="54864" cy="309067"/>
+            <a:off x="4023360" y="5605272"/>
+            <a:ext cx="54864" cy="274320"/>
           </a:xfrm>
           <a:prstGeom prst="rect">
             <a:avLst/>
@@ -3520,8 +3520,8 @@
         </p:nvSpPr>
         <p:spPr>
           <a:xfrm>
-            <a:off x="621792" y="5881421"/>
-            <a:ext cx="1673352" cy="382219"/>
+            <a:off x="621792" y="5916168"/>
+            <a:ext cx="1673352" cy="347472"/>
           </a:xfrm>
           <a:prstGeom prst="rect">
             <a:avLst/>
@@ -3559,8 +3559,8 @@
         </p:nvSpPr>
         <p:spPr>
           <a:xfrm>
-            <a:off x="2313432" y="5881421"/>
-            <a:ext cx="731520" cy="382219"/>
+            <a:off x="2313432" y="5916168"/>
+            <a:ext cx="731520" cy="347472"/>
           </a:xfrm>
           <a:prstGeom prst="rect">
             <a:avLst/>
@@ -3598,8 +3598,8 @@
         </p:nvSpPr>
         <p:spPr>
           <a:xfrm>
-            <a:off x="3063240" y="5881421"/>
-            <a:ext cx="914400" cy="382219"/>
+            <a:off x="3063240" y="5916168"/>
+            <a:ext cx="914400" cy="347472"/>
           </a:xfrm>
           <a:prstGeom prst="rect">
             <a:avLst/>
@@ -3637,8 +3637,8 @@
         </p:nvSpPr>
         <p:spPr>
           <a:xfrm>
-            <a:off x="4023360" y="5917997"/>
-            <a:ext cx="54864" cy="309067"/>
+            <a:off x="4023360" y="5952744"/>
+            <a:ext cx="54864" cy="274320"/>
           </a:xfrm>
           <a:prstGeom prst="rect">
             <a:avLst/>
@@ -3893,7 +3893,7 @@
         <p:spPr>
           <a:xfrm>
             <a:off x="4416552" y="2167128"/>
-            <a:ext cx="1673352" cy="382219"/>
+            <a:ext cx="1673352" cy="347472"/>
           </a:xfrm>
           <a:prstGeom prst="rect">
             <a:avLst/>
@@ -3932,7 +3932,7 @@
         <p:spPr>
           <a:xfrm>
             <a:off x="6108192" y="2167128"/>
-            <a:ext cx="731520" cy="382219"/>
+            <a:ext cx="731520" cy="347472"/>
           </a:xfrm>
           <a:prstGeom prst="rect">
             <a:avLst/>
@@ -3971,7 +3971,7 @@
         <p:spPr>
           <a:xfrm>
             <a:off x="6858000" y="2167128"/>
-            <a:ext cx="914400" cy="382219"/>
+            <a:ext cx="914400" cy="347472"/>
           </a:xfrm>
           <a:prstGeom prst="rect">
             <a:avLst/>
@@ -4010,7 +4010,7 @@
         <p:spPr>
           <a:xfrm>
             <a:off x="7818120" y="2203704"/>
-            <a:ext cx="54864" cy="309067"/>
+            <a:ext cx="54864" cy="274320"/>
           </a:xfrm>
           <a:prstGeom prst="rect">
             <a:avLst/>
@@ -4029,8 +4029,8 @@
         </p:nvSpPr>
         <p:spPr>
           <a:xfrm>
-            <a:off x="4416552" y="2549347"/>
-            <a:ext cx="1673352" cy="382219"/>
+            <a:off x="4416552" y="2514600"/>
+            <a:ext cx="1673352" cy="347472"/>
           </a:xfrm>
           <a:prstGeom prst="rect">
             <a:avLst/>
@@ -4068,8 +4068,8 @@
         </p:nvSpPr>
         <p:spPr>
           <a:xfrm>
-            <a:off x="6108192" y="2549347"/>
-            <a:ext cx="731520" cy="382219"/>
+            <a:off x="6108192" y="2514600"/>
+            <a:ext cx="731520" cy="347472"/>
           </a:xfrm>
           <a:prstGeom prst="rect">
             <a:avLst/>
@@ -4107,8 +4107,8 @@
         </p:nvSpPr>
         <p:spPr>
           <a:xfrm>
-            <a:off x="6858000" y="2549347"/>
-            <a:ext cx="914400" cy="382219"/>
+            <a:off x="6858000" y="2514600"/>
+            <a:ext cx="914400" cy="347472"/>
           </a:xfrm>
           <a:prstGeom prst="rect">
             <a:avLst/>
@@ -4146,8 +4146,8 @@
         </p:nvSpPr>
         <p:spPr>
           <a:xfrm>
-            <a:off x="7818120" y="2585923"/>
-            <a:ext cx="54864" cy="309067"/>
+            <a:off x="7818120" y="2551176"/>
+            <a:ext cx="54864" cy="274320"/>
           </a:xfrm>
           <a:prstGeom prst="rect">
             <a:avLst/>
@@ -4166,8 +4166,8 @@
         </p:nvSpPr>
         <p:spPr>
           <a:xfrm>
-            <a:off x="4416552" y="2931566"/>
-            <a:ext cx="1673352" cy="382219"/>
+            <a:off x="4416552" y="2862072"/>
+            <a:ext cx="1673352" cy="347472"/>
           </a:xfrm>
           <a:prstGeom prst="rect">
             <a:avLst/>
@@ -4205,8 +4205,8 @@
         </p:nvSpPr>
         <p:spPr>
           <a:xfrm>
-            <a:off x="6108192" y="2931566"/>
-            <a:ext cx="731520" cy="382219"/>
+            <a:off x="6108192" y="2862072"/>
+            <a:ext cx="731520" cy="347472"/>
           </a:xfrm>
           <a:prstGeom prst="rect">
             <a:avLst/>
@@ -4244,8 +4244,8 @@
         </p:nvSpPr>
         <p:spPr>
           <a:xfrm>
-            <a:off x="6858000" y="2931566"/>
-            <a:ext cx="914400" cy="382219"/>
+            <a:off x="6858000" y="2862072"/>
+            <a:ext cx="914400" cy="347472"/>
           </a:xfrm>
           <a:prstGeom prst="rect">
             <a:avLst/>
@@ -4283,8 +4283,8 @@
         </p:nvSpPr>
         <p:spPr>
           <a:xfrm>
-            <a:off x="7818120" y="2968142"/>
-            <a:ext cx="54864" cy="309067"/>
+            <a:off x="7818120" y="2898648"/>
+            <a:ext cx="54864" cy="274320"/>
           </a:xfrm>
           <a:prstGeom prst="rect">
             <a:avLst/>
@@ -4303,8 +4303,8 @@
         </p:nvSpPr>
         <p:spPr>
           <a:xfrm>
-            <a:off x="4416552" y="3313786"/>
-            <a:ext cx="1673352" cy="382219"/>
+            <a:off x="4416552" y="3209544"/>
+            <a:ext cx="1673352" cy="347472"/>
           </a:xfrm>
           <a:prstGeom prst="rect">
             <a:avLst/>
@@ -4342,8 +4342,8 @@
         </p:nvSpPr>
         <p:spPr>
           <a:xfrm>
-            <a:off x="6108192" y="3313786"/>
-            <a:ext cx="731520" cy="382219"/>
+            <a:off x="6108192" y="3209544"/>
+            <a:ext cx="731520" cy="347472"/>
           </a:xfrm>
           <a:prstGeom prst="rect">
             <a:avLst/>
@@ -4381,8 +4381,8 @@
         </p:nvSpPr>
         <p:spPr>
           <a:xfrm>
-            <a:off x="6858000" y="3313786"/>
-            <a:ext cx="914400" cy="382219"/>
+            <a:off x="6858000" y="3209544"/>
+            <a:ext cx="914400" cy="347472"/>
           </a:xfrm>
           <a:prstGeom prst="rect">
             <a:avLst/>
@@ -4420,8 +4420,8 @@
         </p:nvSpPr>
         <p:spPr>
           <a:xfrm>
-            <a:off x="7818120" y="3350362"/>
-            <a:ext cx="54864" cy="309067"/>
+            <a:off x="7818120" y="3246120"/>
+            <a:ext cx="54864" cy="274320"/>
           </a:xfrm>
           <a:prstGeom prst="rect">
             <a:avLst/>
@@ -4440,8 +4440,8 @@
         </p:nvSpPr>
         <p:spPr>
           <a:xfrm>
-            <a:off x="4416552" y="3696005"/>
-            <a:ext cx="1673352" cy="382219"/>
+            <a:off x="4416552" y="3557016"/>
+            <a:ext cx="1673352" cy="347472"/>
           </a:xfrm>
           <a:prstGeom prst="rect">
             <a:avLst/>
@@ -4479,8 +4479,8 @@
         </p:nvSpPr>
         <p:spPr>
           <a:xfrm>
-            <a:off x="6108192" y="3696005"/>
-            <a:ext cx="731520" cy="382219"/>
+            <a:off x="6108192" y="3557016"/>
+            <a:ext cx="731520" cy="347472"/>
           </a:xfrm>
           <a:prstGeom prst="rect">
             <a:avLst/>
@@ -4518,8 +4518,8 @@
         </p:nvSpPr>
         <p:spPr>
           <a:xfrm>
-            <a:off x="6858000" y="3696005"/>
-            <a:ext cx="914400" cy="382219"/>
+            <a:off x="6858000" y="3557016"/>
+            <a:ext cx="914400" cy="347472"/>
           </a:xfrm>
           <a:prstGeom prst="rect">
             <a:avLst/>
@@ -4557,7 +4557,7 @@
         </p:nvSpPr>
         <p:spPr>
           <a:xfrm>
-            <a:off x="4416552" y="4096512"/>
+            <a:off x="4416552" y="4270248"/>
             <a:ext cx="3355848" cy="22860"/>
           </a:xfrm>
           <a:prstGeom prst="rect">
@@ -4577,7 +4577,7 @@
         </p:nvSpPr>
         <p:spPr>
           <a:xfrm>
-            <a:off x="4416552" y="4123944"/>
+            <a:off x="4416552" y="4297680"/>
             <a:ext cx="1828800" cy="219456"/>
           </a:xfrm>
           <a:prstGeom prst="rect">
@@ -4616,7 +4616,7 @@
         </p:nvSpPr>
         <p:spPr>
           <a:xfrm>
-            <a:off x="6108192" y="4123944"/>
+            <a:off x="6108192" y="4297680"/>
             <a:ext cx="731520" cy="219456"/>
           </a:xfrm>
           <a:prstGeom prst="rect">
@@ -4655,7 +4655,7 @@
         </p:nvSpPr>
         <p:spPr>
           <a:xfrm>
-            <a:off x="6858000" y="4123944"/>
+            <a:off x="6858000" y="4297680"/>
             <a:ext cx="914400" cy="219456"/>
           </a:xfrm>
           <a:prstGeom prst="rect">
@@ -4694,8 +4694,8 @@
         </p:nvSpPr>
         <p:spPr>
           <a:xfrm>
-            <a:off x="4416552" y="4352544"/>
-            <a:ext cx="1673352" cy="382219"/>
+            <a:off x="4416552" y="4526280"/>
+            <a:ext cx="1673352" cy="347472"/>
           </a:xfrm>
           <a:prstGeom prst="rect">
             <a:avLst/>
@@ -4733,8 +4733,8 @@
         </p:nvSpPr>
         <p:spPr>
           <a:xfrm>
-            <a:off x="6108192" y="4352544"/>
-            <a:ext cx="731520" cy="382219"/>
+            <a:off x="6108192" y="4526280"/>
+            <a:ext cx="731520" cy="347472"/>
           </a:xfrm>
           <a:prstGeom prst="rect">
             <a:avLst/>
@@ -4772,8 +4772,8 @@
         </p:nvSpPr>
         <p:spPr>
           <a:xfrm>
-            <a:off x="6858000" y="4352544"/>
-            <a:ext cx="914400" cy="382219"/>
+            <a:off x="6858000" y="4526280"/>
+            <a:ext cx="914400" cy="347472"/>
           </a:xfrm>
           <a:prstGeom prst="rect">
             <a:avLst/>
@@ -4811,8 +4811,8 @@
         </p:nvSpPr>
         <p:spPr>
           <a:xfrm>
-            <a:off x="7818120" y="4389120"/>
-            <a:ext cx="54864" cy="309067"/>
+            <a:off x="7818120" y="4562856"/>
+            <a:ext cx="54864" cy="274320"/>
           </a:xfrm>
           <a:prstGeom prst="rect">
             <a:avLst/>
@@ -4831,8 +4831,8 @@
         </p:nvSpPr>
         <p:spPr>
           <a:xfrm>
-            <a:off x="4416552" y="4734763"/>
-            <a:ext cx="1673352" cy="382219"/>
+            <a:off x="4416552" y="4873752"/>
+            <a:ext cx="1673352" cy="347472"/>
           </a:xfrm>
           <a:prstGeom prst="rect">
             <a:avLst/>
@@ -4870,8 +4870,8 @@
         </p:nvSpPr>
         <p:spPr>
           <a:xfrm>
-            <a:off x="6108192" y="4734763"/>
-            <a:ext cx="731520" cy="382219"/>
+            <a:off x="6108192" y="4873752"/>
+            <a:ext cx="731520" cy="347472"/>
           </a:xfrm>
           <a:prstGeom prst="rect">
             <a:avLst/>
@@ -4909,8 +4909,8 @@
         </p:nvSpPr>
         <p:spPr>
           <a:xfrm>
-            <a:off x="6858000" y="4734763"/>
-            <a:ext cx="914400" cy="382219"/>
+            <a:off x="6858000" y="4873752"/>
+            <a:ext cx="914400" cy="347472"/>
           </a:xfrm>
           <a:prstGeom prst="rect">
             <a:avLst/>
@@ -4948,8 +4948,8 @@
         </p:nvSpPr>
         <p:spPr>
           <a:xfrm>
-            <a:off x="4416552" y="5116982"/>
-            <a:ext cx="1673352" cy="382219"/>
+            <a:off x="4416552" y="5221224"/>
+            <a:ext cx="1673352" cy="347472"/>
           </a:xfrm>
           <a:prstGeom prst="rect">
             <a:avLst/>
@@ -4987,8 +4987,8 @@
         </p:nvSpPr>
         <p:spPr>
           <a:xfrm>
-            <a:off x="6108192" y="5116982"/>
-            <a:ext cx="731520" cy="382219"/>
+            <a:off x="6108192" y="5221224"/>
+            <a:ext cx="731520" cy="347472"/>
           </a:xfrm>
           <a:prstGeom prst="rect">
             <a:avLst/>
@@ -5026,8 +5026,8 @@
         </p:nvSpPr>
         <p:spPr>
           <a:xfrm>
-            <a:off x="6858000" y="5116982"/>
-            <a:ext cx="914400" cy="382219"/>
+            <a:off x="6858000" y="5221224"/>
+            <a:ext cx="914400" cy="347472"/>
           </a:xfrm>
           <a:prstGeom prst="rect">
             <a:avLst/>
@@ -5065,8 +5065,8 @@
         </p:nvSpPr>
         <p:spPr>
           <a:xfrm>
-            <a:off x="4416552" y="5499202"/>
-            <a:ext cx="1673352" cy="382219"/>
+            <a:off x="4416552" y="5568696"/>
+            <a:ext cx="1673352" cy="347472"/>
           </a:xfrm>
           <a:prstGeom prst="rect">
             <a:avLst/>
@@ -5104,8 +5104,8 @@
         </p:nvSpPr>
         <p:spPr>
           <a:xfrm>
-            <a:off x="6108192" y="5499202"/>
-            <a:ext cx="731520" cy="382219"/>
+            <a:off x="6108192" y="5568696"/>
+            <a:ext cx="731520" cy="347472"/>
           </a:xfrm>
           <a:prstGeom prst="rect">
             <a:avLst/>
@@ -5143,8 +5143,8 @@
         </p:nvSpPr>
         <p:spPr>
           <a:xfrm>
-            <a:off x="6858000" y="5499202"/>
-            <a:ext cx="914400" cy="382219"/>
+            <a:off x="6858000" y="5568696"/>
+            <a:ext cx="914400" cy="347472"/>
           </a:xfrm>
           <a:prstGeom prst="rect">
             <a:avLst/>
@@ -5182,8 +5182,8 @@
         </p:nvSpPr>
         <p:spPr>
           <a:xfrm>
-            <a:off x="7818120" y="5535778"/>
-            <a:ext cx="54864" cy="309067"/>
+            <a:off x="7818120" y="5605272"/>
+            <a:ext cx="54864" cy="274320"/>
           </a:xfrm>
           <a:prstGeom prst="rect">
             <a:avLst/>
@@ -5202,8 +5202,8 @@
         </p:nvSpPr>
         <p:spPr>
           <a:xfrm>
-            <a:off x="4416552" y="5881421"/>
-            <a:ext cx="1673352" cy="382219"/>
+            <a:off x="4416552" y="5916168"/>
+            <a:ext cx="1673352" cy="347472"/>
           </a:xfrm>
           <a:prstGeom prst="rect">
             <a:avLst/>
@@ -5241,8 +5241,8 @@
         </p:nvSpPr>
         <p:spPr>
           <a:xfrm>
-            <a:off x="6108192" y="5881421"/>
-            <a:ext cx="731520" cy="382219"/>
+            <a:off x="6108192" y="5916168"/>
+            <a:ext cx="731520" cy="347472"/>
           </a:xfrm>
           <a:prstGeom prst="rect">
             <a:avLst/>
@@ -5280,8 +5280,8 @@
         </p:nvSpPr>
         <p:spPr>
           <a:xfrm>
-            <a:off x="6858000" y="5881421"/>
-            <a:ext cx="914400" cy="382219"/>
+            <a:off x="6858000" y="5916168"/>
+            <a:ext cx="914400" cy="347472"/>
           </a:xfrm>
           <a:prstGeom prst="rect">
             <a:avLst/>
@@ -5319,8 +5319,8 @@
         </p:nvSpPr>
         <p:spPr>
           <a:xfrm>
-            <a:off x="7818120" y="5917997"/>
-            <a:ext cx="54864" cy="309067"/>
+            <a:off x="7818120" y="5952744"/>
+            <a:ext cx="54864" cy="274320"/>
           </a:xfrm>
           <a:prstGeom prst="rect">
             <a:avLst/>
@@ -5482,7 +5482,7 @@
                 <a:ea typeface="Inter" pitchFamily="34" charset="-122"/>
                 <a:cs typeface="Inter" pitchFamily="34" charset="-120"/>
               </a:rPr>
-              <a:t>TOP 5</a:t>
+              <a:t>AT 100%</a:t>
             </a:r>
             <a:endParaRPr lang="en-US" sz="1400" dirty="0"/>
           </a:p>
@@ -5575,7 +5575,7 @@
         <p:spPr>
           <a:xfrm>
             <a:off x="8211312" y="2167128"/>
-            <a:ext cx="1673352" cy="382219"/>
+            <a:ext cx="1673352" cy="347472"/>
           </a:xfrm>
           <a:prstGeom prst="rect">
             <a:avLst/>
@@ -5614,7 +5614,7 @@
         <p:spPr>
           <a:xfrm>
             <a:off x="9902952" y="2167128"/>
-            <a:ext cx="731520" cy="382219"/>
+            <a:ext cx="731520" cy="347472"/>
           </a:xfrm>
           <a:prstGeom prst="rect">
             <a:avLst/>
@@ -5653,7 +5653,7 @@
         <p:spPr>
           <a:xfrm>
             <a:off x="10652760" y="2167128"/>
-            <a:ext cx="914400" cy="382219"/>
+            <a:ext cx="914400" cy="347472"/>
           </a:xfrm>
           <a:prstGeom prst="rect">
             <a:avLst/>
@@ -5691,8 +5691,8 @@
         </p:nvSpPr>
         <p:spPr>
           <a:xfrm>
-            <a:off x="8211312" y="2549347"/>
-            <a:ext cx="1673352" cy="382219"/>
+            <a:off x="8211312" y="2514600"/>
+            <a:ext cx="1673352" cy="347472"/>
           </a:xfrm>
           <a:prstGeom prst="rect">
             <a:avLst/>
@@ -5730,8 +5730,8 @@
         </p:nvSpPr>
         <p:spPr>
           <a:xfrm>
-            <a:off x="9902952" y="2549347"/>
-            <a:ext cx="731520" cy="382219"/>
+            <a:off x="9902952" y="2514600"/>
+            <a:ext cx="731520" cy="347472"/>
           </a:xfrm>
           <a:prstGeom prst="rect">
             <a:avLst/>
@@ -5769,8 +5769,8 @@
         </p:nvSpPr>
         <p:spPr>
           <a:xfrm>
-            <a:off x="10652760" y="2549347"/>
-            <a:ext cx="914400" cy="382219"/>
+            <a:off x="10652760" y="2514600"/>
+            <a:ext cx="914400" cy="347472"/>
           </a:xfrm>
           <a:prstGeom prst="rect">
             <a:avLst/>
@@ -5808,8 +5808,8 @@
         </p:nvSpPr>
         <p:spPr>
           <a:xfrm>
-            <a:off x="8211312" y="2931566"/>
-            <a:ext cx="1673352" cy="382219"/>
+            <a:off x="8211312" y="2862072"/>
+            <a:ext cx="1673352" cy="347472"/>
           </a:xfrm>
           <a:prstGeom prst="rect">
             <a:avLst/>
@@ -5847,8 +5847,8 @@
         </p:nvSpPr>
         <p:spPr>
           <a:xfrm>
-            <a:off x="9902952" y="2931566"/>
-            <a:ext cx="731520" cy="382219"/>
+            <a:off x="9902952" y="2862072"/>
+            <a:ext cx="731520" cy="347472"/>
           </a:xfrm>
           <a:prstGeom prst="rect">
             <a:avLst/>
@@ -5886,8 +5886,8 @@
         </p:nvSpPr>
         <p:spPr>
           <a:xfrm>
-            <a:off x="10652760" y="2931566"/>
-            <a:ext cx="914400" cy="382219"/>
+            <a:off x="10652760" y="2862072"/>
+            <a:ext cx="914400" cy="347472"/>
           </a:xfrm>
           <a:prstGeom prst="rect">
             <a:avLst/>
@@ -5925,8 +5925,8 @@
         </p:nvSpPr>
         <p:spPr>
           <a:xfrm>
-            <a:off x="8211312" y="3313786"/>
-            <a:ext cx="1673352" cy="382219"/>
+            <a:off x="8211312" y="3209544"/>
+            <a:ext cx="1673352" cy="347472"/>
           </a:xfrm>
           <a:prstGeom prst="rect">
             <a:avLst/>
@@ -5964,8 +5964,8 @@
         </p:nvSpPr>
         <p:spPr>
           <a:xfrm>
-            <a:off x="9902952" y="3313786"/>
-            <a:ext cx="731520" cy="382219"/>
+            <a:off x="9902952" y="3209544"/>
+            <a:ext cx="731520" cy="347472"/>
           </a:xfrm>
           <a:prstGeom prst="rect">
             <a:avLst/>
@@ -6003,8 +6003,8 @@
         </p:nvSpPr>
         <p:spPr>
           <a:xfrm>
-            <a:off x="10652760" y="3313786"/>
-            <a:ext cx="914400" cy="382219"/>
+            <a:off x="10652760" y="3209544"/>
+            <a:ext cx="914400" cy="347472"/>
           </a:xfrm>
           <a:prstGeom prst="rect">
             <a:avLst/>
@@ -6042,8 +6042,8 @@
         </p:nvSpPr>
         <p:spPr>
           <a:xfrm>
-            <a:off x="8211312" y="3696005"/>
-            <a:ext cx="1673352" cy="382219"/>
+            <a:off x="8211312" y="3557016"/>
+            <a:ext cx="1673352" cy="347472"/>
           </a:xfrm>
           <a:prstGeom prst="rect">
             <a:avLst/>
@@ -6081,8 +6081,8 @@
         </p:nvSpPr>
         <p:spPr>
           <a:xfrm>
-            <a:off x="9902952" y="3696005"/>
-            <a:ext cx="731520" cy="382219"/>
+            <a:off x="9902952" y="3557016"/>
+            <a:ext cx="731520" cy="347472"/>
           </a:xfrm>
           <a:prstGeom prst="rect">
             <a:avLst/>
@@ -6120,8 +6120,8 @@
         </p:nvSpPr>
         <p:spPr>
           <a:xfrm>
-            <a:off x="10652760" y="3696005"/>
-            <a:ext cx="914400" cy="382219"/>
+            <a:off x="10652760" y="3557016"/>
+            <a:ext cx="914400" cy="347472"/>
           </a:xfrm>
           <a:prstGeom prst="rect">
             <a:avLst/>
@@ -6153,13 +6153,130 @@
       </p:sp>
       <p:sp>
         <p:nvSpPr>
-          <p:cNvPr id="124" name="Shape 122"/>
+          <p:cNvPr id="124" name="Text 122"/>
+          <p:cNvSpPr txBox="1"/>
+          <p:nvPr/>
+        </p:nvSpPr>
+        <p:spPr>
+          <a:xfrm>
+            <a:off x="8211312" y="3904488"/>
+            <a:ext cx="1673352" cy="347472"/>
+          </a:xfrm>
+          <a:prstGeom prst="rect">
+            <a:avLst/>
+          </a:prstGeom>
+          <a:noFill/>
+          <a:ln/>
+        </p:spPr>
+        <p:txBody>
+          <a:bodyPr wrap="square" lIns="0" tIns="0" rIns="0" bIns="0" rtlCol="0" anchor="ctr"/>
+          <a:lstStyle/>
+          <a:p>
+            <a:pPr indent="0" marL="0">
+              <a:buNone/>
+            </a:pPr>
+            <a:r>
+              <a:rPr lang="en-US" sz="1300" dirty="0">
+                <a:solidFill>
+                  <a:srgbClr val="1A1A1A"/>
+                </a:solidFill>
+                <a:latin typeface="Inter" pitchFamily="34" charset="0"/>
+                <a:ea typeface="Inter" pitchFamily="34" charset="-122"/>
+                <a:cs typeface="Inter" pitchFamily="34" charset="-120"/>
+              </a:rPr>
+              <a:t>Acura</a:t>
+            </a:r>
+            <a:endParaRPr lang="en-US" sz="1300" dirty="0"/>
+          </a:p>
+        </p:txBody>
+      </p:sp>
+      <p:sp>
+        <p:nvSpPr>
+          <p:cNvPr id="125" name="Text 123"/>
+          <p:cNvSpPr txBox="1"/>
+          <p:nvPr/>
+        </p:nvSpPr>
+        <p:spPr>
+          <a:xfrm>
+            <a:off x="9902952" y="3904488"/>
+            <a:ext cx="731520" cy="347472"/>
+          </a:xfrm>
+          <a:prstGeom prst="rect">
+            <a:avLst/>
+          </a:prstGeom>
+          <a:noFill/>
+          <a:ln/>
+        </p:spPr>
+        <p:txBody>
+          <a:bodyPr wrap="square" lIns="0" tIns="0" rIns="0" bIns="0" rtlCol="0" anchor="ctr"/>
+          <a:lstStyle/>
+          <a:p>
+            <a:pPr algn="r" indent="0" marL="0">
+              <a:buNone/>
+            </a:pPr>
+            <a:r>
+              <a:rPr lang="en-US" sz="1300" b="1" dirty="0">
+                <a:solidFill>
+                  <a:srgbClr val="0B7A4A"/>
+                </a:solidFill>
+                <a:latin typeface="Inter" pitchFamily="34" charset="0"/>
+                <a:ea typeface="Inter" pitchFamily="34" charset="-122"/>
+                <a:cs typeface="Inter" pitchFamily="34" charset="-120"/>
+              </a:rPr>
+              <a:t>100.0%</a:t>
+            </a:r>
+            <a:endParaRPr lang="en-US" sz="1300" dirty="0"/>
+          </a:p>
+        </p:txBody>
+      </p:sp>
+      <p:sp>
+        <p:nvSpPr>
+          <p:cNvPr id="126" name="Text 124"/>
+          <p:cNvSpPr txBox="1"/>
+          <p:nvPr/>
+        </p:nvSpPr>
+        <p:spPr>
+          <a:xfrm>
+            <a:off x="10652760" y="3904488"/>
+            <a:ext cx="914400" cy="347472"/>
+          </a:xfrm>
+          <a:prstGeom prst="rect">
+            <a:avLst/>
+          </a:prstGeom>
+          <a:noFill/>
+          <a:ln/>
+        </p:spPr>
+        <p:txBody>
+          <a:bodyPr wrap="square" lIns="0" tIns="0" rIns="0" bIns="0" rtlCol="0" anchor="ctr"/>
+          <a:lstStyle/>
+          <a:p>
+            <a:pPr algn="r" indent="0" marL="0">
+              <a:buNone/>
+            </a:pPr>
+            <a:r>
+              <a:rPr lang="en-US" sz="1200" dirty="0">
+                <a:solidFill>
+                  <a:srgbClr val="595959"/>
+                </a:solidFill>
+                <a:latin typeface="Inter" pitchFamily="34" charset="0"/>
+                <a:ea typeface="Inter" pitchFamily="34" charset="-122"/>
+                <a:cs typeface="Inter" pitchFamily="34" charset="-120"/>
+              </a:rPr>
+              <a:t>376</a:t>
+            </a:r>
+            <a:endParaRPr lang="en-US" sz="1200" dirty="0"/>
+          </a:p>
+        </p:txBody>
+      </p:sp>
+      <p:sp>
+        <p:nvSpPr>
+          <p:cNvPr id="127" name="Shape 125"/>
           <p:cNvSpPr/>
           <p:nvPr/>
         </p:nvSpPr>
         <p:spPr>
           <a:xfrm>
-            <a:off x="8211312" y="4096512"/>
+            <a:off x="8211312" y="4270248"/>
             <a:ext cx="3355848" cy="22860"/>
           </a:xfrm>
           <a:prstGeom prst="rect">
@@ -6173,13 +6290,13 @@
       </p:sp>
       <p:sp>
         <p:nvSpPr>
-          <p:cNvPr id="125" name="Text 123"/>
-          <p:cNvSpPr txBox="1"/>
-          <p:nvPr/>
-        </p:nvSpPr>
-        <p:spPr>
-          <a:xfrm>
-            <a:off x="8211312" y="4123944"/>
+          <p:cNvPr id="128" name="Text 126"/>
+          <p:cNvSpPr txBox="1"/>
+          <p:nvPr/>
+        </p:nvSpPr>
+        <p:spPr>
+          <a:xfrm>
+            <a:off x="8211312" y="4297680"/>
             <a:ext cx="1828800" cy="219456"/>
           </a:xfrm>
           <a:prstGeom prst="rect">
@@ -6212,13 +6329,13 @@
       </p:sp>
       <p:sp>
         <p:nvSpPr>
-          <p:cNvPr id="126" name="Text 124"/>
-          <p:cNvSpPr txBox="1"/>
-          <p:nvPr/>
-        </p:nvSpPr>
-        <p:spPr>
-          <a:xfrm>
-            <a:off x="9902952" y="4123944"/>
+          <p:cNvPr id="129" name="Text 127"/>
+          <p:cNvSpPr txBox="1"/>
+          <p:nvPr/>
+        </p:nvSpPr>
+        <p:spPr>
+          <a:xfrm>
+            <a:off x="9902952" y="4297680"/>
             <a:ext cx="731520" cy="219456"/>
           </a:xfrm>
           <a:prstGeom prst="rect">
@@ -6251,13 +6368,13 @@
       </p:sp>
       <p:sp>
         <p:nvSpPr>
-          <p:cNvPr id="127" name="Text 125"/>
-          <p:cNvSpPr txBox="1"/>
-          <p:nvPr/>
-        </p:nvSpPr>
-        <p:spPr>
-          <a:xfrm>
-            <a:off x="10652760" y="4123944"/>
+          <p:cNvPr id="130" name="Text 128"/>
+          <p:cNvSpPr txBox="1"/>
+          <p:nvPr/>
+        </p:nvSpPr>
+        <p:spPr>
+          <a:xfrm>
+            <a:off x="10652760" y="4297680"/>
             <a:ext cx="914400" cy="219456"/>
           </a:xfrm>
           <a:prstGeom prst="rect">
@@ -6290,14 +6407,14 @@
       </p:sp>
       <p:sp>
         <p:nvSpPr>
-          <p:cNvPr id="128" name="Text 126"/>
-          <p:cNvSpPr txBox="1"/>
-          <p:nvPr/>
-        </p:nvSpPr>
-        <p:spPr>
-          <a:xfrm>
-            <a:off x="8211312" y="4352544"/>
-            <a:ext cx="1673352" cy="382219"/>
+          <p:cNvPr id="131" name="Text 129"/>
+          <p:cNvSpPr txBox="1"/>
+          <p:nvPr/>
+        </p:nvSpPr>
+        <p:spPr>
+          <a:xfrm>
+            <a:off x="8211312" y="4526280"/>
+            <a:ext cx="1673352" cy="347472"/>
           </a:xfrm>
           <a:prstGeom prst="rect">
             <a:avLst/>
@@ -6329,14 +6446,14 @@
       </p:sp>
       <p:sp>
         <p:nvSpPr>
-          <p:cNvPr id="129" name="Text 127"/>
-          <p:cNvSpPr txBox="1"/>
-          <p:nvPr/>
-        </p:nvSpPr>
-        <p:spPr>
-          <a:xfrm>
-            <a:off x="9902952" y="4352544"/>
-            <a:ext cx="731520" cy="382219"/>
+          <p:cNvPr id="132" name="Text 130"/>
+          <p:cNvSpPr txBox="1"/>
+          <p:nvPr/>
+        </p:nvSpPr>
+        <p:spPr>
+          <a:xfrm>
+            <a:off x="9902952" y="4526280"/>
+            <a:ext cx="731520" cy="347472"/>
           </a:xfrm>
           <a:prstGeom prst="rect">
             <a:avLst/>
@@ -6368,14 +6485,14 @@
       </p:sp>
       <p:sp>
         <p:nvSpPr>
-          <p:cNvPr id="130" name="Text 128"/>
-          <p:cNvSpPr txBox="1"/>
-          <p:nvPr/>
-        </p:nvSpPr>
-        <p:spPr>
-          <a:xfrm>
-            <a:off x="10652760" y="4352544"/>
-            <a:ext cx="914400" cy="382219"/>
+          <p:cNvPr id="133" name="Text 131"/>
+          <p:cNvSpPr txBox="1"/>
+          <p:nvPr/>
+        </p:nvSpPr>
+        <p:spPr>
+          <a:xfrm>
+            <a:off x="10652760" y="4526280"/>
+            <a:ext cx="914400" cy="347472"/>
           </a:xfrm>
           <a:prstGeom prst="rect">
             <a:avLst/>
@@ -6407,14 +6524,14 @@
       </p:sp>
       <p:sp>
         <p:nvSpPr>
-          <p:cNvPr id="131" name="Text 129"/>
-          <p:cNvSpPr txBox="1"/>
-          <p:nvPr/>
-        </p:nvSpPr>
-        <p:spPr>
-          <a:xfrm>
-            <a:off x="8211312" y="4734763"/>
-            <a:ext cx="1673352" cy="382219"/>
+          <p:cNvPr id="134" name="Text 132"/>
+          <p:cNvSpPr txBox="1"/>
+          <p:nvPr/>
+        </p:nvSpPr>
+        <p:spPr>
+          <a:xfrm>
+            <a:off x="8211312" y="4873752"/>
+            <a:ext cx="1673352" cy="347472"/>
           </a:xfrm>
           <a:prstGeom prst="rect">
             <a:avLst/>
@@ -6446,14 +6563,14 @@
       </p:sp>
       <p:sp>
         <p:nvSpPr>
-          <p:cNvPr id="132" name="Text 130"/>
-          <p:cNvSpPr txBox="1"/>
-          <p:nvPr/>
-        </p:nvSpPr>
-        <p:spPr>
-          <a:xfrm>
-            <a:off x="9902952" y="4734763"/>
-            <a:ext cx="731520" cy="382219"/>
+          <p:cNvPr id="135" name="Text 133"/>
+          <p:cNvSpPr txBox="1"/>
+          <p:nvPr/>
+        </p:nvSpPr>
+        <p:spPr>
+          <a:xfrm>
+            <a:off x="9902952" y="4873752"/>
+            <a:ext cx="731520" cy="347472"/>
           </a:xfrm>
           <a:prstGeom prst="rect">
             <a:avLst/>
@@ -6485,14 +6602,14 @@
       </p:sp>
       <p:sp>
         <p:nvSpPr>
-          <p:cNvPr id="133" name="Text 131"/>
-          <p:cNvSpPr txBox="1"/>
-          <p:nvPr/>
-        </p:nvSpPr>
-        <p:spPr>
-          <a:xfrm>
-            <a:off x="10652760" y="4734763"/>
-            <a:ext cx="914400" cy="382219"/>
+          <p:cNvPr id="136" name="Text 134"/>
+          <p:cNvSpPr txBox="1"/>
+          <p:nvPr/>
+        </p:nvSpPr>
+        <p:spPr>
+          <a:xfrm>
+            <a:off x="10652760" y="4873752"/>
+            <a:ext cx="914400" cy="347472"/>
           </a:xfrm>
           <a:prstGeom prst="rect">
             <a:avLst/>
@@ -6524,14 +6641,14 @@
       </p:sp>
       <p:sp>
         <p:nvSpPr>
-          <p:cNvPr id="134" name="Text 132"/>
-          <p:cNvSpPr txBox="1"/>
-          <p:nvPr/>
-        </p:nvSpPr>
-        <p:spPr>
-          <a:xfrm>
-            <a:off x="8211312" y="5116982"/>
-            <a:ext cx="1673352" cy="382219"/>
+          <p:cNvPr id="137" name="Text 135"/>
+          <p:cNvSpPr txBox="1"/>
+          <p:nvPr/>
+        </p:nvSpPr>
+        <p:spPr>
+          <a:xfrm>
+            <a:off x="8211312" y="5221224"/>
+            <a:ext cx="1673352" cy="347472"/>
           </a:xfrm>
           <a:prstGeom prst="rect">
             <a:avLst/>
@@ -6563,14 +6680,14 @@
       </p:sp>
       <p:sp>
         <p:nvSpPr>
-          <p:cNvPr id="135" name="Text 133"/>
-          <p:cNvSpPr txBox="1"/>
-          <p:nvPr/>
-        </p:nvSpPr>
-        <p:spPr>
-          <a:xfrm>
-            <a:off x="9902952" y="5116982"/>
-            <a:ext cx="731520" cy="382219"/>
+          <p:cNvPr id="138" name="Text 136"/>
+          <p:cNvSpPr txBox="1"/>
+          <p:nvPr/>
+        </p:nvSpPr>
+        <p:spPr>
+          <a:xfrm>
+            <a:off x="9902952" y="5221224"/>
+            <a:ext cx="731520" cy="347472"/>
           </a:xfrm>
           <a:prstGeom prst="rect">
             <a:avLst/>
@@ -6602,14 +6719,14 @@
       </p:sp>
       <p:sp>
         <p:nvSpPr>
-          <p:cNvPr id="136" name="Text 134"/>
-          <p:cNvSpPr txBox="1"/>
-          <p:nvPr/>
-        </p:nvSpPr>
-        <p:spPr>
-          <a:xfrm>
-            <a:off x="10652760" y="5116982"/>
-            <a:ext cx="914400" cy="382219"/>
+          <p:cNvPr id="139" name="Text 137"/>
+          <p:cNvSpPr txBox="1"/>
+          <p:nvPr/>
+        </p:nvSpPr>
+        <p:spPr>
+          <a:xfrm>
+            <a:off x="10652760" y="5221224"/>
+            <a:ext cx="914400" cy="347472"/>
           </a:xfrm>
           <a:prstGeom prst="rect">
             <a:avLst/>
@@ -6641,14 +6758,14 @@
       </p:sp>
       <p:sp>
         <p:nvSpPr>
-          <p:cNvPr id="137" name="Shape 135"/>
+          <p:cNvPr id="140" name="Shape 138"/>
           <p:cNvSpPr/>
           <p:nvPr/>
         </p:nvSpPr>
         <p:spPr>
           <a:xfrm>
-            <a:off x="11612880" y="5153558"/>
-            <a:ext cx="54864" cy="309067"/>
+            <a:off x="11612880" y="5257800"/>
+            <a:ext cx="54864" cy="274320"/>
           </a:xfrm>
           <a:prstGeom prst="rect">
             <a:avLst/>
@@ -6661,14 +6778,14 @@
       </p:sp>
       <p:sp>
         <p:nvSpPr>
-          <p:cNvPr id="138" name="Text 136"/>
-          <p:cNvSpPr txBox="1"/>
-          <p:nvPr/>
-        </p:nvSpPr>
-        <p:spPr>
-          <a:xfrm>
-            <a:off x="8211312" y="5499202"/>
-            <a:ext cx="1673352" cy="382219"/>
+          <p:cNvPr id="141" name="Text 139"/>
+          <p:cNvSpPr txBox="1"/>
+          <p:nvPr/>
+        </p:nvSpPr>
+        <p:spPr>
+          <a:xfrm>
+            <a:off x="8211312" y="5568696"/>
+            <a:ext cx="1673352" cy="347472"/>
           </a:xfrm>
           <a:prstGeom prst="rect">
             <a:avLst/>
@@ -6700,14 +6817,14 @@
       </p:sp>
       <p:sp>
         <p:nvSpPr>
-          <p:cNvPr id="139" name="Text 137"/>
-          <p:cNvSpPr txBox="1"/>
-          <p:nvPr/>
-        </p:nvSpPr>
-        <p:spPr>
-          <a:xfrm>
-            <a:off x="9902952" y="5499202"/>
-            <a:ext cx="731520" cy="382219"/>
+          <p:cNvPr id="142" name="Text 140"/>
+          <p:cNvSpPr txBox="1"/>
+          <p:nvPr/>
+        </p:nvSpPr>
+        <p:spPr>
+          <a:xfrm>
+            <a:off x="9902952" y="5568696"/>
+            <a:ext cx="731520" cy="347472"/>
           </a:xfrm>
           <a:prstGeom prst="rect">
             <a:avLst/>
@@ -6739,14 +6856,14 @@
       </p:sp>
       <p:sp>
         <p:nvSpPr>
-          <p:cNvPr id="140" name="Text 138"/>
-          <p:cNvSpPr txBox="1"/>
-          <p:nvPr/>
-        </p:nvSpPr>
-        <p:spPr>
-          <a:xfrm>
-            <a:off x="10652760" y="5499202"/>
-            <a:ext cx="914400" cy="382219"/>
+          <p:cNvPr id="143" name="Text 141"/>
+          <p:cNvSpPr txBox="1"/>
+          <p:nvPr/>
+        </p:nvSpPr>
+        <p:spPr>
+          <a:xfrm>
+            <a:off x="10652760" y="5568696"/>
+            <a:ext cx="914400" cy="347472"/>
           </a:xfrm>
           <a:prstGeom prst="rect">
             <a:avLst/>
@@ -6778,14 +6895,14 @@
       </p:sp>
       <p:sp>
         <p:nvSpPr>
-          <p:cNvPr id="141" name="Shape 139"/>
+          <p:cNvPr id="144" name="Shape 142"/>
           <p:cNvSpPr/>
           <p:nvPr/>
         </p:nvSpPr>
         <p:spPr>
           <a:xfrm>
-            <a:off x="11612880" y="5535778"/>
-            <a:ext cx="54864" cy="309067"/>
+            <a:off x="11612880" y="5605272"/>
+            <a:ext cx="54864" cy="274320"/>
           </a:xfrm>
           <a:prstGeom prst="rect">
             <a:avLst/>
@@ -6798,14 +6915,14 @@
       </p:sp>
       <p:sp>
         <p:nvSpPr>
-          <p:cNvPr id="142" name="Text 140"/>
-          <p:cNvSpPr txBox="1"/>
-          <p:nvPr/>
-        </p:nvSpPr>
-        <p:spPr>
-          <a:xfrm>
-            <a:off x="8211312" y="5881421"/>
-            <a:ext cx="1673352" cy="382219"/>
+          <p:cNvPr id="145" name="Text 143"/>
+          <p:cNvSpPr txBox="1"/>
+          <p:nvPr/>
+        </p:nvSpPr>
+        <p:spPr>
+          <a:xfrm>
+            <a:off x="8211312" y="5916168"/>
+            <a:ext cx="1673352" cy="347472"/>
           </a:xfrm>
           <a:prstGeom prst="rect">
             <a:avLst/>
@@ -6837,14 +6954,14 @@
       </p:sp>
       <p:sp>
         <p:nvSpPr>
-          <p:cNvPr id="143" name="Text 141"/>
-          <p:cNvSpPr txBox="1"/>
-          <p:nvPr/>
-        </p:nvSpPr>
-        <p:spPr>
-          <a:xfrm>
-            <a:off x="9902952" y="5881421"/>
-            <a:ext cx="731520" cy="382219"/>
+          <p:cNvPr id="146" name="Text 144"/>
+          <p:cNvSpPr txBox="1"/>
+          <p:nvPr/>
+        </p:nvSpPr>
+        <p:spPr>
+          <a:xfrm>
+            <a:off x="9902952" y="5916168"/>
+            <a:ext cx="731520" cy="347472"/>
           </a:xfrm>
           <a:prstGeom prst="rect">
             <a:avLst/>
@@ -6876,14 +6993,14 @@
       </p:sp>
       <p:sp>
         <p:nvSpPr>
-          <p:cNvPr id="144" name="Text 142"/>
-          <p:cNvSpPr txBox="1"/>
-          <p:nvPr/>
-        </p:nvSpPr>
-        <p:spPr>
-          <a:xfrm>
-            <a:off x="10652760" y="5881421"/>
-            <a:ext cx="914400" cy="382219"/>
+          <p:cNvPr id="147" name="Text 145"/>
+          <p:cNvSpPr txBox="1"/>
+          <p:nvPr/>
+        </p:nvSpPr>
+        <p:spPr>
+          <a:xfrm>
+            <a:off x="10652760" y="5916168"/>
+            <a:ext cx="914400" cy="347472"/>
           </a:xfrm>
           <a:prstGeom prst="rect">
             <a:avLst/>

--- a/day2-deck/decks/Voice AI - Flai.pptx
+++ b/day2-deck/decks/Voice AI - Flai.pptx
@@ -1018,7 +1018,7 @@
                 <a:ea typeface="Inter" pitchFamily="34" charset="-122"/>
                 <a:cs typeface="Inter" pitchFamily="34" charset="-120"/>
               </a:rPr>
-              <a:t>VOICE AI · FLAI · JUL 26 – OCT 26, 2026</a:t>
+              <a:t>VOICE AI · FLAI · LAST 90 DAYS</a:t>
             </a:r>
             <a:endParaRPr lang="en-US" sz="1400" dirty="0"/>
           </a:p>
@@ -1752,7 +1752,7 @@
                 <a:ea typeface="Inter" pitchFamily="34" charset="-122"/>
                 <a:cs typeface="Inter" pitchFamily="34" charset="-120"/>
               </a:rPr>
-              <a:t>The AI books and routes the call; the store still has to answer the transfer and close every callback in the Flai dashboard. Source: Flai service calls, Jul 26 – Oct 26, 2026.</a:t>
+              <a:t>The AI books and routes the call; the store still has to answer the transfer and close every callback in the Flai dashboard. Source: Flai service calls, last 90 days.</a:t>
             </a:r>
             <a:endParaRPr lang="en-US" sz="1700" dirty="0"/>
           </a:p>
@@ -1902,7 +1902,7 @@
                 <a:ea typeface="Inter" pitchFamily="34" charset="-122"/>
                 <a:cs typeface="Inter" pitchFamily="34" charset="-120"/>
               </a:rPr>
-              <a:t>VOICE AI · FLAI · JUL 26 – OCT 26, 2026</a:t>
+              <a:t>VOICE AI · FLAI · LAST 90 DAYS</a:t>
             </a:r>
             <a:endParaRPr lang="en-US" sz="1400" dirty="0"/>
           </a:p>
@@ -2191,7 +2191,7 @@
         <p:spPr>
           <a:xfrm>
             <a:off x="621792" y="2167128"/>
-            <a:ext cx="1673352" cy="347472"/>
+            <a:ext cx="1673352" cy="382219"/>
           </a:xfrm>
           <a:prstGeom prst="rect">
             <a:avLst/>
@@ -2230,7 +2230,7 @@
         <p:spPr>
           <a:xfrm>
             <a:off x="2313432" y="2167128"/>
-            <a:ext cx="731520" cy="347472"/>
+            <a:ext cx="731520" cy="382219"/>
           </a:xfrm>
           <a:prstGeom prst="rect">
             <a:avLst/>
@@ -2269,7 +2269,7 @@
         <p:spPr>
           <a:xfrm>
             <a:off x="3063240" y="2167128"/>
-            <a:ext cx="914400" cy="347472"/>
+            <a:ext cx="914400" cy="382219"/>
           </a:xfrm>
           <a:prstGeom prst="rect">
             <a:avLst/>
@@ -2308,7 +2308,7 @@
         <p:spPr>
           <a:xfrm>
             <a:off x="4023360" y="2203704"/>
-            <a:ext cx="54864" cy="274320"/>
+            <a:ext cx="54864" cy="309067"/>
           </a:xfrm>
           <a:prstGeom prst="rect">
             <a:avLst/>
@@ -2327,8 +2327,8 @@
         </p:nvSpPr>
         <p:spPr>
           <a:xfrm>
-            <a:off x="621792" y="2514600"/>
-            <a:ext cx="1673352" cy="347472"/>
+            <a:off x="621792" y="2549347"/>
+            <a:ext cx="1673352" cy="382219"/>
           </a:xfrm>
           <a:prstGeom prst="rect">
             <a:avLst/>
@@ -2366,8 +2366,8 @@
         </p:nvSpPr>
         <p:spPr>
           <a:xfrm>
-            <a:off x="2313432" y="2514600"/>
-            <a:ext cx="731520" cy="347472"/>
+            <a:off x="2313432" y="2549347"/>
+            <a:ext cx="731520" cy="382219"/>
           </a:xfrm>
           <a:prstGeom prst="rect">
             <a:avLst/>
@@ -2405,8 +2405,8 @@
         </p:nvSpPr>
         <p:spPr>
           <a:xfrm>
-            <a:off x="3063240" y="2514600"/>
-            <a:ext cx="914400" cy="347472"/>
+            <a:off x="3063240" y="2549347"/>
+            <a:ext cx="914400" cy="382219"/>
           </a:xfrm>
           <a:prstGeom prst="rect">
             <a:avLst/>
@@ -2444,8 +2444,8 @@
         </p:nvSpPr>
         <p:spPr>
           <a:xfrm>
-            <a:off x="621792" y="2862072"/>
-            <a:ext cx="1673352" cy="347472"/>
+            <a:off x="621792" y="2931566"/>
+            <a:ext cx="1673352" cy="382219"/>
           </a:xfrm>
           <a:prstGeom prst="rect">
             <a:avLst/>
@@ -2483,8 +2483,8 @@
         </p:nvSpPr>
         <p:spPr>
           <a:xfrm>
-            <a:off x="2313432" y="2862072"/>
-            <a:ext cx="731520" cy="347472"/>
+            <a:off x="2313432" y="2931566"/>
+            <a:ext cx="731520" cy="382219"/>
           </a:xfrm>
           <a:prstGeom prst="rect">
             <a:avLst/>
@@ -2522,8 +2522,8 @@
         </p:nvSpPr>
         <p:spPr>
           <a:xfrm>
-            <a:off x="3063240" y="2862072"/>
-            <a:ext cx="914400" cy="347472"/>
+            <a:off x="3063240" y="2931566"/>
+            <a:ext cx="914400" cy="382219"/>
           </a:xfrm>
           <a:prstGeom prst="rect">
             <a:avLst/>
@@ -2561,8 +2561,8 @@
         </p:nvSpPr>
         <p:spPr>
           <a:xfrm>
-            <a:off x="4023360" y="2898648"/>
-            <a:ext cx="54864" cy="274320"/>
+            <a:off x="4023360" y="2968142"/>
+            <a:ext cx="54864" cy="309067"/>
           </a:xfrm>
           <a:prstGeom prst="rect">
             <a:avLst/>
@@ -2581,8 +2581,8 @@
         </p:nvSpPr>
         <p:spPr>
           <a:xfrm>
-            <a:off x="621792" y="3209544"/>
-            <a:ext cx="1673352" cy="347472"/>
+            <a:off x="621792" y="3313786"/>
+            <a:ext cx="1673352" cy="382219"/>
           </a:xfrm>
           <a:prstGeom prst="rect">
             <a:avLst/>
@@ -2620,8 +2620,8 @@
         </p:nvSpPr>
         <p:spPr>
           <a:xfrm>
-            <a:off x="2313432" y="3209544"/>
-            <a:ext cx="731520" cy="347472"/>
+            <a:off x="2313432" y="3313786"/>
+            <a:ext cx="731520" cy="382219"/>
           </a:xfrm>
           <a:prstGeom prst="rect">
             <a:avLst/>
@@ -2659,8 +2659,8 @@
         </p:nvSpPr>
         <p:spPr>
           <a:xfrm>
-            <a:off x="3063240" y="3209544"/>
-            <a:ext cx="914400" cy="347472"/>
+            <a:off x="3063240" y="3313786"/>
+            <a:ext cx="914400" cy="382219"/>
           </a:xfrm>
           <a:prstGeom prst="rect">
             <a:avLst/>
@@ -2698,8 +2698,8 @@
         </p:nvSpPr>
         <p:spPr>
           <a:xfrm>
-            <a:off x="4023360" y="3246120"/>
-            <a:ext cx="54864" cy="274320"/>
+            <a:off x="4023360" y="3350362"/>
+            <a:ext cx="54864" cy="309067"/>
           </a:xfrm>
           <a:prstGeom prst="rect">
             <a:avLst/>
@@ -2718,8 +2718,8 @@
         </p:nvSpPr>
         <p:spPr>
           <a:xfrm>
-            <a:off x="621792" y="3557016"/>
-            <a:ext cx="1673352" cy="347472"/>
+            <a:off x="621792" y="3696005"/>
+            <a:ext cx="1673352" cy="382219"/>
           </a:xfrm>
           <a:prstGeom prst="rect">
             <a:avLst/>
@@ -2757,8 +2757,8 @@
         </p:nvSpPr>
         <p:spPr>
           <a:xfrm>
-            <a:off x="2313432" y="3557016"/>
-            <a:ext cx="731520" cy="347472"/>
+            <a:off x="2313432" y="3696005"/>
+            <a:ext cx="731520" cy="382219"/>
           </a:xfrm>
           <a:prstGeom prst="rect">
             <a:avLst/>
@@ -2796,8 +2796,8 @@
         </p:nvSpPr>
         <p:spPr>
           <a:xfrm>
-            <a:off x="3063240" y="3557016"/>
-            <a:ext cx="914400" cy="347472"/>
+            <a:off x="3063240" y="3696005"/>
+            <a:ext cx="914400" cy="382219"/>
           </a:xfrm>
           <a:prstGeom prst="rect">
             <a:avLst/>
@@ -2835,8 +2835,8 @@
         </p:nvSpPr>
         <p:spPr>
           <a:xfrm>
-            <a:off x="4023360" y="3593592"/>
-            <a:ext cx="54864" cy="274320"/>
+            <a:off x="4023360" y="3732581"/>
+            <a:ext cx="54864" cy="309067"/>
           </a:xfrm>
           <a:prstGeom prst="rect">
             <a:avLst/>
@@ -2855,7 +2855,7 @@
         </p:nvSpPr>
         <p:spPr>
           <a:xfrm>
-            <a:off x="621792" y="4270248"/>
+            <a:off x="621792" y="4096512"/>
             <a:ext cx="3355848" cy="22860"/>
           </a:xfrm>
           <a:prstGeom prst="rect">
@@ -2875,7 +2875,7 @@
         </p:nvSpPr>
         <p:spPr>
           <a:xfrm>
-            <a:off x="621792" y="4297680"/>
+            <a:off x="621792" y="4123944"/>
             <a:ext cx="1828800" cy="219456"/>
           </a:xfrm>
           <a:prstGeom prst="rect">
@@ -2914,7 +2914,7 @@
         </p:nvSpPr>
         <p:spPr>
           <a:xfrm>
-            <a:off x="2313432" y="4297680"/>
+            <a:off x="2313432" y="4123944"/>
             <a:ext cx="731520" cy="219456"/>
           </a:xfrm>
           <a:prstGeom prst="rect">
@@ -2953,7 +2953,7 @@
         </p:nvSpPr>
         <p:spPr>
           <a:xfrm>
-            <a:off x="3063240" y="4297680"/>
+            <a:off x="3063240" y="4123944"/>
             <a:ext cx="914400" cy="219456"/>
           </a:xfrm>
           <a:prstGeom prst="rect">
@@ -2992,8 +2992,8 @@
         </p:nvSpPr>
         <p:spPr>
           <a:xfrm>
-            <a:off x="621792" y="4526280"/>
-            <a:ext cx="1673352" cy="347472"/>
+            <a:off x="621792" y="4352544"/>
+            <a:ext cx="1673352" cy="382219"/>
           </a:xfrm>
           <a:prstGeom prst="rect">
             <a:avLst/>
@@ -3031,8 +3031,8 @@
         </p:nvSpPr>
         <p:spPr>
           <a:xfrm>
-            <a:off x="2313432" y="4526280"/>
-            <a:ext cx="731520" cy="347472"/>
+            <a:off x="2313432" y="4352544"/>
+            <a:ext cx="731520" cy="382219"/>
           </a:xfrm>
           <a:prstGeom prst="rect">
             <a:avLst/>
@@ -3070,8 +3070,8 @@
         </p:nvSpPr>
         <p:spPr>
           <a:xfrm>
-            <a:off x="3063240" y="4526280"/>
-            <a:ext cx="914400" cy="347472"/>
+            <a:off x="3063240" y="4352544"/>
+            <a:ext cx="914400" cy="382219"/>
           </a:xfrm>
           <a:prstGeom prst="rect">
             <a:avLst/>
@@ -3109,8 +3109,8 @@
         </p:nvSpPr>
         <p:spPr>
           <a:xfrm>
-            <a:off x="4023360" y="4562856"/>
-            <a:ext cx="54864" cy="274320"/>
+            <a:off x="4023360" y="4389120"/>
+            <a:ext cx="54864" cy="309067"/>
           </a:xfrm>
           <a:prstGeom prst="rect">
             <a:avLst/>
@@ -3129,8 +3129,8 @@
         </p:nvSpPr>
         <p:spPr>
           <a:xfrm>
-            <a:off x="621792" y="4873752"/>
-            <a:ext cx="1673352" cy="347472"/>
+            <a:off x="621792" y="4734763"/>
+            <a:ext cx="1673352" cy="382219"/>
           </a:xfrm>
           <a:prstGeom prst="rect">
             <a:avLst/>
@@ -3168,8 +3168,8 @@
         </p:nvSpPr>
         <p:spPr>
           <a:xfrm>
-            <a:off x="2313432" y="4873752"/>
-            <a:ext cx="731520" cy="347472"/>
+            <a:off x="2313432" y="4734763"/>
+            <a:ext cx="731520" cy="382219"/>
           </a:xfrm>
           <a:prstGeom prst="rect">
             <a:avLst/>
@@ -3207,8 +3207,8 @@
         </p:nvSpPr>
         <p:spPr>
           <a:xfrm>
-            <a:off x="3063240" y="4873752"/>
-            <a:ext cx="914400" cy="347472"/>
+            <a:off x="3063240" y="4734763"/>
+            <a:ext cx="914400" cy="382219"/>
           </a:xfrm>
           <a:prstGeom prst="rect">
             <a:avLst/>
@@ -3246,8 +3246,8 @@
         </p:nvSpPr>
         <p:spPr>
           <a:xfrm>
-            <a:off x="4023360" y="4910328"/>
-            <a:ext cx="54864" cy="274320"/>
+            <a:off x="4023360" y="4771339"/>
+            <a:ext cx="54864" cy="309067"/>
           </a:xfrm>
           <a:prstGeom prst="rect">
             <a:avLst/>
@@ -3266,8 +3266,8 @@
         </p:nvSpPr>
         <p:spPr>
           <a:xfrm>
-            <a:off x="621792" y="5221224"/>
-            <a:ext cx="1673352" cy="347472"/>
+            <a:off x="621792" y="5116982"/>
+            <a:ext cx="1673352" cy="382219"/>
           </a:xfrm>
           <a:prstGeom prst="rect">
             <a:avLst/>
@@ -3305,8 +3305,8 @@
         </p:nvSpPr>
         <p:spPr>
           <a:xfrm>
-            <a:off x="2313432" y="5221224"/>
-            <a:ext cx="731520" cy="347472"/>
+            <a:off x="2313432" y="5116982"/>
+            <a:ext cx="731520" cy="382219"/>
           </a:xfrm>
           <a:prstGeom prst="rect">
             <a:avLst/>
@@ -3344,8 +3344,8 @@
         </p:nvSpPr>
         <p:spPr>
           <a:xfrm>
-            <a:off x="3063240" y="5221224"/>
-            <a:ext cx="914400" cy="347472"/>
+            <a:off x="3063240" y="5116982"/>
+            <a:ext cx="914400" cy="382219"/>
           </a:xfrm>
           <a:prstGeom prst="rect">
             <a:avLst/>
@@ -3383,8 +3383,8 @@
         </p:nvSpPr>
         <p:spPr>
           <a:xfrm>
-            <a:off x="621792" y="5568696"/>
-            <a:ext cx="1673352" cy="347472"/>
+            <a:off x="621792" y="5499202"/>
+            <a:ext cx="1673352" cy="382219"/>
           </a:xfrm>
           <a:prstGeom prst="rect">
             <a:avLst/>
@@ -3422,8 +3422,8 @@
         </p:nvSpPr>
         <p:spPr>
           <a:xfrm>
-            <a:off x="2313432" y="5568696"/>
-            <a:ext cx="731520" cy="347472"/>
+            <a:off x="2313432" y="5499202"/>
+            <a:ext cx="731520" cy="382219"/>
           </a:xfrm>
           <a:prstGeom prst="rect">
             <a:avLst/>
@@ -3461,8 +3461,8 @@
         </p:nvSpPr>
         <p:spPr>
           <a:xfrm>
-            <a:off x="3063240" y="5568696"/>
-            <a:ext cx="914400" cy="347472"/>
+            <a:off x="3063240" y="5499202"/>
+            <a:ext cx="914400" cy="382219"/>
           </a:xfrm>
           <a:prstGeom prst="rect">
             <a:avLst/>
@@ -3500,8 +3500,8 @@
         </p:nvSpPr>
         <p:spPr>
           <a:xfrm>
-            <a:off x="4023360" y="5605272"/>
-            <a:ext cx="54864" cy="274320"/>
+            <a:off x="4023360" y="5535778"/>
+            <a:ext cx="54864" cy="309067"/>
           </a:xfrm>
           <a:prstGeom prst="rect">
             <a:avLst/>
@@ -3520,8 +3520,8 @@
         </p:nvSpPr>
         <p:spPr>
           <a:xfrm>
-            <a:off x="621792" y="5916168"/>
-            <a:ext cx="1673352" cy="347472"/>
+            <a:off x="621792" y="5881421"/>
+            <a:ext cx="1673352" cy="382219"/>
           </a:xfrm>
           <a:prstGeom prst="rect">
             <a:avLst/>
@@ -3559,8 +3559,8 @@
         </p:nvSpPr>
         <p:spPr>
           <a:xfrm>
-            <a:off x="2313432" y="5916168"/>
-            <a:ext cx="731520" cy="347472"/>
+            <a:off x="2313432" y="5881421"/>
+            <a:ext cx="731520" cy="382219"/>
           </a:xfrm>
           <a:prstGeom prst="rect">
             <a:avLst/>
@@ -3598,8 +3598,8 @@
         </p:nvSpPr>
         <p:spPr>
           <a:xfrm>
-            <a:off x="3063240" y="5916168"/>
-            <a:ext cx="914400" cy="347472"/>
+            <a:off x="3063240" y="5881421"/>
+            <a:ext cx="914400" cy="382219"/>
           </a:xfrm>
           <a:prstGeom prst="rect">
             <a:avLst/>
@@ -3637,8 +3637,8 @@
         </p:nvSpPr>
         <p:spPr>
           <a:xfrm>
-            <a:off x="4023360" y="5952744"/>
-            <a:ext cx="54864" cy="274320"/>
+            <a:off x="4023360" y="5917997"/>
+            <a:ext cx="54864" cy="309067"/>
           </a:xfrm>
           <a:prstGeom prst="rect">
             <a:avLst/>
@@ -3893,7 +3893,7 @@
         <p:spPr>
           <a:xfrm>
             <a:off x="4416552" y="2167128"/>
-            <a:ext cx="1673352" cy="347472"/>
+            <a:ext cx="1673352" cy="382219"/>
           </a:xfrm>
           <a:prstGeom prst="rect">
             <a:avLst/>
@@ -3932,7 +3932,7 @@
         <p:spPr>
           <a:xfrm>
             <a:off x="6108192" y="2167128"/>
-            <a:ext cx="731520" cy="347472"/>
+            <a:ext cx="731520" cy="382219"/>
           </a:xfrm>
           <a:prstGeom prst="rect">
             <a:avLst/>
@@ -3971,7 +3971,7 @@
         <p:spPr>
           <a:xfrm>
             <a:off x="6858000" y="2167128"/>
-            <a:ext cx="914400" cy="347472"/>
+            <a:ext cx="914400" cy="382219"/>
           </a:xfrm>
           <a:prstGeom prst="rect">
             <a:avLst/>
@@ -4010,7 +4010,7 @@
         <p:spPr>
           <a:xfrm>
             <a:off x="7818120" y="2203704"/>
-            <a:ext cx="54864" cy="274320"/>
+            <a:ext cx="54864" cy="309067"/>
           </a:xfrm>
           <a:prstGeom prst="rect">
             <a:avLst/>
@@ -4029,8 +4029,8 @@
         </p:nvSpPr>
         <p:spPr>
           <a:xfrm>
-            <a:off x="4416552" y="2514600"/>
-            <a:ext cx="1673352" cy="347472"/>
+            <a:off x="4416552" y="2549347"/>
+            <a:ext cx="1673352" cy="382219"/>
           </a:xfrm>
           <a:prstGeom prst="rect">
             <a:avLst/>
@@ -4068,8 +4068,8 @@
         </p:nvSpPr>
         <p:spPr>
           <a:xfrm>
-            <a:off x="6108192" y="2514600"/>
-            <a:ext cx="731520" cy="347472"/>
+            <a:off x="6108192" y="2549347"/>
+            <a:ext cx="731520" cy="382219"/>
           </a:xfrm>
           <a:prstGeom prst="rect">
             <a:avLst/>
@@ -4107,8 +4107,8 @@
         </p:nvSpPr>
         <p:spPr>
           <a:xfrm>
-            <a:off x="6858000" y="2514600"/>
-            <a:ext cx="914400" cy="347472"/>
+            <a:off x="6858000" y="2549347"/>
+            <a:ext cx="914400" cy="382219"/>
           </a:xfrm>
           <a:prstGeom prst="rect">
             <a:avLst/>
@@ -4146,8 +4146,8 @@
         </p:nvSpPr>
         <p:spPr>
           <a:xfrm>
-            <a:off x="7818120" y="2551176"/>
-            <a:ext cx="54864" cy="274320"/>
+            <a:off x="7818120" y="2585923"/>
+            <a:ext cx="54864" cy="309067"/>
           </a:xfrm>
           <a:prstGeom prst="rect">
             <a:avLst/>
@@ -4166,8 +4166,8 @@
         </p:nvSpPr>
         <p:spPr>
           <a:xfrm>
-            <a:off x="4416552" y="2862072"/>
-            <a:ext cx="1673352" cy="347472"/>
+            <a:off x="4416552" y="2931566"/>
+            <a:ext cx="1673352" cy="382219"/>
           </a:xfrm>
           <a:prstGeom prst="rect">
             <a:avLst/>
@@ -4205,8 +4205,8 @@
         </p:nvSpPr>
         <p:spPr>
           <a:xfrm>
-            <a:off x="6108192" y="2862072"/>
-            <a:ext cx="731520" cy="347472"/>
+            <a:off x="6108192" y="2931566"/>
+            <a:ext cx="731520" cy="382219"/>
           </a:xfrm>
           <a:prstGeom prst="rect">
             <a:avLst/>
@@ -4244,8 +4244,8 @@
         </p:nvSpPr>
         <p:spPr>
           <a:xfrm>
-            <a:off x="6858000" y="2862072"/>
-            <a:ext cx="914400" cy="347472"/>
+            <a:off x="6858000" y="2931566"/>
+            <a:ext cx="914400" cy="382219"/>
           </a:xfrm>
           <a:prstGeom prst="rect">
             <a:avLst/>
@@ -4283,8 +4283,8 @@
         </p:nvSpPr>
         <p:spPr>
           <a:xfrm>
-            <a:off x="7818120" y="2898648"/>
-            <a:ext cx="54864" cy="274320"/>
+            <a:off x="7818120" y="2968142"/>
+            <a:ext cx="54864" cy="309067"/>
           </a:xfrm>
           <a:prstGeom prst="rect">
             <a:avLst/>
@@ -4303,8 +4303,8 @@
         </p:nvSpPr>
         <p:spPr>
           <a:xfrm>
-            <a:off x="4416552" y="3209544"/>
-            <a:ext cx="1673352" cy="347472"/>
+            <a:off x="4416552" y="3313786"/>
+            <a:ext cx="1673352" cy="382219"/>
           </a:xfrm>
           <a:prstGeom prst="rect">
             <a:avLst/>
@@ -4342,8 +4342,8 @@
         </p:nvSpPr>
         <p:spPr>
           <a:xfrm>
-            <a:off x="6108192" y="3209544"/>
-            <a:ext cx="731520" cy="347472"/>
+            <a:off x="6108192" y="3313786"/>
+            <a:ext cx="731520" cy="382219"/>
           </a:xfrm>
           <a:prstGeom prst="rect">
             <a:avLst/>
@@ -4381,8 +4381,8 @@
         </p:nvSpPr>
         <p:spPr>
           <a:xfrm>
-            <a:off x="6858000" y="3209544"/>
-            <a:ext cx="914400" cy="347472"/>
+            <a:off x="6858000" y="3313786"/>
+            <a:ext cx="914400" cy="382219"/>
           </a:xfrm>
           <a:prstGeom prst="rect">
             <a:avLst/>
@@ -4420,8 +4420,8 @@
         </p:nvSpPr>
         <p:spPr>
           <a:xfrm>
-            <a:off x="7818120" y="3246120"/>
-            <a:ext cx="54864" cy="274320"/>
+            <a:off x="7818120" y="3350362"/>
+            <a:ext cx="54864" cy="309067"/>
           </a:xfrm>
           <a:prstGeom prst="rect">
             <a:avLst/>
@@ -4440,8 +4440,8 @@
         </p:nvSpPr>
         <p:spPr>
           <a:xfrm>
-            <a:off x="4416552" y="3557016"/>
-            <a:ext cx="1673352" cy="347472"/>
+            <a:off x="4416552" y="3696005"/>
+            <a:ext cx="1673352" cy="382219"/>
           </a:xfrm>
           <a:prstGeom prst="rect">
             <a:avLst/>
@@ -4479,8 +4479,8 @@
         </p:nvSpPr>
         <p:spPr>
           <a:xfrm>
-            <a:off x="6108192" y="3557016"/>
-            <a:ext cx="731520" cy="347472"/>
+            <a:off x="6108192" y="3696005"/>
+            <a:ext cx="731520" cy="382219"/>
           </a:xfrm>
           <a:prstGeom prst="rect">
             <a:avLst/>
@@ -4518,8 +4518,8 @@
         </p:nvSpPr>
         <p:spPr>
           <a:xfrm>
-            <a:off x="6858000" y="3557016"/>
-            <a:ext cx="914400" cy="347472"/>
+            <a:off x="6858000" y="3696005"/>
+            <a:ext cx="914400" cy="382219"/>
           </a:xfrm>
           <a:prstGeom prst="rect">
             <a:avLst/>
@@ -4557,7 +4557,7 @@
         </p:nvSpPr>
         <p:spPr>
           <a:xfrm>
-            <a:off x="4416552" y="4270248"/>
+            <a:off x="4416552" y="4096512"/>
             <a:ext cx="3355848" cy="22860"/>
           </a:xfrm>
           <a:prstGeom prst="rect">
@@ -4577,7 +4577,7 @@
         </p:nvSpPr>
         <p:spPr>
           <a:xfrm>
-            <a:off x="4416552" y="4297680"/>
+            <a:off x="4416552" y="4123944"/>
             <a:ext cx="1828800" cy="219456"/>
           </a:xfrm>
           <a:prstGeom prst="rect">
@@ -4616,7 +4616,7 @@
         </p:nvSpPr>
         <p:spPr>
           <a:xfrm>
-            <a:off x="6108192" y="4297680"/>
+            <a:off x="6108192" y="4123944"/>
             <a:ext cx="731520" cy="219456"/>
           </a:xfrm>
           <a:prstGeom prst="rect">
@@ -4655,7 +4655,7 @@
         </p:nvSpPr>
         <p:spPr>
           <a:xfrm>
-            <a:off x="6858000" y="4297680"/>
+            <a:off x="6858000" y="4123944"/>
             <a:ext cx="914400" cy="219456"/>
           </a:xfrm>
           <a:prstGeom prst="rect">
@@ -4694,8 +4694,8 @@
         </p:nvSpPr>
         <p:spPr>
           <a:xfrm>
-            <a:off x="4416552" y="4526280"/>
-            <a:ext cx="1673352" cy="347472"/>
+            <a:off x="4416552" y="4352544"/>
+            <a:ext cx="1673352" cy="382219"/>
           </a:xfrm>
           <a:prstGeom prst="rect">
             <a:avLst/>
@@ -4733,8 +4733,8 @@
         </p:nvSpPr>
         <p:spPr>
           <a:xfrm>
-            <a:off x="6108192" y="4526280"/>
-            <a:ext cx="731520" cy="347472"/>
+            <a:off x="6108192" y="4352544"/>
+            <a:ext cx="731520" cy="382219"/>
           </a:xfrm>
           <a:prstGeom prst="rect">
             <a:avLst/>
@@ -4772,8 +4772,8 @@
         </p:nvSpPr>
         <p:spPr>
           <a:xfrm>
-            <a:off x="6858000" y="4526280"/>
-            <a:ext cx="914400" cy="347472"/>
+            <a:off x="6858000" y="4352544"/>
+            <a:ext cx="914400" cy="382219"/>
           </a:xfrm>
           <a:prstGeom prst="rect">
             <a:avLst/>
@@ -4811,8 +4811,8 @@
         </p:nvSpPr>
         <p:spPr>
           <a:xfrm>
-            <a:off x="7818120" y="4562856"/>
-            <a:ext cx="54864" cy="274320"/>
+            <a:off x="7818120" y="4389120"/>
+            <a:ext cx="54864" cy="309067"/>
           </a:xfrm>
           <a:prstGeom prst="rect">
             <a:avLst/>
@@ -4831,8 +4831,8 @@
         </p:nvSpPr>
         <p:spPr>
           <a:xfrm>
-            <a:off x="4416552" y="4873752"/>
-            <a:ext cx="1673352" cy="347472"/>
+            <a:off x="4416552" y="4734763"/>
+            <a:ext cx="1673352" cy="382219"/>
           </a:xfrm>
           <a:prstGeom prst="rect">
             <a:avLst/>
@@ -4870,8 +4870,8 @@
         </p:nvSpPr>
         <p:spPr>
           <a:xfrm>
-            <a:off x="6108192" y="4873752"/>
-            <a:ext cx="731520" cy="347472"/>
+            <a:off x="6108192" y="4734763"/>
+            <a:ext cx="731520" cy="382219"/>
           </a:xfrm>
           <a:prstGeom prst="rect">
             <a:avLst/>
@@ -4909,8 +4909,8 @@
         </p:nvSpPr>
         <p:spPr>
           <a:xfrm>
-            <a:off x="6858000" y="4873752"/>
-            <a:ext cx="914400" cy="347472"/>
+            <a:off x="6858000" y="4734763"/>
+            <a:ext cx="914400" cy="382219"/>
           </a:xfrm>
           <a:prstGeom prst="rect">
             <a:avLst/>
@@ -4948,8 +4948,8 @@
         </p:nvSpPr>
         <p:spPr>
           <a:xfrm>
-            <a:off x="4416552" y="5221224"/>
-            <a:ext cx="1673352" cy="347472"/>
+            <a:off x="4416552" y="5116982"/>
+            <a:ext cx="1673352" cy="382219"/>
           </a:xfrm>
           <a:prstGeom prst="rect">
             <a:avLst/>
@@ -4987,8 +4987,8 @@
         </p:nvSpPr>
         <p:spPr>
           <a:xfrm>
-            <a:off x="6108192" y="5221224"/>
-            <a:ext cx="731520" cy="347472"/>
+            <a:off x="6108192" y="5116982"/>
+            <a:ext cx="731520" cy="382219"/>
           </a:xfrm>
           <a:prstGeom prst="rect">
             <a:avLst/>
@@ -5026,8 +5026,8 @@
         </p:nvSpPr>
         <p:spPr>
           <a:xfrm>
-            <a:off x="6858000" y="5221224"/>
-            <a:ext cx="914400" cy="347472"/>
+            <a:off x="6858000" y="5116982"/>
+            <a:ext cx="914400" cy="382219"/>
           </a:xfrm>
           <a:prstGeom prst="rect">
             <a:avLst/>
@@ -5065,8 +5065,8 @@
         </p:nvSpPr>
         <p:spPr>
           <a:xfrm>
-            <a:off x="4416552" y="5568696"/>
-            <a:ext cx="1673352" cy="347472"/>
+            <a:off x="4416552" y="5499202"/>
+            <a:ext cx="1673352" cy="382219"/>
           </a:xfrm>
           <a:prstGeom prst="rect">
             <a:avLst/>
@@ -5104,8 +5104,8 @@
         </p:nvSpPr>
         <p:spPr>
           <a:xfrm>
-            <a:off x="6108192" y="5568696"/>
-            <a:ext cx="731520" cy="347472"/>
+            <a:off x="6108192" y="5499202"/>
+            <a:ext cx="731520" cy="382219"/>
           </a:xfrm>
           <a:prstGeom prst="rect">
             <a:avLst/>
@@ -5143,8 +5143,8 @@
         </p:nvSpPr>
         <p:spPr>
           <a:xfrm>
-            <a:off x="6858000" y="5568696"/>
-            <a:ext cx="914400" cy="347472"/>
+            <a:off x="6858000" y="5499202"/>
+            <a:ext cx="914400" cy="382219"/>
           </a:xfrm>
           <a:prstGeom prst="rect">
             <a:avLst/>
@@ -5182,8 +5182,8 @@
         </p:nvSpPr>
         <p:spPr>
           <a:xfrm>
-            <a:off x="7818120" y="5605272"/>
-            <a:ext cx="54864" cy="274320"/>
+            <a:off x="7818120" y="5535778"/>
+            <a:ext cx="54864" cy="309067"/>
           </a:xfrm>
           <a:prstGeom prst="rect">
             <a:avLst/>
@@ -5202,8 +5202,8 @@
         </p:nvSpPr>
         <p:spPr>
           <a:xfrm>
-            <a:off x="4416552" y="5916168"/>
-            <a:ext cx="1673352" cy="347472"/>
+            <a:off x="4416552" y="5881421"/>
+            <a:ext cx="1673352" cy="382219"/>
           </a:xfrm>
           <a:prstGeom prst="rect">
             <a:avLst/>
@@ -5241,8 +5241,8 @@
         </p:nvSpPr>
         <p:spPr>
           <a:xfrm>
-            <a:off x="6108192" y="5916168"/>
-            <a:ext cx="731520" cy="347472"/>
+            <a:off x="6108192" y="5881421"/>
+            <a:ext cx="731520" cy="382219"/>
           </a:xfrm>
           <a:prstGeom prst="rect">
             <a:avLst/>
@@ -5280,8 +5280,8 @@
         </p:nvSpPr>
         <p:spPr>
           <a:xfrm>
-            <a:off x="6858000" y="5916168"/>
-            <a:ext cx="914400" cy="347472"/>
+            <a:off x="6858000" y="5881421"/>
+            <a:ext cx="914400" cy="382219"/>
           </a:xfrm>
           <a:prstGeom prst="rect">
             <a:avLst/>
@@ -5319,8 +5319,8 @@
         </p:nvSpPr>
         <p:spPr>
           <a:xfrm>
-            <a:off x="7818120" y="5952744"/>
-            <a:ext cx="54864" cy="274320"/>
+            <a:off x="7818120" y="5917997"/>
+            <a:ext cx="54864" cy="309067"/>
           </a:xfrm>
           <a:prstGeom prst="rect">
             <a:avLst/>
@@ -5482,7 +5482,7 @@
                 <a:ea typeface="Inter" pitchFamily="34" charset="-122"/>
                 <a:cs typeface="Inter" pitchFamily="34" charset="-120"/>
               </a:rPr>
-              <a:t>AT 100%</a:t>
+              <a:t>TOP 5</a:t>
             </a:r>
             <a:endParaRPr lang="en-US" sz="1400" dirty="0"/>
           </a:p>
@@ -5575,7 +5575,7 @@
         <p:spPr>
           <a:xfrm>
             <a:off x="8211312" y="2167128"/>
-            <a:ext cx="1673352" cy="347472"/>
+            <a:ext cx="1673352" cy="382219"/>
           </a:xfrm>
           <a:prstGeom prst="rect">
             <a:avLst/>
@@ -5614,7 +5614,7 @@
         <p:spPr>
           <a:xfrm>
             <a:off x="9902952" y="2167128"/>
-            <a:ext cx="731520" cy="347472"/>
+            <a:ext cx="731520" cy="382219"/>
           </a:xfrm>
           <a:prstGeom prst="rect">
             <a:avLst/>
@@ -5653,7 +5653,7 @@
         <p:spPr>
           <a:xfrm>
             <a:off x="10652760" y="2167128"/>
-            <a:ext cx="914400" cy="347472"/>
+            <a:ext cx="914400" cy="382219"/>
           </a:xfrm>
           <a:prstGeom prst="rect">
             <a:avLst/>
@@ -5691,8 +5691,8 @@
         </p:nvSpPr>
         <p:spPr>
           <a:xfrm>
-            <a:off x="8211312" y="2514600"/>
-            <a:ext cx="1673352" cy="347472"/>
+            <a:off x="8211312" y="2549347"/>
+            <a:ext cx="1673352" cy="382219"/>
           </a:xfrm>
           <a:prstGeom prst="rect">
             <a:avLst/>
@@ -5730,8 +5730,8 @@
         </p:nvSpPr>
         <p:spPr>
           <a:xfrm>
-            <a:off x="9902952" y="2514600"/>
-            <a:ext cx="731520" cy="347472"/>
+            <a:off x="9902952" y="2549347"/>
+            <a:ext cx="731520" cy="382219"/>
           </a:xfrm>
           <a:prstGeom prst="rect">
             <a:avLst/>
@@ -5769,8 +5769,8 @@
         </p:nvSpPr>
         <p:spPr>
           <a:xfrm>
-            <a:off x="10652760" y="2514600"/>
-            <a:ext cx="914400" cy="347472"/>
+            <a:off x="10652760" y="2549347"/>
+            <a:ext cx="914400" cy="382219"/>
           </a:xfrm>
           <a:prstGeom prst="rect">
             <a:avLst/>
@@ -5808,8 +5808,8 @@
         </p:nvSpPr>
         <p:spPr>
           <a:xfrm>
-            <a:off x="8211312" y="2862072"/>
-            <a:ext cx="1673352" cy="347472"/>
+            <a:off x="8211312" y="2931566"/>
+            <a:ext cx="1673352" cy="382219"/>
           </a:xfrm>
           <a:prstGeom prst="rect">
             <a:avLst/>
@@ -5847,8 +5847,8 @@
         </p:nvSpPr>
         <p:spPr>
           <a:xfrm>
-            <a:off x="9902952" y="2862072"/>
-            <a:ext cx="731520" cy="347472"/>
+            <a:off x="9902952" y="2931566"/>
+            <a:ext cx="731520" cy="382219"/>
           </a:xfrm>
           <a:prstGeom prst="rect">
             <a:avLst/>
@@ -5886,8 +5886,8 @@
         </p:nvSpPr>
         <p:spPr>
           <a:xfrm>
-            <a:off x="10652760" y="2862072"/>
-            <a:ext cx="914400" cy="347472"/>
+            <a:off x="10652760" y="2931566"/>
+            <a:ext cx="914400" cy="382219"/>
           </a:xfrm>
           <a:prstGeom prst="rect">
             <a:avLst/>
@@ -5925,8 +5925,8 @@
         </p:nvSpPr>
         <p:spPr>
           <a:xfrm>
-            <a:off x="8211312" y="3209544"/>
-            <a:ext cx="1673352" cy="347472"/>
+            <a:off x="8211312" y="3313786"/>
+            <a:ext cx="1673352" cy="382219"/>
           </a:xfrm>
           <a:prstGeom prst="rect">
             <a:avLst/>
@@ -5964,8 +5964,8 @@
         </p:nvSpPr>
         <p:spPr>
           <a:xfrm>
-            <a:off x="9902952" y="3209544"/>
-            <a:ext cx="731520" cy="347472"/>
+            <a:off x="9902952" y="3313786"/>
+            <a:ext cx="731520" cy="382219"/>
           </a:xfrm>
           <a:prstGeom prst="rect">
             <a:avLst/>
@@ -6003,8 +6003,8 @@
         </p:nvSpPr>
         <p:spPr>
           <a:xfrm>
-            <a:off x="10652760" y="3209544"/>
-            <a:ext cx="914400" cy="347472"/>
+            <a:off x="10652760" y="3313786"/>
+            <a:ext cx="914400" cy="382219"/>
           </a:xfrm>
           <a:prstGeom prst="rect">
             <a:avLst/>
@@ -6042,8 +6042,8 @@
         </p:nvSpPr>
         <p:spPr>
           <a:xfrm>
-            <a:off x="8211312" y="3557016"/>
-            <a:ext cx="1673352" cy="347472"/>
+            <a:off x="8211312" y="3696005"/>
+            <a:ext cx="1673352" cy="382219"/>
           </a:xfrm>
           <a:prstGeom prst="rect">
             <a:avLst/>
@@ -6081,8 +6081,8 @@
         </p:nvSpPr>
         <p:spPr>
           <a:xfrm>
-            <a:off x="9902952" y="3557016"/>
-            <a:ext cx="731520" cy="347472"/>
+            <a:off x="9902952" y="3696005"/>
+            <a:ext cx="731520" cy="382219"/>
           </a:xfrm>
           <a:prstGeom prst="rect">
             <a:avLst/>
@@ -6120,8 +6120,8 @@
         </p:nvSpPr>
         <p:spPr>
           <a:xfrm>
-            <a:off x="10652760" y="3557016"/>
-            <a:ext cx="914400" cy="347472"/>
+            <a:off x="10652760" y="3696005"/>
+            <a:ext cx="914400" cy="382219"/>
           </a:xfrm>
           <a:prstGeom prst="rect">
             <a:avLst/>
@@ -6153,130 +6153,13 @@
       </p:sp>
       <p:sp>
         <p:nvSpPr>
-          <p:cNvPr id="124" name="Text 122"/>
-          <p:cNvSpPr txBox="1"/>
-          <p:nvPr/>
-        </p:nvSpPr>
-        <p:spPr>
-          <a:xfrm>
-            <a:off x="8211312" y="3904488"/>
-            <a:ext cx="1673352" cy="347472"/>
-          </a:xfrm>
-          <a:prstGeom prst="rect">
-            <a:avLst/>
-          </a:prstGeom>
-          <a:noFill/>
-          <a:ln/>
-        </p:spPr>
-        <p:txBody>
-          <a:bodyPr wrap="square" lIns="0" tIns="0" rIns="0" bIns="0" rtlCol="0" anchor="ctr"/>
-          <a:lstStyle/>
-          <a:p>
-            <a:pPr indent="0" marL="0">
-              <a:buNone/>
-            </a:pPr>
-            <a:r>
-              <a:rPr lang="en-US" sz="1300" dirty="0">
-                <a:solidFill>
-                  <a:srgbClr val="1A1A1A"/>
-                </a:solidFill>
-                <a:latin typeface="Inter" pitchFamily="34" charset="0"/>
-                <a:ea typeface="Inter" pitchFamily="34" charset="-122"/>
-                <a:cs typeface="Inter" pitchFamily="34" charset="-120"/>
-              </a:rPr>
-              <a:t>Acura</a:t>
-            </a:r>
-            <a:endParaRPr lang="en-US" sz="1300" dirty="0"/>
-          </a:p>
-        </p:txBody>
-      </p:sp>
-      <p:sp>
-        <p:nvSpPr>
-          <p:cNvPr id="125" name="Text 123"/>
-          <p:cNvSpPr txBox="1"/>
-          <p:nvPr/>
-        </p:nvSpPr>
-        <p:spPr>
-          <a:xfrm>
-            <a:off x="9902952" y="3904488"/>
-            <a:ext cx="731520" cy="347472"/>
-          </a:xfrm>
-          <a:prstGeom prst="rect">
-            <a:avLst/>
-          </a:prstGeom>
-          <a:noFill/>
-          <a:ln/>
-        </p:spPr>
-        <p:txBody>
-          <a:bodyPr wrap="square" lIns="0" tIns="0" rIns="0" bIns="0" rtlCol="0" anchor="ctr"/>
-          <a:lstStyle/>
-          <a:p>
-            <a:pPr algn="r" indent="0" marL="0">
-              <a:buNone/>
-            </a:pPr>
-            <a:r>
-              <a:rPr lang="en-US" sz="1300" b="1" dirty="0">
-                <a:solidFill>
-                  <a:srgbClr val="0B7A4A"/>
-                </a:solidFill>
-                <a:latin typeface="Inter" pitchFamily="34" charset="0"/>
-                <a:ea typeface="Inter" pitchFamily="34" charset="-122"/>
-                <a:cs typeface="Inter" pitchFamily="34" charset="-120"/>
-              </a:rPr>
-              <a:t>100.0%</a:t>
-            </a:r>
-            <a:endParaRPr lang="en-US" sz="1300" dirty="0"/>
-          </a:p>
-        </p:txBody>
-      </p:sp>
-      <p:sp>
-        <p:nvSpPr>
-          <p:cNvPr id="126" name="Text 124"/>
-          <p:cNvSpPr txBox="1"/>
-          <p:nvPr/>
-        </p:nvSpPr>
-        <p:spPr>
-          <a:xfrm>
-            <a:off x="10652760" y="3904488"/>
-            <a:ext cx="914400" cy="347472"/>
-          </a:xfrm>
-          <a:prstGeom prst="rect">
-            <a:avLst/>
-          </a:prstGeom>
-          <a:noFill/>
-          <a:ln/>
-        </p:spPr>
-        <p:txBody>
-          <a:bodyPr wrap="square" lIns="0" tIns="0" rIns="0" bIns="0" rtlCol="0" anchor="ctr"/>
-          <a:lstStyle/>
-          <a:p>
-            <a:pPr algn="r" indent="0" marL="0">
-              <a:buNone/>
-            </a:pPr>
-            <a:r>
-              <a:rPr lang="en-US" sz="1200" dirty="0">
-                <a:solidFill>
-                  <a:srgbClr val="595959"/>
-                </a:solidFill>
-                <a:latin typeface="Inter" pitchFamily="34" charset="0"/>
-                <a:ea typeface="Inter" pitchFamily="34" charset="-122"/>
-                <a:cs typeface="Inter" pitchFamily="34" charset="-120"/>
-              </a:rPr>
-              <a:t>376</a:t>
-            </a:r>
-            <a:endParaRPr lang="en-US" sz="1200" dirty="0"/>
-          </a:p>
-        </p:txBody>
-      </p:sp>
-      <p:sp>
-        <p:nvSpPr>
-          <p:cNvPr id="127" name="Shape 125"/>
+          <p:cNvPr id="124" name="Shape 122"/>
           <p:cNvSpPr/>
           <p:nvPr/>
         </p:nvSpPr>
         <p:spPr>
           <a:xfrm>
-            <a:off x="8211312" y="4270248"/>
+            <a:off x="8211312" y="4096512"/>
             <a:ext cx="3355848" cy="22860"/>
           </a:xfrm>
           <a:prstGeom prst="rect">
@@ -6290,14 +6173,131 @@
       </p:sp>
       <p:sp>
         <p:nvSpPr>
+          <p:cNvPr id="125" name="Text 123"/>
+          <p:cNvSpPr txBox="1"/>
+          <p:nvPr/>
+        </p:nvSpPr>
+        <p:spPr>
+          <a:xfrm>
+            <a:off x="8211312" y="4123944"/>
+            <a:ext cx="1828800" cy="219456"/>
+          </a:xfrm>
+          <a:prstGeom prst="rect">
+            <a:avLst/>
+          </a:prstGeom>
+          <a:noFill/>
+          <a:ln/>
+        </p:spPr>
+        <p:txBody>
+          <a:bodyPr wrap="square" lIns="0" tIns="0" rIns="0" bIns="0" rtlCol="0" anchor="ctr"/>
+          <a:lstStyle/>
+          <a:p>
+            <a:pPr indent="0" marL="0">
+              <a:buNone/>
+            </a:pPr>
+            <a:r>
+              <a:rPr lang="en-US" sz="1400" b="1" dirty="0">
+                <a:solidFill>
+                  <a:srgbClr val="A82B26"/>
+                </a:solidFill>
+                <a:latin typeface="Inter" pitchFamily="34" charset="0"/>
+                <a:ea typeface="Inter" pitchFamily="34" charset="-122"/>
+                <a:cs typeface="Inter" pitchFamily="34" charset="-120"/>
+              </a:rPr>
+              <a:t>BOTTOM 5</a:t>
+            </a:r>
+            <a:endParaRPr lang="en-US" sz="1400" dirty="0"/>
+          </a:p>
+        </p:txBody>
+      </p:sp>
+      <p:sp>
+        <p:nvSpPr>
+          <p:cNvPr id="126" name="Text 124"/>
+          <p:cNvSpPr txBox="1"/>
+          <p:nvPr/>
+        </p:nvSpPr>
+        <p:spPr>
+          <a:xfrm>
+            <a:off x="9902952" y="4123944"/>
+            <a:ext cx="731520" cy="219456"/>
+          </a:xfrm>
+          <a:prstGeom prst="rect">
+            <a:avLst/>
+          </a:prstGeom>
+          <a:noFill/>
+          <a:ln/>
+        </p:spPr>
+        <p:txBody>
+          <a:bodyPr wrap="square" lIns="0" tIns="0" rIns="0" bIns="0" rtlCol="0" anchor="ctr"/>
+          <a:lstStyle/>
+          <a:p>
+            <a:pPr algn="r" indent="0" marL="0">
+              <a:buNone/>
+            </a:pPr>
+            <a:r>
+              <a:rPr lang="en-US" sz="1400" b="1" dirty="0">
+                <a:solidFill>
+                  <a:srgbClr val="595959"/>
+                </a:solidFill>
+                <a:latin typeface="Inter" pitchFamily="34" charset="0"/>
+                <a:ea typeface="Inter" pitchFamily="34" charset="-122"/>
+                <a:cs typeface="Inter" pitchFamily="34" charset="-120"/>
+              </a:rPr>
+              <a:t>Rate</a:t>
+            </a:r>
+            <a:endParaRPr lang="en-US" sz="1400" dirty="0"/>
+          </a:p>
+        </p:txBody>
+      </p:sp>
+      <p:sp>
+        <p:nvSpPr>
+          <p:cNvPr id="127" name="Text 125"/>
+          <p:cNvSpPr txBox="1"/>
+          <p:nvPr/>
+        </p:nvSpPr>
+        <p:spPr>
+          <a:xfrm>
+            <a:off x="10652760" y="4123944"/>
+            <a:ext cx="914400" cy="219456"/>
+          </a:xfrm>
+          <a:prstGeom prst="rect">
+            <a:avLst/>
+          </a:prstGeom>
+          <a:noFill/>
+          <a:ln/>
+        </p:spPr>
+        <p:txBody>
+          <a:bodyPr wrap="square" lIns="0" tIns="0" rIns="0" bIns="0" rtlCol="0" anchor="ctr"/>
+          <a:lstStyle/>
+          <a:p>
+            <a:pPr algn="r" indent="0" marL="0">
+              <a:buNone/>
+            </a:pPr>
+            <a:r>
+              <a:rPr lang="en-US" sz="1400" b="1" dirty="0">
+                <a:solidFill>
+                  <a:srgbClr val="595959"/>
+                </a:solidFill>
+                <a:latin typeface="Inter" pitchFamily="34" charset="0"/>
+                <a:ea typeface="Inter" pitchFamily="34" charset="-122"/>
+                <a:cs typeface="Inter" pitchFamily="34" charset="-120"/>
+              </a:rPr>
+              <a:t>Open</a:t>
+            </a:r>
+            <a:endParaRPr lang="en-US" sz="1400" dirty="0"/>
+          </a:p>
+        </p:txBody>
+      </p:sp>
+      <p:sp>
+        <p:nvSpPr>
           <p:cNvPr id="128" name="Text 126"/>
           <p:cNvSpPr txBox="1"/>
           <p:nvPr/>
         </p:nvSpPr>
         <p:spPr>
           <a:xfrm>
-            <a:off x="8211312" y="4297680"/>
-            <a:ext cx="1828800" cy="219456"/>
+            <a:off x="8211312" y="4352544"/>
+            <a:ext cx="1673352" cy="382219"/>
           </a:xfrm>
           <a:prstGeom prst="rect">
             <a:avLst/>
@@ -6313,7 +6313,46 @@
               <a:buNone/>
             </a:pPr>
             <a:r>
-              <a:rPr lang="en-US" sz="1400" b="1" dirty="0">
+              <a:rPr lang="en-US" sz="1300" dirty="0">
+                <a:solidFill>
+                  <a:srgbClr val="1A1A1A"/>
+                </a:solidFill>
+                <a:latin typeface="Inter" pitchFamily="34" charset="0"/>
+                <a:ea typeface="Inter" pitchFamily="34" charset="-122"/>
+                <a:cs typeface="Inter" pitchFamily="34" charset="-120"/>
+              </a:rPr>
+              <a:t>Nissan</a:t>
+            </a:r>
+            <a:endParaRPr lang="en-US" sz="1300" dirty="0"/>
+          </a:p>
+        </p:txBody>
+      </p:sp>
+      <p:sp>
+        <p:nvSpPr>
+          <p:cNvPr id="129" name="Text 127"/>
+          <p:cNvSpPr txBox="1"/>
+          <p:nvPr/>
+        </p:nvSpPr>
+        <p:spPr>
+          <a:xfrm>
+            <a:off x="9902952" y="4352544"/>
+            <a:ext cx="731520" cy="382219"/>
+          </a:xfrm>
+          <a:prstGeom prst="rect">
+            <a:avLst/>
+          </a:prstGeom>
+          <a:noFill/>
+          <a:ln/>
+        </p:spPr>
+        <p:txBody>
+          <a:bodyPr wrap="square" lIns="0" tIns="0" rIns="0" bIns="0" rtlCol="0" anchor="ctr"/>
+          <a:lstStyle/>
+          <a:p>
+            <a:pPr algn="r" indent="0" marL="0">
+              <a:buNone/>
+            </a:pPr>
+            <a:r>
+              <a:rPr lang="en-US" sz="1300" b="1" dirty="0">
                 <a:solidFill>
                   <a:srgbClr val="A82B26"/>
                 </a:solidFill>
@@ -6321,22 +6360,22 @@
                 <a:ea typeface="Inter" pitchFamily="34" charset="-122"/>
                 <a:cs typeface="Inter" pitchFamily="34" charset="-120"/>
               </a:rPr>
-              <a:t>BOTTOM 5</a:t>
-            </a:r>
-            <a:endParaRPr lang="en-US" sz="1400" dirty="0"/>
-          </a:p>
-        </p:txBody>
-      </p:sp>
-      <p:sp>
-        <p:nvSpPr>
-          <p:cNvPr id="129" name="Text 127"/>
-          <p:cNvSpPr txBox="1"/>
-          <p:nvPr/>
-        </p:nvSpPr>
-        <p:spPr>
-          <a:xfrm>
-            <a:off x="9902952" y="4297680"/>
-            <a:ext cx="731520" cy="219456"/>
+              <a:t>44.0%</a:t>
+            </a:r>
+            <a:endParaRPr lang="en-US" sz="1300" dirty="0"/>
+          </a:p>
+        </p:txBody>
+      </p:sp>
+      <p:sp>
+        <p:nvSpPr>
+          <p:cNvPr id="130" name="Text 128"/>
+          <p:cNvSpPr txBox="1"/>
+          <p:nvPr/>
+        </p:nvSpPr>
+        <p:spPr>
+          <a:xfrm>
+            <a:off x="10652760" y="4352544"/>
+            <a:ext cx="914400" cy="382219"/>
           </a:xfrm>
           <a:prstGeom prst="rect">
             <a:avLst/>
@@ -6352,7 +6391,7 @@
               <a:buNone/>
             </a:pPr>
             <a:r>
-              <a:rPr lang="en-US" sz="1400" b="1" dirty="0">
+              <a:rPr lang="en-US" sz="1200" dirty="0">
                 <a:solidFill>
                   <a:srgbClr val="595959"/>
                 </a:solidFill>
@@ -6360,22 +6399,61 @@
                 <a:ea typeface="Inter" pitchFamily="34" charset="-122"/>
                 <a:cs typeface="Inter" pitchFamily="34" charset="-120"/>
               </a:rPr>
-              <a:t>Rate</a:t>
-            </a:r>
-            <a:endParaRPr lang="en-US" sz="1400" dirty="0"/>
-          </a:p>
-        </p:txBody>
-      </p:sp>
-      <p:sp>
-        <p:nvSpPr>
-          <p:cNvPr id="130" name="Text 128"/>
-          <p:cNvSpPr txBox="1"/>
-          <p:nvPr/>
-        </p:nvSpPr>
-        <p:spPr>
-          <a:xfrm>
-            <a:off x="10652760" y="4297680"/>
-            <a:ext cx="914400" cy="219456"/>
+              <a:t>158</a:t>
+            </a:r>
+            <a:endParaRPr lang="en-US" sz="1200" dirty="0"/>
+          </a:p>
+        </p:txBody>
+      </p:sp>
+      <p:sp>
+        <p:nvSpPr>
+          <p:cNvPr id="131" name="Text 129"/>
+          <p:cNvSpPr txBox="1"/>
+          <p:nvPr/>
+        </p:nvSpPr>
+        <p:spPr>
+          <a:xfrm>
+            <a:off x="8211312" y="4734763"/>
+            <a:ext cx="1673352" cy="382219"/>
+          </a:xfrm>
+          <a:prstGeom prst="rect">
+            <a:avLst/>
+          </a:prstGeom>
+          <a:noFill/>
+          <a:ln/>
+        </p:spPr>
+        <p:txBody>
+          <a:bodyPr wrap="square" lIns="0" tIns="0" rIns="0" bIns="0" rtlCol="0" anchor="ctr"/>
+          <a:lstStyle/>
+          <a:p>
+            <a:pPr indent="0" marL="0">
+              <a:buNone/>
+            </a:pPr>
+            <a:r>
+              <a:rPr lang="en-US" sz="1300" dirty="0">
+                <a:solidFill>
+                  <a:srgbClr val="1A1A1A"/>
+                </a:solidFill>
+                <a:latin typeface="Inter" pitchFamily="34" charset="0"/>
+                <a:ea typeface="Inter" pitchFamily="34" charset="-122"/>
+                <a:cs typeface="Inter" pitchFamily="34" charset="-120"/>
+              </a:rPr>
+              <a:t>Prescott Hyundai</a:t>
+            </a:r>
+            <a:endParaRPr lang="en-US" sz="1300" dirty="0"/>
+          </a:p>
+        </p:txBody>
+      </p:sp>
+      <p:sp>
+        <p:nvSpPr>
+          <p:cNvPr id="132" name="Text 130"/>
+          <p:cNvSpPr txBox="1"/>
+          <p:nvPr/>
+        </p:nvSpPr>
+        <p:spPr>
+          <a:xfrm>
+            <a:off x="9902952" y="4734763"/>
+            <a:ext cx="731520" cy="382219"/>
           </a:xfrm>
           <a:prstGeom prst="rect">
             <a:avLst/>
@@ -6391,7 +6469,46 @@
               <a:buNone/>
             </a:pPr>
             <a:r>
-              <a:rPr lang="en-US" sz="1400" b="1" dirty="0">
+              <a:rPr lang="en-US" sz="1300" b="1" dirty="0">
+                <a:solidFill>
+                  <a:srgbClr val="A82B26"/>
+                </a:solidFill>
+                <a:latin typeface="Inter" pitchFamily="34" charset="0"/>
+                <a:ea typeface="Inter" pitchFamily="34" charset="-122"/>
+                <a:cs typeface="Inter" pitchFamily="34" charset="-120"/>
+              </a:rPr>
+              <a:t>78.2%</a:t>
+            </a:r>
+            <a:endParaRPr lang="en-US" sz="1300" dirty="0"/>
+          </a:p>
+        </p:txBody>
+      </p:sp>
+      <p:sp>
+        <p:nvSpPr>
+          <p:cNvPr id="133" name="Text 131"/>
+          <p:cNvSpPr txBox="1"/>
+          <p:nvPr/>
+        </p:nvSpPr>
+        <p:spPr>
+          <a:xfrm>
+            <a:off x="10652760" y="4734763"/>
+            <a:ext cx="914400" cy="382219"/>
+          </a:xfrm>
+          <a:prstGeom prst="rect">
+            <a:avLst/>
+          </a:prstGeom>
+          <a:noFill/>
+          <a:ln/>
+        </p:spPr>
+        <p:txBody>
+          <a:bodyPr wrap="square" lIns="0" tIns="0" rIns="0" bIns="0" rtlCol="0" anchor="ctr"/>
+          <a:lstStyle/>
+          <a:p>
+            <a:pPr algn="r" indent="0" marL="0">
+              <a:buNone/>
+            </a:pPr>
+            <a:r>
+              <a:rPr lang="en-US" sz="1200" dirty="0">
                 <a:solidFill>
                   <a:srgbClr val="595959"/>
                 </a:solidFill>
@@ -6399,22 +6516,22 @@
                 <a:ea typeface="Inter" pitchFamily="34" charset="-122"/>
                 <a:cs typeface="Inter" pitchFamily="34" charset="-120"/>
               </a:rPr>
-              <a:t>Open</a:t>
-            </a:r>
-            <a:endParaRPr lang="en-US" sz="1400" dirty="0"/>
-          </a:p>
-        </p:txBody>
-      </p:sp>
-      <p:sp>
-        <p:nvSpPr>
-          <p:cNvPr id="131" name="Text 129"/>
-          <p:cNvSpPr txBox="1"/>
-          <p:nvPr/>
-        </p:nvSpPr>
-        <p:spPr>
-          <a:xfrm>
-            <a:off x="8211312" y="4526280"/>
-            <a:ext cx="1673352" cy="347472"/>
+              <a:t>114</a:t>
+            </a:r>
+            <a:endParaRPr lang="en-US" sz="1200" dirty="0"/>
+          </a:p>
+        </p:txBody>
+      </p:sp>
+      <p:sp>
+        <p:nvSpPr>
+          <p:cNvPr id="134" name="Text 132"/>
+          <p:cNvSpPr txBox="1"/>
+          <p:nvPr/>
+        </p:nvSpPr>
+        <p:spPr>
+          <a:xfrm>
+            <a:off x="8211312" y="5116982"/>
+            <a:ext cx="1673352" cy="382219"/>
           </a:xfrm>
           <a:prstGeom prst="rect">
             <a:avLst/>
@@ -6438,7 +6555,7 @@
                 <a:ea typeface="Inter" pitchFamily="34" charset="-122"/>
                 <a:cs typeface="Inter" pitchFamily="34" charset="-120"/>
               </a:rPr>
-              <a:t>Nissan</a:t>
+              <a:t>CDR Post Falls</a:t>
             </a:r>
             <a:endParaRPr lang="en-US" sz="1300" dirty="0"/>
           </a:p>
@@ -6446,14 +6563,14 @@
       </p:sp>
       <p:sp>
         <p:nvSpPr>
-          <p:cNvPr id="132" name="Text 130"/>
-          <p:cNvSpPr txBox="1"/>
-          <p:nvPr/>
-        </p:nvSpPr>
-        <p:spPr>
-          <a:xfrm>
-            <a:off x="9902952" y="4526280"/>
-            <a:ext cx="731520" cy="347472"/>
+          <p:cNvPr id="135" name="Text 133"/>
+          <p:cNvSpPr txBox="1"/>
+          <p:nvPr/>
+        </p:nvSpPr>
+        <p:spPr>
+          <a:xfrm>
+            <a:off x="9902952" y="5116982"/>
+            <a:ext cx="731520" cy="382219"/>
           </a:xfrm>
           <a:prstGeom prst="rect">
             <a:avLst/>
@@ -6477,7 +6594,7 @@
                 <a:ea typeface="Inter" pitchFamily="34" charset="-122"/>
                 <a:cs typeface="Inter" pitchFamily="34" charset="-120"/>
               </a:rPr>
-              <a:t>44.0%</a:t>
+              <a:t>94.0%</a:t>
             </a:r>
             <a:endParaRPr lang="en-US" sz="1300" dirty="0"/>
           </a:p>
@@ -6485,14 +6602,14 @@
       </p:sp>
       <p:sp>
         <p:nvSpPr>
-          <p:cNvPr id="133" name="Text 131"/>
-          <p:cNvSpPr txBox="1"/>
-          <p:nvPr/>
-        </p:nvSpPr>
-        <p:spPr>
-          <a:xfrm>
-            <a:off x="10652760" y="4526280"/>
-            <a:ext cx="914400" cy="347472"/>
+          <p:cNvPr id="136" name="Text 134"/>
+          <p:cNvSpPr txBox="1"/>
+          <p:nvPr/>
+        </p:nvSpPr>
+        <p:spPr>
+          <a:xfrm>
+            <a:off x="10652760" y="5116982"/>
+            <a:ext cx="914400" cy="382219"/>
           </a:xfrm>
           <a:prstGeom prst="rect">
             <a:avLst/>
@@ -6516,7 +6633,7 @@
                 <a:ea typeface="Inter" pitchFamily="34" charset="-122"/>
                 <a:cs typeface="Inter" pitchFamily="34" charset="-120"/>
               </a:rPr>
-              <a:t>158</a:t>
+              <a:t>57</a:t>
             </a:r>
             <a:endParaRPr lang="en-US" sz="1200" dirty="0"/>
           </a:p>
@@ -6524,248 +6641,14 @@
       </p:sp>
       <p:sp>
         <p:nvSpPr>
-          <p:cNvPr id="134" name="Text 132"/>
-          <p:cNvSpPr txBox="1"/>
-          <p:nvPr/>
-        </p:nvSpPr>
-        <p:spPr>
-          <a:xfrm>
-            <a:off x="8211312" y="4873752"/>
-            <a:ext cx="1673352" cy="347472"/>
-          </a:xfrm>
-          <a:prstGeom prst="rect">
-            <a:avLst/>
-          </a:prstGeom>
-          <a:noFill/>
-          <a:ln/>
-        </p:spPr>
-        <p:txBody>
-          <a:bodyPr wrap="square" lIns="0" tIns="0" rIns="0" bIns="0" rtlCol="0" anchor="ctr"/>
-          <a:lstStyle/>
-          <a:p>
-            <a:pPr indent="0" marL="0">
-              <a:buNone/>
-            </a:pPr>
-            <a:r>
-              <a:rPr lang="en-US" sz="1300" dirty="0">
-                <a:solidFill>
-                  <a:srgbClr val="1A1A1A"/>
-                </a:solidFill>
-                <a:latin typeface="Inter" pitchFamily="34" charset="0"/>
-                <a:ea typeface="Inter" pitchFamily="34" charset="-122"/>
-                <a:cs typeface="Inter" pitchFamily="34" charset="-120"/>
-              </a:rPr>
-              <a:t>Prescott Hyundai</a:t>
-            </a:r>
-            <a:endParaRPr lang="en-US" sz="1300" dirty="0"/>
-          </a:p>
-        </p:txBody>
-      </p:sp>
-      <p:sp>
-        <p:nvSpPr>
-          <p:cNvPr id="135" name="Text 133"/>
-          <p:cNvSpPr txBox="1"/>
-          <p:nvPr/>
-        </p:nvSpPr>
-        <p:spPr>
-          <a:xfrm>
-            <a:off x="9902952" y="4873752"/>
-            <a:ext cx="731520" cy="347472"/>
-          </a:xfrm>
-          <a:prstGeom prst="rect">
-            <a:avLst/>
-          </a:prstGeom>
-          <a:noFill/>
-          <a:ln/>
-        </p:spPr>
-        <p:txBody>
-          <a:bodyPr wrap="square" lIns="0" tIns="0" rIns="0" bIns="0" rtlCol="0" anchor="ctr"/>
-          <a:lstStyle/>
-          <a:p>
-            <a:pPr algn="r" indent="0" marL="0">
-              <a:buNone/>
-            </a:pPr>
-            <a:r>
-              <a:rPr lang="en-US" sz="1300" b="1" dirty="0">
-                <a:solidFill>
-                  <a:srgbClr val="A82B26"/>
-                </a:solidFill>
-                <a:latin typeface="Inter" pitchFamily="34" charset="0"/>
-                <a:ea typeface="Inter" pitchFamily="34" charset="-122"/>
-                <a:cs typeface="Inter" pitchFamily="34" charset="-120"/>
-              </a:rPr>
-              <a:t>78.2%</a:t>
-            </a:r>
-            <a:endParaRPr lang="en-US" sz="1300" dirty="0"/>
-          </a:p>
-        </p:txBody>
-      </p:sp>
-      <p:sp>
-        <p:nvSpPr>
-          <p:cNvPr id="136" name="Text 134"/>
-          <p:cNvSpPr txBox="1"/>
-          <p:nvPr/>
-        </p:nvSpPr>
-        <p:spPr>
-          <a:xfrm>
-            <a:off x="10652760" y="4873752"/>
-            <a:ext cx="914400" cy="347472"/>
-          </a:xfrm>
-          <a:prstGeom prst="rect">
-            <a:avLst/>
-          </a:prstGeom>
-          <a:noFill/>
-          <a:ln/>
-        </p:spPr>
-        <p:txBody>
-          <a:bodyPr wrap="square" lIns="0" tIns="0" rIns="0" bIns="0" rtlCol="0" anchor="ctr"/>
-          <a:lstStyle/>
-          <a:p>
-            <a:pPr algn="r" indent="0" marL="0">
-              <a:buNone/>
-            </a:pPr>
-            <a:r>
-              <a:rPr lang="en-US" sz="1200" dirty="0">
-                <a:solidFill>
-                  <a:srgbClr val="595959"/>
-                </a:solidFill>
-                <a:latin typeface="Inter" pitchFamily="34" charset="0"/>
-                <a:ea typeface="Inter" pitchFamily="34" charset="-122"/>
-                <a:cs typeface="Inter" pitchFamily="34" charset="-120"/>
-              </a:rPr>
-              <a:t>114</a:t>
-            </a:r>
-            <a:endParaRPr lang="en-US" sz="1200" dirty="0"/>
-          </a:p>
-        </p:txBody>
-      </p:sp>
-      <p:sp>
-        <p:nvSpPr>
-          <p:cNvPr id="137" name="Text 135"/>
-          <p:cNvSpPr txBox="1"/>
-          <p:nvPr/>
-        </p:nvSpPr>
-        <p:spPr>
-          <a:xfrm>
-            <a:off x="8211312" y="5221224"/>
-            <a:ext cx="1673352" cy="347472"/>
-          </a:xfrm>
-          <a:prstGeom prst="rect">
-            <a:avLst/>
-          </a:prstGeom>
-          <a:noFill/>
-          <a:ln/>
-        </p:spPr>
-        <p:txBody>
-          <a:bodyPr wrap="square" lIns="0" tIns="0" rIns="0" bIns="0" rtlCol="0" anchor="ctr"/>
-          <a:lstStyle/>
-          <a:p>
-            <a:pPr indent="0" marL="0">
-              <a:buNone/>
-            </a:pPr>
-            <a:r>
-              <a:rPr lang="en-US" sz="1300" dirty="0">
-                <a:solidFill>
-                  <a:srgbClr val="1A1A1A"/>
-                </a:solidFill>
-                <a:latin typeface="Inter" pitchFamily="34" charset="0"/>
-                <a:ea typeface="Inter" pitchFamily="34" charset="-122"/>
-                <a:cs typeface="Inter" pitchFamily="34" charset="-120"/>
-              </a:rPr>
-              <a:t>CDR Post Falls</a:t>
-            </a:r>
-            <a:endParaRPr lang="en-US" sz="1300" dirty="0"/>
-          </a:p>
-        </p:txBody>
-      </p:sp>
-      <p:sp>
-        <p:nvSpPr>
-          <p:cNvPr id="138" name="Text 136"/>
-          <p:cNvSpPr txBox="1"/>
-          <p:nvPr/>
-        </p:nvSpPr>
-        <p:spPr>
-          <a:xfrm>
-            <a:off x="9902952" y="5221224"/>
-            <a:ext cx="731520" cy="347472"/>
-          </a:xfrm>
-          <a:prstGeom prst="rect">
-            <a:avLst/>
-          </a:prstGeom>
-          <a:noFill/>
-          <a:ln/>
-        </p:spPr>
-        <p:txBody>
-          <a:bodyPr wrap="square" lIns="0" tIns="0" rIns="0" bIns="0" rtlCol="0" anchor="ctr"/>
-          <a:lstStyle/>
-          <a:p>
-            <a:pPr algn="r" indent="0" marL="0">
-              <a:buNone/>
-            </a:pPr>
-            <a:r>
-              <a:rPr lang="en-US" sz="1300" b="1" dirty="0">
-                <a:solidFill>
-                  <a:srgbClr val="A82B26"/>
-                </a:solidFill>
-                <a:latin typeface="Inter" pitchFamily="34" charset="0"/>
-                <a:ea typeface="Inter" pitchFamily="34" charset="-122"/>
-                <a:cs typeface="Inter" pitchFamily="34" charset="-120"/>
-              </a:rPr>
-              <a:t>94.0%</a:t>
-            </a:r>
-            <a:endParaRPr lang="en-US" sz="1300" dirty="0"/>
-          </a:p>
-        </p:txBody>
-      </p:sp>
-      <p:sp>
-        <p:nvSpPr>
-          <p:cNvPr id="139" name="Text 137"/>
-          <p:cNvSpPr txBox="1"/>
-          <p:nvPr/>
-        </p:nvSpPr>
-        <p:spPr>
-          <a:xfrm>
-            <a:off x="10652760" y="5221224"/>
-            <a:ext cx="914400" cy="347472"/>
-          </a:xfrm>
-          <a:prstGeom prst="rect">
-            <a:avLst/>
-          </a:prstGeom>
-          <a:noFill/>
-          <a:ln/>
-        </p:spPr>
-        <p:txBody>
-          <a:bodyPr wrap="square" lIns="0" tIns="0" rIns="0" bIns="0" rtlCol="0" anchor="ctr"/>
-          <a:lstStyle/>
-          <a:p>
-            <a:pPr algn="r" indent="0" marL="0">
-              <a:buNone/>
-            </a:pPr>
-            <a:r>
-              <a:rPr lang="en-US" sz="1200" dirty="0">
-                <a:solidFill>
-                  <a:srgbClr val="595959"/>
-                </a:solidFill>
-                <a:latin typeface="Inter" pitchFamily="34" charset="0"/>
-                <a:ea typeface="Inter" pitchFamily="34" charset="-122"/>
-                <a:cs typeface="Inter" pitchFamily="34" charset="-120"/>
-              </a:rPr>
-              <a:t>57</a:t>
-            </a:r>
-            <a:endParaRPr lang="en-US" sz="1200" dirty="0"/>
-          </a:p>
-        </p:txBody>
-      </p:sp>
-      <p:sp>
-        <p:nvSpPr>
-          <p:cNvPr id="140" name="Shape 138"/>
+          <p:cNvPr id="137" name="Shape 135"/>
           <p:cNvSpPr/>
           <p:nvPr/>
         </p:nvSpPr>
         <p:spPr>
           <a:xfrm>
-            <a:off x="11612880" y="5257800"/>
-            <a:ext cx="54864" cy="274320"/>
+            <a:off x="11612880" y="5153558"/>
+            <a:ext cx="54864" cy="309067"/>
           </a:xfrm>
           <a:prstGeom prst="rect">
             <a:avLst/>
@@ -6778,14 +6661,14 @@
       </p:sp>
       <p:sp>
         <p:nvSpPr>
-          <p:cNvPr id="141" name="Text 139"/>
-          <p:cNvSpPr txBox="1"/>
-          <p:nvPr/>
-        </p:nvSpPr>
-        <p:spPr>
-          <a:xfrm>
-            <a:off x="8211312" y="5568696"/>
-            <a:ext cx="1673352" cy="347472"/>
+          <p:cNvPr id="138" name="Text 136"/>
+          <p:cNvSpPr txBox="1"/>
+          <p:nvPr/>
+        </p:nvSpPr>
+        <p:spPr>
+          <a:xfrm>
+            <a:off x="8211312" y="5499202"/>
+            <a:ext cx="1673352" cy="382219"/>
           </a:xfrm>
           <a:prstGeom prst="rect">
             <a:avLst/>
@@ -6817,14 +6700,14 @@
       </p:sp>
       <p:sp>
         <p:nvSpPr>
-          <p:cNvPr id="142" name="Text 140"/>
-          <p:cNvSpPr txBox="1"/>
-          <p:nvPr/>
-        </p:nvSpPr>
-        <p:spPr>
-          <a:xfrm>
-            <a:off x="9902952" y="5568696"/>
-            <a:ext cx="731520" cy="347472"/>
+          <p:cNvPr id="139" name="Text 137"/>
+          <p:cNvSpPr txBox="1"/>
+          <p:nvPr/>
+        </p:nvSpPr>
+        <p:spPr>
+          <a:xfrm>
+            <a:off x="9902952" y="5499202"/>
+            <a:ext cx="731520" cy="382219"/>
           </a:xfrm>
           <a:prstGeom prst="rect">
             <a:avLst/>
@@ -6856,14 +6739,14 @@
       </p:sp>
       <p:sp>
         <p:nvSpPr>
-          <p:cNvPr id="143" name="Text 141"/>
-          <p:cNvSpPr txBox="1"/>
-          <p:nvPr/>
-        </p:nvSpPr>
-        <p:spPr>
-          <a:xfrm>
-            <a:off x="10652760" y="5568696"/>
-            <a:ext cx="914400" cy="347472"/>
+          <p:cNvPr id="140" name="Text 138"/>
+          <p:cNvSpPr txBox="1"/>
+          <p:nvPr/>
+        </p:nvSpPr>
+        <p:spPr>
+          <a:xfrm>
+            <a:off x="10652760" y="5499202"/>
+            <a:ext cx="914400" cy="382219"/>
           </a:xfrm>
           <a:prstGeom prst="rect">
             <a:avLst/>
@@ -6895,14 +6778,14 @@
       </p:sp>
       <p:sp>
         <p:nvSpPr>
-          <p:cNvPr id="144" name="Shape 142"/>
+          <p:cNvPr id="141" name="Shape 139"/>
           <p:cNvSpPr/>
           <p:nvPr/>
         </p:nvSpPr>
         <p:spPr>
           <a:xfrm>
-            <a:off x="11612880" y="5605272"/>
-            <a:ext cx="54864" cy="274320"/>
+            <a:off x="11612880" y="5535778"/>
+            <a:ext cx="54864" cy="309067"/>
           </a:xfrm>
           <a:prstGeom prst="rect">
             <a:avLst/>
@@ -6915,14 +6798,14 @@
       </p:sp>
       <p:sp>
         <p:nvSpPr>
-          <p:cNvPr id="145" name="Text 143"/>
-          <p:cNvSpPr txBox="1"/>
-          <p:nvPr/>
-        </p:nvSpPr>
-        <p:spPr>
-          <a:xfrm>
-            <a:off x="8211312" y="5916168"/>
-            <a:ext cx="1673352" cy="347472"/>
+          <p:cNvPr id="142" name="Text 140"/>
+          <p:cNvSpPr txBox="1"/>
+          <p:nvPr/>
+        </p:nvSpPr>
+        <p:spPr>
+          <a:xfrm>
+            <a:off x="8211312" y="5881421"/>
+            <a:ext cx="1673352" cy="382219"/>
           </a:xfrm>
           <a:prstGeom prst="rect">
             <a:avLst/>
@@ -6954,14 +6837,14 @@
       </p:sp>
       <p:sp>
         <p:nvSpPr>
-          <p:cNvPr id="146" name="Text 144"/>
-          <p:cNvSpPr txBox="1"/>
-          <p:nvPr/>
-        </p:nvSpPr>
-        <p:spPr>
-          <a:xfrm>
-            <a:off x="9902952" y="5916168"/>
-            <a:ext cx="731520" cy="347472"/>
+          <p:cNvPr id="143" name="Text 141"/>
+          <p:cNvSpPr txBox="1"/>
+          <p:nvPr/>
+        </p:nvSpPr>
+        <p:spPr>
+          <a:xfrm>
+            <a:off x="9902952" y="5881421"/>
+            <a:ext cx="731520" cy="382219"/>
           </a:xfrm>
           <a:prstGeom prst="rect">
             <a:avLst/>
@@ -6993,14 +6876,14 @@
       </p:sp>
       <p:sp>
         <p:nvSpPr>
-          <p:cNvPr id="147" name="Text 145"/>
-          <p:cNvSpPr txBox="1"/>
-          <p:nvPr/>
-        </p:nvSpPr>
-        <p:spPr>
-          <a:xfrm>
-            <a:off x="10652760" y="5916168"/>
-            <a:ext cx="914400" cy="347472"/>
+          <p:cNvPr id="144" name="Text 142"/>
+          <p:cNvSpPr txBox="1"/>
+          <p:nvPr/>
+        </p:nvSpPr>
+        <p:spPr>
+          <a:xfrm>
+            <a:off x="10652760" y="5881421"/>
+            <a:ext cx="914400" cy="382219"/>
           </a:xfrm>
           <a:prstGeom prst="rect">
             <a:avLst/>
